--- a/Plantillas_pptx/IPN_Colaboradores Researchland_automatizada.pptx
+++ b/Plantillas_pptx/IPN_Colaboradores Researchland_automatizada.pptx
@@ -731,11 +731,6 @@
             <c:idx val="13"/>
             <c:invertIfNegative val="0"/>
             <c:bubble3D val="0"/>
-            <c:spPr>
-              <a:solidFill>
-                <a:srgbClr val="00B050"/>
-              </a:solidFill>
-            </c:spPr>
             <c:extLst>
               <c:ext xmlns:c16="http://schemas.microsoft.com/office/drawing/2014/chart" uri="{C3380CC4-5D6E-409C-BE32-E72D297353CC}">
                 <c16:uniqueId val="{0000001A-5B31-4268-8EE2-17B469D836AA}"/>
@@ -746,11 +741,6 @@
             <c:idx val="14"/>
             <c:invertIfNegative val="0"/>
             <c:bubble3D val="0"/>
-            <c:spPr>
-              <a:solidFill>
-                <a:srgbClr val="00B050"/>
-              </a:solidFill>
-            </c:spPr>
             <c:extLst>
               <c:ext xmlns:c16="http://schemas.microsoft.com/office/drawing/2014/chart" uri="{C3380CC4-5D6E-409C-BE32-E72D297353CC}">
                 <c16:uniqueId val="{0000000B-C915-43FF-9F28-A71DCD21181B}"/>
@@ -761,11 +751,6 @@
             <c:idx val="15"/>
             <c:invertIfNegative val="0"/>
             <c:bubble3D val="0"/>
-            <c:spPr>
-              <a:solidFill>
-                <a:srgbClr val="00B050"/>
-              </a:solidFill>
-            </c:spPr>
             <c:extLst>
               <c:ext xmlns:c16="http://schemas.microsoft.com/office/drawing/2014/chart" uri="{C3380CC4-5D6E-409C-BE32-E72D297353CC}">
                 <c16:uniqueId val="{0000000C-C915-43FF-9F28-A71DCD21181B}"/>
@@ -776,11 +761,6 @@
             <c:idx val="16"/>
             <c:invertIfNegative val="0"/>
             <c:bubble3D val="0"/>
-            <c:spPr>
-              <a:solidFill>
-                <a:srgbClr val="00B050"/>
-              </a:solidFill>
-            </c:spPr>
             <c:extLst>
               <c:ext xmlns:c16="http://schemas.microsoft.com/office/drawing/2014/chart" uri="{C3380CC4-5D6E-409C-BE32-E72D297353CC}">
                 <c16:uniqueId val="{0000000C-42D1-4421-AA76-26BDB5193875}"/>
@@ -1308,9 +1288,7 @@
             <c:bubble3D val="0"/>
             <c:spPr>
               <a:solidFill>
-                <a:schemeClr val="bg1">
-                  <a:lumMod val="65000"/>
-                </a:schemeClr>
+                <a:srgbClr val="FF0000"/>
               </a:solidFill>
             </c:spPr>
             <c:extLst>
@@ -1631,9 +1609,7 @@
             <c:bubble3D val="0"/>
             <c:spPr>
               <a:solidFill>
-                <a:schemeClr val="bg1">
-                  <a:lumMod val="65000"/>
-                </a:schemeClr>
+                <a:srgbClr val="00B050"/>
               </a:solidFill>
             </c:spPr>
             <c:extLst>
@@ -1648,9 +1624,7 @@
             <c:bubble3D val="0"/>
             <c:spPr>
               <a:solidFill>
-                <a:schemeClr val="bg1">
-                  <a:lumMod val="65000"/>
-                </a:schemeClr>
+                <a:srgbClr val="00B050"/>
               </a:solidFill>
             </c:spPr>
             <c:extLst>
@@ -1665,9 +1639,7 @@
             <c:bubble3D val="0"/>
             <c:spPr>
               <a:solidFill>
-                <a:schemeClr val="bg1">
-                  <a:lumMod val="65000"/>
-                </a:schemeClr>
+                <a:srgbClr val="00B050"/>
               </a:solidFill>
             </c:spPr>
             <c:extLst>
@@ -1682,9 +1654,7 @@
             <c:bubble3D val="0"/>
             <c:spPr>
               <a:solidFill>
-                <a:schemeClr val="bg1">
-                  <a:lumMod val="65000"/>
-                </a:schemeClr>
+                <a:srgbClr val="00B050"/>
               </a:solidFill>
             </c:spPr>
             <c:extLst>
@@ -1699,9 +1669,7 @@
             <c:bubble3D val="0"/>
             <c:spPr>
               <a:solidFill>
-                <a:schemeClr val="bg1">
-                  <a:lumMod val="65000"/>
-                </a:schemeClr>
+                <a:srgbClr val="00B050"/>
               </a:solidFill>
             </c:spPr>
             <c:extLst>
@@ -1716,9 +1684,7 @@
             <c:bubble3D val="0"/>
             <c:spPr>
               <a:solidFill>
-                <a:schemeClr val="bg1">
-                  <a:lumMod val="65000"/>
-                </a:schemeClr>
+                <a:srgbClr val="00B050"/>
               </a:solidFill>
             </c:spPr>
             <c:extLst>
@@ -1733,9 +1699,7 @@
             <c:bubble3D val="0"/>
             <c:spPr>
               <a:solidFill>
-                <a:schemeClr val="bg1">
-                  <a:lumMod val="65000"/>
-                </a:schemeClr>
+                <a:srgbClr val="00B050"/>
               </a:solidFill>
             </c:spPr>
             <c:extLst>
@@ -6626,7 +6590,7 @@
             <a:fld id="{77F42C5E-06A3-4F95-B26A-C7C5C507386D}" type="datetimeFigureOut">
               <a:rPr lang="es-MX" smtClean="0"/>
               <a:pPr/>
-              <a:t>31/07/2026</a:t>
+              <a:t>05/10/2026</a:t>
             </a:fld>
             <a:endParaRPr lang="es-MX"/>
           </a:p>
@@ -7746,7 +7710,7 @@
               <a:pPr>
                 <a:defRPr/>
               </a:pPr>
-              <a:t>31/07/2026</a:t>
+              <a:t>05/10/2026</a:t>
             </a:fld>
             <a:endParaRPr lang="es-ES"/>
           </a:p>
@@ -10994,7 +10958,7 @@
           <p:nvPr>
             <p:extLst>
               <p:ext uri="{D42A27DB-BD31-4B8C-83A1-F6EECF244321}">
-                <p14:modId xmlns:p14="http://schemas.microsoft.com/office/powerpoint/2010/main" val="3066423885"/>
+                <p14:modId xmlns:p14="http://schemas.microsoft.com/office/powerpoint/2010/main" val="602740842"/>
               </p:ext>
             </p:extLst>
           </p:nvPr>
@@ -11445,13 +11409,10 @@
                       <a:pPr algn="ctr" fontAlgn="b">
                         <a:buNone/>
                       </a:pPr>
-                      <a:r>
-                        <a:rPr lang="es-MX" sz="1000" b="1" i="0" u="none" strike="noStrike" dirty="0">
-                          <a:effectLst/>
-                          <a:latin typeface="Montserrat" panose="00000500000000000000" pitchFamily="2" charset="0"/>
-                        </a:rPr>
-                        <a:t>0</a:t>
-                      </a:r>
+                      <a:endParaRPr lang="es-MX" sz="1000" b="1" i="0" u="none" strike="noStrike" dirty="0">
+                        <a:effectLst/>
+                        <a:latin typeface="Montserrat" panose="00000500000000000000" pitchFamily="2" charset="0"/>
+                      </a:endParaRPr>
                     </a:p>
                   </a:txBody>
                   <a:tcPr marL="7620" marR="7620" marT="7620" marB="0" anchor="ctr">
@@ -11517,13 +11478,10 @@
                       <a:pPr algn="ctr" fontAlgn="b">
                         <a:buNone/>
                       </a:pPr>
-                      <a:r>
-                        <a:rPr lang="es-MX" sz="1000" b="1" i="0" u="none" strike="noStrike" dirty="0">
-                          <a:effectLst/>
-                          <a:latin typeface="Montserrat" panose="00000500000000000000" pitchFamily="2" charset="0"/>
-                        </a:rPr>
-                        <a:t>0.0%</a:t>
-                      </a:r>
+                      <a:endParaRPr lang="es-MX" sz="1000" b="1" i="0" u="none" strike="noStrike" dirty="0">
+                        <a:effectLst/>
+                        <a:latin typeface="Montserrat" panose="00000500000000000000" pitchFamily="2" charset="0"/>
+                      </a:endParaRPr>
                     </a:p>
                   </a:txBody>
                   <a:tcPr marL="7620" marR="7620" marT="7620" marB="0" anchor="ctr">
@@ -11594,13 +11552,10 @@
                       <a:pPr algn="ctr" fontAlgn="b">
                         <a:buNone/>
                       </a:pPr>
-                      <a:r>
-                        <a:rPr lang="es-MX" sz="1000" b="1" i="0" u="none" strike="noStrike" dirty="0">
-                          <a:effectLst/>
-                          <a:latin typeface="Montserrat" panose="00000500000000000000" pitchFamily="2" charset="0"/>
-                        </a:rPr>
-                        <a:t>0.0%</a:t>
-                      </a:r>
+                      <a:endParaRPr lang="es-MX" sz="1000" b="1" i="0" u="none" strike="noStrike" dirty="0">
+                        <a:effectLst/>
+                        <a:latin typeface="Montserrat" panose="00000500000000000000" pitchFamily="2" charset="0"/>
+                      </a:endParaRPr>
                     </a:p>
                   </a:txBody>
                   <a:tcPr marL="7620" marR="7620" marT="7620" marB="0" anchor="ctr">
@@ -11667,26 +11622,6 @@
                       <a:pPr algn="ctr" fontAlgn="b">
                         <a:buNone/>
                       </a:pPr>
-                      <a:r>
-                        <a:rPr lang="es-MX" sz="1000" b="1" i="0" u="none" strike="noStrike" dirty="0">
-                          <a:solidFill>
-                            <a:schemeClr val="tx1"/>
-                          </a:solidFill>
-                          <a:effectLst/>
-                          <a:latin typeface="Montserrat" panose="00000500000000000000" pitchFamily="2" charset="0"/>
-                        </a:rPr>
-                        <a:t>0.0 </a:t>
-                      </a:r>
-                      <a:r>
-                        <a:rPr lang="es-MX" sz="1000" b="1" i="0" u="none" strike="noStrike" dirty="0" err="1">
-                          <a:solidFill>
-                            <a:schemeClr val="tx1"/>
-                          </a:solidFill>
-                          <a:effectLst/>
-                          <a:latin typeface="Montserrat" panose="00000500000000000000" pitchFamily="2" charset="0"/>
-                        </a:rPr>
-                        <a:t>pp</a:t>
-                      </a:r>
                       <a:endParaRPr lang="es-MX" sz="1000" b="1" i="0" u="none" strike="noStrike" dirty="0">
                         <a:solidFill>
                           <a:schemeClr val="tx1"/>
@@ -11767,23 +11702,6 @@
                       <a:pPr algn="ctr" fontAlgn="b">
                         <a:buNone/>
                       </a:pPr>
-                      <a:r>
-                        <a:rPr kumimoji="0" lang="es-MX" sz="1000" b="0" i="0" u="none" strike="noStrike" kern="1200" cap="none" spc="0" normalizeH="0" baseline="0" noProof="0">
-                          <a:ln>
-                            <a:noFill/>
-                          </a:ln>
-                          <a:solidFill>
-                            <a:prstClr val="black"/>
-                          </a:solidFill>
-                          <a:effectLst/>
-                          <a:uLnTx/>
-                          <a:uFillTx/>
-                          <a:latin typeface="Montserrat" panose="00000500000000000000" pitchFamily="2" charset="0"/>
-                          <a:ea typeface="+mn-ea"/>
-                          <a:cs typeface="+mn-cs"/>
-                        </a:rPr>
-                        <a:t>0</a:t>
-                      </a:r>
                       <a:endParaRPr lang="es-MX" sz="1000" b="0" i="0" u="none" strike="noStrike" dirty="0">
                         <a:effectLst/>
                         <a:latin typeface="Montserrat" panose="00000500000000000000" pitchFamily="2" charset="0"/>
@@ -11853,23 +11771,6 @@
                       <a:pPr algn="ctr" fontAlgn="b">
                         <a:buNone/>
                       </a:pPr>
-                      <a:r>
-                        <a:rPr kumimoji="0" lang="es-MX" sz="1000" b="1" i="0" u="none" strike="noStrike" kern="1200" cap="none" spc="0" normalizeH="0" baseline="0" noProof="0">
-                          <a:ln>
-                            <a:noFill/>
-                          </a:ln>
-                          <a:solidFill>
-                            <a:prstClr val="black"/>
-                          </a:solidFill>
-                          <a:effectLst/>
-                          <a:uLnTx/>
-                          <a:uFillTx/>
-                          <a:latin typeface="Montserrat" panose="00000500000000000000" pitchFamily="2" charset="0"/>
-                          <a:ea typeface="+mn-ea"/>
-                          <a:cs typeface="+mn-cs"/>
-                        </a:rPr>
-                        <a:t>0.0%</a:t>
-                      </a:r>
                       <a:endParaRPr lang="es-MX" sz="1000" b="1" i="0" u="none" strike="noStrike" dirty="0">
                         <a:effectLst/>
                         <a:latin typeface="Montserrat" panose="00000500000000000000" pitchFamily="2" charset="0"/>
@@ -11944,23 +11845,6 @@
                       <a:pPr algn="ctr" fontAlgn="b">
                         <a:buNone/>
                       </a:pPr>
-                      <a:r>
-                        <a:rPr kumimoji="0" lang="es-MX" sz="1000" b="1" i="0" u="none" strike="noStrike" kern="1200" cap="none" spc="0" normalizeH="0" baseline="0" noProof="0">
-                          <a:ln>
-                            <a:noFill/>
-                          </a:ln>
-                          <a:solidFill>
-                            <a:prstClr val="black"/>
-                          </a:solidFill>
-                          <a:effectLst/>
-                          <a:uLnTx/>
-                          <a:uFillTx/>
-                          <a:latin typeface="Montserrat" panose="00000500000000000000" pitchFamily="2" charset="0"/>
-                          <a:ea typeface="+mn-ea"/>
-                          <a:cs typeface="+mn-cs"/>
-                        </a:rPr>
-                        <a:t>0.0%</a:t>
-                      </a:r>
                       <a:endParaRPr lang="es-MX" sz="1000" b="0" i="0" u="none" strike="noStrike" dirty="0">
                         <a:effectLst/>
                         <a:latin typeface="Montserrat" panose="00000500000000000000" pitchFamily="2" charset="0"/>
@@ -12031,23 +11915,6 @@
                       <a:pPr algn="ctr" fontAlgn="b">
                         <a:buNone/>
                       </a:pPr>
-                      <a:r>
-                        <a:rPr kumimoji="0" lang="es-MX" sz="1000" b="0" i="0" u="none" strike="noStrike" kern="1200" cap="none" spc="0" normalizeH="0" baseline="0" noProof="0">
-                          <a:ln>
-                            <a:noFill/>
-                          </a:ln>
-                          <a:solidFill>
-                            <a:schemeClr val="tx1"/>
-                          </a:solidFill>
-                          <a:effectLst/>
-                          <a:uLnTx/>
-                          <a:uFillTx/>
-                          <a:latin typeface="Montserrat" panose="00000500000000000000" pitchFamily="2" charset="0"/>
-                          <a:ea typeface="+mn-ea"/>
-                          <a:cs typeface="+mn-cs"/>
-                        </a:rPr>
-                        <a:t>0.0 pp</a:t>
-                      </a:r>
                       <a:endParaRPr lang="es-MX" sz="1000" b="0" i="0" u="none" strike="noStrike" dirty="0">
                         <a:solidFill>
                           <a:schemeClr val="tx1"/>
@@ -12128,23 +11995,6 @@
                       <a:pPr algn="ctr" fontAlgn="b">
                         <a:buNone/>
                       </a:pPr>
-                      <a:r>
-                        <a:rPr kumimoji="0" lang="es-MX" sz="1000" b="0" i="0" u="none" strike="noStrike" kern="1200" cap="none" spc="0" normalizeH="0" baseline="0" noProof="0">
-                          <a:ln>
-                            <a:noFill/>
-                          </a:ln>
-                          <a:solidFill>
-                            <a:prstClr val="black"/>
-                          </a:solidFill>
-                          <a:effectLst/>
-                          <a:uLnTx/>
-                          <a:uFillTx/>
-                          <a:latin typeface="Montserrat" panose="00000500000000000000" pitchFamily="2" charset="0"/>
-                          <a:ea typeface="+mn-ea"/>
-                          <a:cs typeface="+mn-cs"/>
-                        </a:rPr>
-                        <a:t>0</a:t>
-                      </a:r>
                       <a:endParaRPr lang="es-MX" sz="1000" b="0" i="0" u="none" strike="noStrike" dirty="0">
                         <a:effectLst/>
                         <a:latin typeface="Montserrat" panose="00000500000000000000" pitchFamily="2" charset="0"/>
@@ -12214,23 +12064,6 @@
                       <a:pPr algn="ctr" fontAlgn="b">
                         <a:buNone/>
                       </a:pPr>
-                      <a:r>
-                        <a:rPr kumimoji="0" lang="es-MX" sz="1000" b="1" i="0" u="none" strike="noStrike" kern="1200" cap="none" spc="0" normalizeH="0" baseline="0" noProof="0">
-                          <a:ln>
-                            <a:noFill/>
-                          </a:ln>
-                          <a:solidFill>
-                            <a:prstClr val="black"/>
-                          </a:solidFill>
-                          <a:effectLst/>
-                          <a:uLnTx/>
-                          <a:uFillTx/>
-                          <a:latin typeface="Montserrat" panose="00000500000000000000" pitchFamily="2" charset="0"/>
-                          <a:ea typeface="+mn-ea"/>
-                          <a:cs typeface="+mn-cs"/>
-                        </a:rPr>
-                        <a:t>0.0%</a:t>
-                      </a:r>
                       <a:endParaRPr lang="es-MX" sz="1000" b="1" i="0" u="none" strike="noStrike" dirty="0">
                         <a:effectLst/>
                         <a:latin typeface="Montserrat" panose="00000500000000000000" pitchFamily="2" charset="0"/>
@@ -12305,23 +12138,6 @@
                       <a:pPr algn="ctr" fontAlgn="b">
                         <a:buNone/>
                       </a:pPr>
-                      <a:r>
-                        <a:rPr kumimoji="0" lang="es-MX" sz="1000" b="1" i="0" u="none" strike="noStrike" kern="1200" cap="none" spc="0" normalizeH="0" baseline="0" noProof="0">
-                          <a:ln>
-                            <a:noFill/>
-                          </a:ln>
-                          <a:solidFill>
-                            <a:prstClr val="black"/>
-                          </a:solidFill>
-                          <a:effectLst/>
-                          <a:uLnTx/>
-                          <a:uFillTx/>
-                          <a:latin typeface="Montserrat" panose="00000500000000000000" pitchFamily="2" charset="0"/>
-                          <a:ea typeface="+mn-ea"/>
-                          <a:cs typeface="+mn-cs"/>
-                        </a:rPr>
-                        <a:t>0.0%</a:t>
-                      </a:r>
                       <a:endParaRPr lang="es-MX" sz="1000" b="0" i="0" u="none" strike="noStrike" dirty="0">
                         <a:effectLst/>
                         <a:latin typeface="Montserrat" panose="00000500000000000000" pitchFamily="2" charset="0"/>
@@ -12392,23 +12208,6 @@
                       <a:pPr algn="ctr" fontAlgn="b">
                         <a:buNone/>
                       </a:pPr>
-                      <a:r>
-                        <a:rPr kumimoji="0" lang="es-MX" sz="1000" b="0" i="0" u="none" strike="noStrike" kern="1200" cap="none" spc="0" normalizeH="0" baseline="0" noProof="0">
-                          <a:ln>
-                            <a:noFill/>
-                          </a:ln>
-                          <a:solidFill>
-                            <a:schemeClr val="tx1"/>
-                          </a:solidFill>
-                          <a:effectLst/>
-                          <a:uLnTx/>
-                          <a:uFillTx/>
-                          <a:latin typeface="Montserrat" panose="00000500000000000000" pitchFamily="2" charset="0"/>
-                          <a:ea typeface="+mn-ea"/>
-                          <a:cs typeface="+mn-cs"/>
-                        </a:rPr>
-                        <a:t>0.0 pp</a:t>
-                      </a:r>
                       <a:endParaRPr lang="es-MX" sz="1000" b="0" i="0" u="none" strike="noStrike" dirty="0">
                         <a:solidFill>
                           <a:schemeClr val="tx1"/>
@@ -12489,23 +12288,6 @@
                       <a:pPr algn="ctr" fontAlgn="b">
                         <a:buNone/>
                       </a:pPr>
-                      <a:r>
-                        <a:rPr kumimoji="0" lang="es-MX" sz="1000" b="0" i="0" u="none" strike="noStrike" kern="1200" cap="none" spc="0" normalizeH="0" baseline="0" noProof="0">
-                          <a:ln>
-                            <a:noFill/>
-                          </a:ln>
-                          <a:solidFill>
-                            <a:prstClr val="black"/>
-                          </a:solidFill>
-                          <a:effectLst/>
-                          <a:uLnTx/>
-                          <a:uFillTx/>
-                          <a:latin typeface="Montserrat" panose="00000500000000000000" pitchFamily="2" charset="0"/>
-                          <a:ea typeface="+mn-ea"/>
-                          <a:cs typeface="+mn-cs"/>
-                        </a:rPr>
-                        <a:t>0</a:t>
-                      </a:r>
                       <a:endParaRPr lang="es-MX" sz="1000" b="0" i="0" u="none" strike="noStrike" dirty="0">
                         <a:effectLst/>
                         <a:latin typeface="Montserrat" panose="00000500000000000000" pitchFamily="2" charset="0"/>
@@ -12575,23 +12357,6 @@
                       <a:pPr algn="ctr" fontAlgn="b">
                         <a:buNone/>
                       </a:pPr>
-                      <a:r>
-                        <a:rPr kumimoji="0" lang="es-MX" sz="1000" b="1" i="0" u="none" strike="noStrike" kern="1200" cap="none" spc="0" normalizeH="0" baseline="0" noProof="0">
-                          <a:ln>
-                            <a:noFill/>
-                          </a:ln>
-                          <a:solidFill>
-                            <a:prstClr val="black"/>
-                          </a:solidFill>
-                          <a:effectLst/>
-                          <a:uLnTx/>
-                          <a:uFillTx/>
-                          <a:latin typeface="Montserrat" panose="00000500000000000000" pitchFamily="2" charset="0"/>
-                          <a:ea typeface="+mn-ea"/>
-                          <a:cs typeface="+mn-cs"/>
-                        </a:rPr>
-                        <a:t>0.0%</a:t>
-                      </a:r>
                       <a:endParaRPr lang="es-MX" sz="1000" b="1" i="0" u="none" strike="noStrike" dirty="0">
                         <a:effectLst/>
                         <a:latin typeface="Montserrat" panose="00000500000000000000" pitchFamily="2" charset="0"/>
@@ -12666,23 +12431,6 @@
                       <a:pPr algn="ctr" fontAlgn="b">
                         <a:buNone/>
                       </a:pPr>
-                      <a:r>
-                        <a:rPr kumimoji="0" lang="es-MX" sz="1000" b="1" i="0" u="none" strike="noStrike" kern="1200" cap="none" spc="0" normalizeH="0" baseline="0" noProof="0">
-                          <a:ln>
-                            <a:noFill/>
-                          </a:ln>
-                          <a:solidFill>
-                            <a:prstClr val="black"/>
-                          </a:solidFill>
-                          <a:effectLst/>
-                          <a:uLnTx/>
-                          <a:uFillTx/>
-                          <a:latin typeface="Montserrat" panose="00000500000000000000" pitchFamily="2" charset="0"/>
-                          <a:ea typeface="+mn-ea"/>
-                          <a:cs typeface="+mn-cs"/>
-                        </a:rPr>
-                        <a:t>0.0%</a:t>
-                      </a:r>
                       <a:endParaRPr lang="es-MX" sz="1000" b="0" i="0" u="none" strike="noStrike" dirty="0">
                         <a:effectLst/>
                         <a:latin typeface="Montserrat" panose="00000500000000000000" pitchFamily="2" charset="0"/>
@@ -12753,23 +12501,6 @@
                       <a:pPr algn="ctr" fontAlgn="b">
                         <a:buNone/>
                       </a:pPr>
-                      <a:r>
-                        <a:rPr kumimoji="0" lang="es-MX" sz="1000" b="0" i="0" u="none" strike="noStrike" kern="1200" cap="none" spc="0" normalizeH="0" baseline="0" noProof="0">
-                          <a:ln>
-                            <a:noFill/>
-                          </a:ln>
-                          <a:solidFill>
-                            <a:schemeClr val="tx1"/>
-                          </a:solidFill>
-                          <a:effectLst/>
-                          <a:uLnTx/>
-                          <a:uFillTx/>
-                          <a:latin typeface="Montserrat" panose="00000500000000000000" pitchFamily="2" charset="0"/>
-                          <a:ea typeface="+mn-ea"/>
-                          <a:cs typeface="+mn-cs"/>
-                        </a:rPr>
-                        <a:t>0.0 pp</a:t>
-                      </a:r>
                       <a:endParaRPr lang="es-MX" sz="1000" b="0" i="0" u="none" strike="noStrike" dirty="0">
                         <a:solidFill>
                           <a:schemeClr val="tx1"/>
@@ -12850,23 +12581,6 @@
                       <a:pPr algn="ctr" fontAlgn="b">
                         <a:buNone/>
                       </a:pPr>
-                      <a:r>
-                        <a:rPr kumimoji="0" lang="es-MX" sz="1000" b="0" i="0" u="none" strike="noStrike" kern="1200" cap="none" spc="0" normalizeH="0" baseline="0" noProof="0">
-                          <a:ln>
-                            <a:noFill/>
-                          </a:ln>
-                          <a:solidFill>
-                            <a:prstClr val="black"/>
-                          </a:solidFill>
-                          <a:effectLst/>
-                          <a:uLnTx/>
-                          <a:uFillTx/>
-                          <a:latin typeface="Montserrat" panose="00000500000000000000" pitchFamily="2" charset="0"/>
-                          <a:ea typeface="+mn-ea"/>
-                          <a:cs typeface="+mn-cs"/>
-                        </a:rPr>
-                        <a:t>0</a:t>
-                      </a:r>
                       <a:endParaRPr lang="es-MX" sz="1000" b="0" i="0" u="none" strike="noStrike" dirty="0">
                         <a:effectLst/>
                         <a:latin typeface="Montserrat" panose="00000500000000000000" pitchFamily="2" charset="0"/>
@@ -12936,23 +12650,6 @@
                       <a:pPr algn="ctr" fontAlgn="b">
                         <a:buNone/>
                       </a:pPr>
-                      <a:r>
-                        <a:rPr kumimoji="0" lang="es-MX" sz="1000" b="1" i="0" u="none" strike="noStrike" kern="1200" cap="none" spc="0" normalizeH="0" baseline="0" noProof="0">
-                          <a:ln>
-                            <a:noFill/>
-                          </a:ln>
-                          <a:solidFill>
-                            <a:prstClr val="black"/>
-                          </a:solidFill>
-                          <a:effectLst/>
-                          <a:uLnTx/>
-                          <a:uFillTx/>
-                          <a:latin typeface="Montserrat" panose="00000500000000000000" pitchFamily="2" charset="0"/>
-                          <a:ea typeface="+mn-ea"/>
-                          <a:cs typeface="+mn-cs"/>
-                        </a:rPr>
-                        <a:t>0.0%</a:t>
-                      </a:r>
                       <a:endParaRPr lang="es-MX" sz="1000" b="1" i="0" u="none" strike="noStrike" dirty="0">
                         <a:effectLst/>
                         <a:latin typeface="Montserrat" panose="00000500000000000000" pitchFamily="2" charset="0"/>
@@ -13027,23 +12724,6 @@
                       <a:pPr algn="ctr" fontAlgn="b">
                         <a:buNone/>
                       </a:pPr>
-                      <a:r>
-                        <a:rPr kumimoji="0" lang="es-MX" sz="1000" b="1" i="0" u="none" strike="noStrike" kern="1200" cap="none" spc="0" normalizeH="0" baseline="0" noProof="0">
-                          <a:ln>
-                            <a:noFill/>
-                          </a:ln>
-                          <a:solidFill>
-                            <a:prstClr val="black"/>
-                          </a:solidFill>
-                          <a:effectLst/>
-                          <a:uLnTx/>
-                          <a:uFillTx/>
-                          <a:latin typeface="Montserrat" panose="00000500000000000000" pitchFamily="2" charset="0"/>
-                          <a:ea typeface="+mn-ea"/>
-                          <a:cs typeface="+mn-cs"/>
-                        </a:rPr>
-                        <a:t>0.0%</a:t>
-                      </a:r>
                       <a:endParaRPr lang="es-MX" sz="1000" b="0" i="0" u="none" strike="noStrike" dirty="0">
                         <a:effectLst/>
                         <a:latin typeface="Montserrat" panose="00000500000000000000" pitchFamily="2" charset="0"/>
@@ -13114,23 +12794,6 @@
                       <a:pPr algn="ctr" fontAlgn="b">
                         <a:buNone/>
                       </a:pPr>
-                      <a:r>
-                        <a:rPr kumimoji="0" lang="es-MX" sz="1000" b="0" i="0" u="none" strike="noStrike" kern="1200" cap="none" spc="0" normalizeH="0" baseline="0" noProof="0">
-                          <a:ln>
-                            <a:noFill/>
-                          </a:ln>
-                          <a:solidFill>
-                            <a:schemeClr val="tx1"/>
-                          </a:solidFill>
-                          <a:effectLst/>
-                          <a:uLnTx/>
-                          <a:uFillTx/>
-                          <a:latin typeface="Montserrat" panose="00000500000000000000" pitchFamily="2" charset="0"/>
-                          <a:ea typeface="+mn-ea"/>
-                          <a:cs typeface="+mn-cs"/>
-                        </a:rPr>
-                        <a:t>0.0 pp</a:t>
-                      </a:r>
                       <a:endParaRPr lang="es-MX" sz="1000" b="0" i="0" u="none" strike="noStrike" dirty="0">
                         <a:solidFill>
                           <a:schemeClr val="tx1"/>
@@ -13211,23 +12874,6 @@
                       <a:pPr algn="ctr" fontAlgn="b">
                         <a:buNone/>
                       </a:pPr>
-                      <a:r>
-                        <a:rPr kumimoji="0" lang="es-MX" sz="1000" b="0" i="0" u="none" strike="noStrike" kern="1200" cap="none" spc="0" normalizeH="0" baseline="0" noProof="0">
-                          <a:ln>
-                            <a:noFill/>
-                          </a:ln>
-                          <a:solidFill>
-                            <a:prstClr val="black"/>
-                          </a:solidFill>
-                          <a:effectLst/>
-                          <a:uLnTx/>
-                          <a:uFillTx/>
-                          <a:latin typeface="Montserrat" panose="00000500000000000000" pitchFamily="2" charset="0"/>
-                          <a:ea typeface="+mn-ea"/>
-                          <a:cs typeface="+mn-cs"/>
-                        </a:rPr>
-                        <a:t>0</a:t>
-                      </a:r>
                       <a:endParaRPr lang="es-MX" sz="1000" b="0" i="0" u="none" strike="noStrike" dirty="0">
                         <a:effectLst/>
                         <a:latin typeface="Montserrat" panose="00000500000000000000" pitchFamily="2" charset="0"/>
@@ -13297,23 +12943,6 @@
                       <a:pPr algn="ctr" fontAlgn="b">
                         <a:buNone/>
                       </a:pPr>
-                      <a:r>
-                        <a:rPr kumimoji="0" lang="es-MX" sz="1000" b="1" i="0" u="none" strike="noStrike" kern="1200" cap="none" spc="0" normalizeH="0" baseline="0" noProof="0">
-                          <a:ln>
-                            <a:noFill/>
-                          </a:ln>
-                          <a:solidFill>
-                            <a:prstClr val="black"/>
-                          </a:solidFill>
-                          <a:effectLst/>
-                          <a:uLnTx/>
-                          <a:uFillTx/>
-                          <a:latin typeface="Montserrat" panose="00000500000000000000" pitchFamily="2" charset="0"/>
-                          <a:ea typeface="+mn-ea"/>
-                          <a:cs typeface="+mn-cs"/>
-                        </a:rPr>
-                        <a:t>0.0%</a:t>
-                      </a:r>
                       <a:endParaRPr lang="es-MX" sz="1000" b="1" i="0" u="none" strike="noStrike" dirty="0">
                         <a:effectLst/>
                         <a:latin typeface="Montserrat" panose="00000500000000000000" pitchFamily="2" charset="0"/>
@@ -13388,23 +13017,6 @@
                       <a:pPr algn="ctr" fontAlgn="b">
                         <a:buNone/>
                       </a:pPr>
-                      <a:r>
-                        <a:rPr kumimoji="0" lang="es-MX" sz="1000" b="1" i="0" u="none" strike="noStrike" kern="1200" cap="none" spc="0" normalizeH="0" baseline="0" noProof="0">
-                          <a:ln>
-                            <a:noFill/>
-                          </a:ln>
-                          <a:solidFill>
-                            <a:prstClr val="black"/>
-                          </a:solidFill>
-                          <a:effectLst/>
-                          <a:uLnTx/>
-                          <a:uFillTx/>
-                          <a:latin typeface="Montserrat" panose="00000500000000000000" pitchFamily="2" charset="0"/>
-                          <a:ea typeface="+mn-ea"/>
-                          <a:cs typeface="+mn-cs"/>
-                        </a:rPr>
-                        <a:t>0.0%</a:t>
-                      </a:r>
                       <a:endParaRPr lang="es-MX" sz="1000" b="0" i="0" u="none" strike="noStrike" dirty="0">
                         <a:effectLst/>
                         <a:latin typeface="Montserrat" panose="00000500000000000000" pitchFamily="2" charset="0"/>
@@ -13475,23 +13087,6 @@
                       <a:pPr algn="ctr" fontAlgn="b">
                         <a:buNone/>
                       </a:pPr>
-                      <a:r>
-                        <a:rPr kumimoji="0" lang="es-MX" sz="1000" b="0" i="0" u="none" strike="noStrike" kern="1200" cap="none" spc="0" normalizeH="0" baseline="0" noProof="0">
-                          <a:ln>
-                            <a:noFill/>
-                          </a:ln>
-                          <a:solidFill>
-                            <a:schemeClr val="tx1"/>
-                          </a:solidFill>
-                          <a:effectLst/>
-                          <a:uLnTx/>
-                          <a:uFillTx/>
-                          <a:latin typeface="Montserrat" panose="00000500000000000000" pitchFamily="2" charset="0"/>
-                          <a:ea typeface="+mn-ea"/>
-                          <a:cs typeface="+mn-cs"/>
-                        </a:rPr>
-                        <a:t>0.0 pp</a:t>
-                      </a:r>
                       <a:endParaRPr lang="es-MX" sz="1000" b="0" i="0" u="none" strike="noStrike" dirty="0">
                         <a:solidFill>
                           <a:schemeClr val="tx1"/>
@@ -13572,23 +13167,6 @@
                       <a:pPr algn="ctr" fontAlgn="b">
                         <a:buNone/>
                       </a:pPr>
-                      <a:r>
-                        <a:rPr kumimoji="0" lang="es-MX" sz="1000" b="0" i="0" u="none" strike="noStrike" kern="1200" cap="none" spc="0" normalizeH="0" baseline="0" noProof="0">
-                          <a:ln>
-                            <a:noFill/>
-                          </a:ln>
-                          <a:solidFill>
-                            <a:prstClr val="black"/>
-                          </a:solidFill>
-                          <a:effectLst/>
-                          <a:uLnTx/>
-                          <a:uFillTx/>
-                          <a:latin typeface="Montserrat" panose="00000500000000000000" pitchFamily="2" charset="0"/>
-                          <a:ea typeface="+mn-ea"/>
-                          <a:cs typeface="+mn-cs"/>
-                        </a:rPr>
-                        <a:t>0</a:t>
-                      </a:r>
                       <a:endParaRPr lang="es-MX" sz="1000" b="0" i="0" u="none" strike="noStrike" dirty="0">
                         <a:effectLst/>
                         <a:latin typeface="Montserrat" panose="00000500000000000000" pitchFamily="2" charset="0"/>
@@ -13658,23 +13236,6 @@
                       <a:pPr algn="ctr" fontAlgn="b">
                         <a:buNone/>
                       </a:pPr>
-                      <a:r>
-                        <a:rPr kumimoji="0" lang="es-MX" sz="1000" b="1" i="0" u="none" strike="noStrike" kern="1200" cap="none" spc="0" normalizeH="0" baseline="0" noProof="0">
-                          <a:ln>
-                            <a:noFill/>
-                          </a:ln>
-                          <a:solidFill>
-                            <a:prstClr val="black"/>
-                          </a:solidFill>
-                          <a:effectLst/>
-                          <a:uLnTx/>
-                          <a:uFillTx/>
-                          <a:latin typeface="Montserrat" panose="00000500000000000000" pitchFamily="2" charset="0"/>
-                          <a:ea typeface="+mn-ea"/>
-                          <a:cs typeface="+mn-cs"/>
-                        </a:rPr>
-                        <a:t>0.0%</a:t>
-                      </a:r>
                       <a:endParaRPr lang="es-MX" sz="1000" b="1" i="0" u="none" strike="noStrike" dirty="0">
                         <a:effectLst/>
                         <a:latin typeface="Montserrat" panose="00000500000000000000" pitchFamily="2" charset="0"/>
@@ -13749,23 +13310,6 @@
                       <a:pPr algn="ctr" fontAlgn="b">
                         <a:buNone/>
                       </a:pPr>
-                      <a:r>
-                        <a:rPr kumimoji="0" lang="es-MX" sz="1000" b="1" i="0" u="none" strike="noStrike" kern="1200" cap="none" spc="0" normalizeH="0" baseline="0" noProof="0">
-                          <a:ln>
-                            <a:noFill/>
-                          </a:ln>
-                          <a:solidFill>
-                            <a:prstClr val="black"/>
-                          </a:solidFill>
-                          <a:effectLst/>
-                          <a:uLnTx/>
-                          <a:uFillTx/>
-                          <a:latin typeface="Montserrat" panose="00000500000000000000" pitchFamily="2" charset="0"/>
-                          <a:ea typeface="+mn-ea"/>
-                          <a:cs typeface="+mn-cs"/>
-                        </a:rPr>
-                        <a:t>0.0%</a:t>
-                      </a:r>
                       <a:endParaRPr lang="es-MX" sz="1000" b="0" i="0" u="none" strike="noStrike" dirty="0">
                         <a:effectLst/>
                         <a:latin typeface="Montserrat" panose="00000500000000000000" pitchFamily="2" charset="0"/>
@@ -13836,23 +13380,6 @@
                       <a:pPr algn="ctr" fontAlgn="b">
                         <a:buNone/>
                       </a:pPr>
-                      <a:r>
-                        <a:rPr kumimoji="0" lang="es-MX" sz="1000" b="0" i="0" u="none" strike="noStrike" kern="1200" cap="none" spc="0" normalizeH="0" baseline="0" noProof="0">
-                          <a:ln>
-                            <a:noFill/>
-                          </a:ln>
-                          <a:solidFill>
-                            <a:schemeClr val="tx1"/>
-                          </a:solidFill>
-                          <a:effectLst/>
-                          <a:uLnTx/>
-                          <a:uFillTx/>
-                          <a:latin typeface="Montserrat" panose="00000500000000000000" pitchFamily="2" charset="0"/>
-                          <a:ea typeface="+mn-ea"/>
-                          <a:cs typeface="+mn-cs"/>
-                        </a:rPr>
-                        <a:t>0.0 pp</a:t>
-                      </a:r>
                       <a:endParaRPr lang="es-MX" sz="1000" b="0" i="0" u="none" strike="noStrike" dirty="0">
                         <a:solidFill>
                           <a:schemeClr val="tx1"/>
@@ -13933,23 +13460,6 @@
                       <a:pPr algn="ctr" fontAlgn="b">
                         <a:buNone/>
                       </a:pPr>
-                      <a:r>
-                        <a:rPr kumimoji="0" lang="es-MX" sz="1000" b="0" i="0" u="none" strike="noStrike" kern="1200" cap="none" spc="0" normalizeH="0" baseline="0" noProof="0">
-                          <a:ln>
-                            <a:noFill/>
-                          </a:ln>
-                          <a:solidFill>
-                            <a:prstClr val="black"/>
-                          </a:solidFill>
-                          <a:effectLst/>
-                          <a:uLnTx/>
-                          <a:uFillTx/>
-                          <a:latin typeface="Montserrat" panose="00000500000000000000" pitchFamily="2" charset="0"/>
-                          <a:ea typeface="+mn-ea"/>
-                          <a:cs typeface="+mn-cs"/>
-                        </a:rPr>
-                        <a:t>0</a:t>
-                      </a:r>
                       <a:endParaRPr lang="es-MX" sz="1000" b="0" i="0" u="none" strike="noStrike" dirty="0">
                         <a:effectLst/>
                         <a:latin typeface="Montserrat" panose="00000500000000000000" pitchFamily="2" charset="0"/>
@@ -14019,23 +13529,6 @@
                       <a:pPr algn="ctr" fontAlgn="b">
                         <a:buNone/>
                       </a:pPr>
-                      <a:r>
-                        <a:rPr kumimoji="0" lang="es-MX" sz="1000" b="1" i="0" u="none" strike="noStrike" kern="1200" cap="none" spc="0" normalizeH="0" baseline="0" noProof="0">
-                          <a:ln>
-                            <a:noFill/>
-                          </a:ln>
-                          <a:solidFill>
-                            <a:prstClr val="black"/>
-                          </a:solidFill>
-                          <a:effectLst/>
-                          <a:uLnTx/>
-                          <a:uFillTx/>
-                          <a:latin typeface="Montserrat" panose="00000500000000000000" pitchFamily="2" charset="0"/>
-                          <a:ea typeface="+mn-ea"/>
-                          <a:cs typeface="+mn-cs"/>
-                        </a:rPr>
-                        <a:t>0.0%</a:t>
-                      </a:r>
                       <a:endParaRPr lang="es-MX" sz="1000" b="1" i="0" u="none" strike="noStrike" dirty="0">
                         <a:effectLst/>
                         <a:latin typeface="Montserrat" panose="00000500000000000000" pitchFamily="2" charset="0"/>
@@ -14110,23 +13603,6 @@
                       <a:pPr algn="ctr" fontAlgn="b">
                         <a:buNone/>
                       </a:pPr>
-                      <a:r>
-                        <a:rPr kumimoji="0" lang="es-MX" sz="1000" b="1" i="0" u="none" strike="noStrike" kern="1200" cap="none" spc="0" normalizeH="0" baseline="0" noProof="0">
-                          <a:ln>
-                            <a:noFill/>
-                          </a:ln>
-                          <a:solidFill>
-                            <a:prstClr val="black"/>
-                          </a:solidFill>
-                          <a:effectLst/>
-                          <a:uLnTx/>
-                          <a:uFillTx/>
-                          <a:latin typeface="Montserrat" panose="00000500000000000000" pitchFamily="2" charset="0"/>
-                          <a:ea typeface="+mn-ea"/>
-                          <a:cs typeface="+mn-cs"/>
-                        </a:rPr>
-                        <a:t>0.0%</a:t>
-                      </a:r>
                       <a:endParaRPr lang="es-MX" sz="1000" b="0" i="0" u="none" strike="noStrike" dirty="0">
                         <a:effectLst/>
                         <a:latin typeface="Montserrat" panose="00000500000000000000" pitchFamily="2" charset="0"/>
@@ -14197,23 +13673,6 @@
                       <a:pPr algn="ctr" fontAlgn="b">
                         <a:buNone/>
                       </a:pPr>
-                      <a:r>
-                        <a:rPr kumimoji="0" lang="es-MX" sz="1000" b="0" i="0" u="none" strike="noStrike" kern="1200" cap="none" spc="0" normalizeH="0" baseline="0" noProof="0">
-                          <a:ln>
-                            <a:noFill/>
-                          </a:ln>
-                          <a:solidFill>
-                            <a:schemeClr val="tx1"/>
-                          </a:solidFill>
-                          <a:effectLst/>
-                          <a:uLnTx/>
-                          <a:uFillTx/>
-                          <a:latin typeface="Montserrat" panose="00000500000000000000" pitchFamily="2" charset="0"/>
-                          <a:ea typeface="+mn-ea"/>
-                          <a:cs typeface="+mn-cs"/>
-                        </a:rPr>
-                        <a:t>0.0 pp</a:t>
-                      </a:r>
                       <a:endParaRPr lang="es-MX" sz="1000" b="0" i="0" u="none" strike="noStrike" dirty="0">
                         <a:solidFill>
                           <a:schemeClr val="tx1"/>
@@ -14294,23 +13753,6 @@
                       <a:pPr algn="ctr" fontAlgn="b">
                         <a:buNone/>
                       </a:pPr>
-                      <a:r>
-                        <a:rPr kumimoji="0" lang="es-MX" sz="1000" b="0" i="0" u="none" strike="noStrike" kern="1200" cap="none" spc="0" normalizeH="0" baseline="0" noProof="0">
-                          <a:ln>
-                            <a:noFill/>
-                          </a:ln>
-                          <a:solidFill>
-                            <a:prstClr val="black"/>
-                          </a:solidFill>
-                          <a:effectLst/>
-                          <a:uLnTx/>
-                          <a:uFillTx/>
-                          <a:latin typeface="Montserrat" panose="00000500000000000000" pitchFamily="2" charset="0"/>
-                          <a:ea typeface="+mn-ea"/>
-                          <a:cs typeface="+mn-cs"/>
-                        </a:rPr>
-                        <a:t>0</a:t>
-                      </a:r>
                       <a:endParaRPr lang="es-MX" sz="1000" b="0" i="0" u="none" strike="noStrike" dirty="0">
                         <a:effectLst/>
                         <a:latin typeface="Montserrat" panose="00000500000000000000" pitchFamily="2" charset="0"/>
@@ -14380,23 +13822,6 @@
                       <a:pPr algn="ctr" fontAlgn="b">
                         <a:buNone/>
                       </a:pPr>
-                      <a:r>
-                        <a:rPr kumimoji="0" lang="es-MX" sz="1000" b="1" i="0" u="none" strike="noStrike" kern="1200" cap="none" spc="0" normalizeH="0" baseline="0" noProof="0">
-                          <a:ln>
-                            <a:noFill/>
-                          </a:ln>
-                          <a:solidFill>
-                            <a:prstClr val="black"/>
-                          </a:solidFill>
-                          <a:effectLst/>
-                          <a:uLnTx/>
-                          <a:uFillTx/>
-                          <a:latin typeface="Montserrat" panose="00000500000000000000" pitchFamily="2" charset="0"/>
-                          <a:ea typeface="+mn-ea"/>
-                          <a:cs typeface="+mn-cs"/>
-                        </a:rPr>
-                        <a:t>0.0%</a:t>
-                      </a:r>
                       <a:endParaRPr lang="es-MX" sz="1000" b="1" i="0" u="none" strike="noStrike" dirty="0">
                         <a:effectLst/>
                         <a:latin typeface="Montserrat" panose="00000500000000000000" pitchFamily="2" charset="0"/>
@@ -14471,23 +13896,6 @@
                       <a:pPr algn="ctr" fontAlgn="b">
                         <a:buNone/>
                       </a:pPr>
-                      <a:r>
-                        <a:rPr kumimoji="0" lang="es-MX" sz="1000" b="1" i="0" u="none" strike="noStrike" kern="1200" cap="none" spc="0" normalizeH="0" baseline="0" noProof="0">
-                          <a:ln>
-                            <a:noFill/>
-                          </a:ln>
-                          <a:solidFill>
-                            <a:prstClr val="black"/>
-                          </a:solidFill>
-                          <a:effectLst/>
-                          <a:uLnTx/>
-                          <a:uFillTx/>
-                          <a:latin typeface="Montserrat" panose="00000500000000000000" pitchFamily="2" charset="0"/>
-                          <a:ea typeface="+mn-ea"/>
-                          <a:cs typeface="+mn-cs"/>
-                        </a:rPr>
-                        <a:t>0.0%</a:t>
-                      </a:r>
                       <a:endParaRPr lang="es-MX" sz="1000" b="0" i="0" u="none" strike="noStrike" dirty="0">
                         <a:effectLst/>
                         <a:latin typeface="Montserrat" panose="00000500000000000000" pitchFamily="2" charset="0"/>
@@ -14558,23 +13966,6 @@
                       <a:pPr algn="ctr" fontAlgn="b">
                         <a:buNone/>
                       </a:pPr>
-                      <a:r>
-                        <a:rPr kumimoji="0" lang="es-MX" sz="1000" b="0" i="0" u="none" strike="noStrike" kern="1200" cap="none" spc="0" normalizeH="0" baseline="0" noProof="0">
-                          <a:ln>
-                            <a:noFill/>
-                          </a:ln>
-                          <a:solidFill>
-                            <a:schemeClr val="tx1"/>
-                          </a:solidFill>
-                          <a:effectLst/>
-                          <a:uLnTx/>
-                          <a:uFillTx/>
-                          <a:latin typeface="Montserrat" panose="00000500000000000000" pitchFamily="2" charset="0"/>
-                          <a:ea typeface="+mn-ea"/>
-                          <a:cs typeface="+mn-cs"/>
-                        </a:rPr>
-                        <a:t>0.0 pp</a:t>
-                      </a:r>
                       <a:endParaRPr lang="es-MX" sz="1000" b="0" i="0" u="none" strike="noStrike" dirty="0">
                         <a:solidFill>
                           <a:schemeClr val="tx1"/>
@@ -14655,23 +14046,6 @@
                       <a:pPr algn="ctr" fontAlgn="b">
                         <a:buNone/>
                       </a:pPr>
-                      <a:r>
-                        <a:rPr kumimoji="0" lang="es-MX" sz="1000" b="0" i="0" u="none" strike="noStrike" kern="1200" cap="none" spc="0" normalizeH="0" baseline="0" noProof="0">
-                          <a:ln>
-                            <a:noFill/>
-                          </a:ln>
-                          <a:solidFill>
-                            <a:prstClr val="black"/>
-                          </a:solidFill>
-                          <a:effectLst/>
-                          <a:uLnTx/>
-                          <a:uFillTx/>
-                          <a:latin typeface="Montserrat" panose="00000500000000000000" pitchFamily="2" charset="0"/>
-                          <a:ea typeface="+mn-ea"/>
-                          <a:cs typeface="+mn-cs"/>
-                        </a:rPr>
-                        <a:t>0</a:t>
-                      </a:r>
                       <a:endParaRPr lang="es-MX" sz="1000" b="0" i="0" u="none" strike="noStrike" dirty="0">
                         <a:effectLst/>
                         <a:latin typeface="Montserrat" panose="00000500000000000000" pitchFamily="2" charset="0"/>
@@ -14741,23 +14115,6 @@
                       <a:pPr algn="ctr" fontAlgn="b">
                         <a:buNone/>
                       </a:pPr>
-                      <a:r>
-                        <a:rPr kumimoji="0" lang="es-MX" sz="1000" b="1" i="0" u="none" strike="noStrike" kern="1200" cap="none" spc="0" normalizeH="0" baseline="0" noProof="0">
-                          <a:ln>
-                            <a:noFill/>
-                          </a:ln>
-                          <a:solidFill>
-                            <a:prstClr val="black"/>
-                          </a:solidFill>
-                          <a:effectLst/>
-                          <a:uLnTx/>
-                          <a:uFillTx/>
-                          <a:latin typeface="Montserrat" panose="00000500000000000000" pitchFamily="2" charset="0"/>
-                          <a:ea typeface="+mn-ea"/>
-                          <a:cs typeface="+mn-cs"/>
-                        </a:rPr>
-                        <a:t>0.0%</a:t>
-                      </a:r>
                       <a:endParaRPr lang="es-MX" sz="1000" b="1" i="0" u="none" strike="noStrike" dirty="0">
                         <a:effectLst/>
                         <a:latin typeface="Montserrat" panose="00000500000000000000" pitchFamily="2" charset="0"/>
@@ -14832,23 +14189,6 @@
                       <a:pPr algn="ctr" fontAlgn="b">
                         <a:buNone/>
                       </a:pPr>
-                      <a:r>
-                        <a:rPr kumimoji="0" lang="es-MX" sz="1000" b="1" i="0" u="none" strike="noStrike" kern="1200" cap="none" spc="0" normalizeH="0" baseline="0" noProof="0">
-                          <a:ln>
-                            <a:noFill/>
-                          </a:ln>
-                          <a:solidFill>
-                            <a:prstClr val="black"/>
-                          </a:solidFill>
-                          <a:effectLst/>
-                          <a:uLnTx/>
-                          <a:uFillTx/>
-                          <a:latin typeface="Montserrat" panose="00000500000000000000" pitchFamily="2" charset="0"/>
-                          <a:ea typeface="+mn-ea"/>
-                          <a:cs typeface="+mn-cs"/>
-                        </a:rPr>
-                        <a:t>0.0%</a:t>
-                      </a:r>
                       <a:endParaRPr lang="es-MX" sz="1000" b="0" i="0" u="none" strike="noStrike" dirty="0">
                         <a:effectLst/>
                         <a:latin typeface="Montserrat" panose="00000500000000000000" pitchFamily="2" charset="0"/>
@@ -14919,23 +14259,6 @@
                       <a:pPr algn="ctr" fontAlgn="b">
                         <a:buNone/>
                       </a:pPr>
-                      <a:r>
-                        <a:rPr kumimoji="0" lang="es-MX" sz="1000" b="0" i="0" u="none" strike="noStrike" kern="1200" cap="none" spc="0" normalizeH="0" baseline="0" noProof="0">
-                          <a:ln>
-                            <a:noFill/>
-                          </a:ln>
-                          <a:solidFill>
-                            <a:schemeClr val="tx1"/>
-                          </a:solidFill>
-                          <a:effectLst/>
-                          <a:uLnTx/>
-                          <a:uFillTx/>
-                          <a:latin typeface="Montserrat" panose="00000500000000000000" pitchFamily="2" charset="0"/>
-                          <a:ea typeface="+mn-ea"/>
-                          <a:cs typeface="+mn-cs"/>
-                        </a:rPr>
-                        <a:t>0.0 pp</a:t>
-                      </a:r>
                       <a:endParaRPr lang="es-MX" sz="1000" b="0" i="0" u="none" strike="noStrike" dirty="0">
                         <a:solidFill>
                           <a:schemeClr val="tx1"/>
@@ -15016,23 +14339,6 @@
                       <a:pPr algn="ctr" fontAlgn="b">
                         <a:buNone/>
                       </a:pPr>
-                      <a:r>
-                        <a:rPr kumimoji="0" lang="es-MX" sz="1000" b="0" i="0" u="none" strike="noStrike" kern="1200" cap="none" spc="0" normalizeH="0" baseline="0" noProof="0">
-                          <a:ln>
-                            <a:noFill/>
-                          </a:ln>
-                          <a:solidFill>
-                            <a:prstClr val="black"/>
-                          </a:solidFill>
-                          <a:effectLst/>
-                          <a:uLnTx/>
-                          <a:uFillTx/>
-                          <a:latin typeface="Montserrat" panose="00000500000000000000" pitchFamily="2" charset="0"/>
-                          <a:ea typeface="+mn-ea"/>
-                          <a:cs typeface="+mn-cs"/>
-                        </a:rPr>
-                        <a:t>0</a:t>
-                      </a:r>
                       <a:endParaRPr lang="es-MX" sz="1000" b="0" i="0" u="none" strike="noStrike" dirty="0">
                         <a:effectLst/>
                         <a:latin typeface="Montserrat" panose="00000500000000000000" pitchFamily="2" charset="0"/>
@@ -15102,23 +14408,6 @@
                       <a:pPr algn="ctr" fontAlgn="b">
                         <a:buNone/>
                       </a:pPr>
-                      <a:r>
-                        <a:rPr kumimoji="0" lang="es-MX" sz="1000" b="1" i="0" u="none" strike="noStrike" kern="1200" cap="none" spc="0" normalizeH="0" baseline="0" noProof="0">
-                          <a:ln>
-                            <a:noFill/>
-                          </a:ln>
-                          <a:solidFill>
-                            <a:prstClr val="black"/>
-                          </a:solidFill>
-                          <a:effectLst/>
-                          <a:uLnTx/>
-                          <a:uFillTx/>
-                          <a:latin typeface="Montserrat" panose="00000500000000000000" pitchFamily="2" charset="0"/>
-                          <a:ea typeface="+mn-ea"/>
-                          <a:cs typeface="+mn-cs"/>
-                        </a:rPr>
-                        <a:t>0.0%</a:t>
-                      </a:r>
                       <a:endParaRPr lang="es-MX" sz="1000" b="1" i="0" u="none" strike="noStrike" dirty="0">
                         <a:effectLst/>
                         <a:latin typeface="Montserrat" panose="00000500000000000000" pitchFamily="2" charset="0"/>
@@ -15191,23 +14480,6 @@
                     <a:lstStyle/>
                     <a:p>
                       <a:pPr algn="ctr" fontAlgn="b"/>
-                      <a:r>
-                        <a:rPr kumimoji="0" lang="es-MX" sz="1000" b="1" i="0" u="none" strike="noStrike" kern="1200" cap="none" spc="0" normalizeH="0" baseline="0" noProof="0">
-                          <a:ln>
-                            <a:noFill/>
-                          </a:ln>
-                          <a:solidFill>
-                            <a:prstClr val="black"/>
-                          </a:solidFill>
-                          <a:effectLst/>
-                          <a:uLnTx/>
-                          <a:uFillTx/>
-                          <a:latin typeface="Montserrat" panose="00000500000000000000" pitchFamily="2" charset="0"/>
-                          <a:ea typeface="+mn-ea"/>
-                          <a:cs typeface="+mn-cs"/>
-                        </a:rPr>
-                        <a:t>0.0%</a:t>
-                      </a:r>
                       <a:endParaRPr lang="es-MX" sz="900" b="0" i="0" u="none" strike="noStrike" dirty="0">
                         <a:effectLst/>
                         <a:latin typeface="Montserrat" panose="00000500000000000000" pitchFamily="2" charset="0"/>
@@ -15292,23 +14564,6 @@
                         <a:tabLst/>
                         <a:defRPr/>
                       </a:pPr>
-                      <a:r>
-                        <a:rPr kumimoji="0" lang="es-MX" sz="1000" b="0" i="0" u="none" strike="noStrike" kern="1200" cap="none" spc="0" normalizeH="0" baseline="0" noProof="0">
-                          <a:ln>
-                            <a:noFill/>
-                          </a:ln>
-                          <a:solidFill>
-                            <a:schemeClr val="tx1"/>
-                          </a:solidFill>
-                          <a:effectLst/>
-                          <a:uLnTx/>
-                          <a:uFillTx/>
-                          <a:latin typeface="Montserrat" panose="00000500000000000000" pitchFamily="2" charset="0"/>
-                          <a:ea typeface="+mn-ea"/>
-                          <a:cs typeface="+mn-cs"/>
-                        </a:rPr>
-                        <a:t>0.0 pp</a:t>
-                      </a:r>
                       <a:endParaRPr kumimoji="0" lang="es-MX" sz="900" b="0" i="0" u="none" strike="noStrike" kern="1200" cap="none" spc="0" normalizeH="0" baseline="0" noProof="0" dirty="0">
                         <a:ln>
                           <a:noFill/>
@@ -15396,23 +14651,6 @@
                       <a:pPr algn="ctr" fontAlgn="b">
                         <a:buNone/>
                       </a:pPr>
-                      <a:r>
-                        <a:rPr kumimoji="0" lang="es-MX" sz="1000" b="0" i="0" u="none" strike="noStrike" kern="1200" cap="none" spc="0" normalizeH="0" baseline="0" noProof="0">
-                          <a:ln>
-                            <a:noFill/>
-                          </a:ln>
-                          <a:solidFill>
-                            <a:prstClr val="black"/>
-                          </a:solidFill>
-                          <a:effectLst/>
-                          <a:uLnTx/>
-                          <a:uFillTx/>
-                          <a:latin typeface="Montserrat" panose="00000500000000000000" pitchFamily="2" charset="0"/>
-                          <a:ea typeface="+mn-ea"/>
-                          <a:cs typeface="+mn-cs"/>
-                        </a:rPr>
-                        <a:t>0</a:t>
-                      </a:r>
                       <a:endParaRPr lang="es-MX" sz="1000" b="0" i="0" u="none" strike="noStrike" dirty="0">
                         <a:effectLst/>
                         <a:latin typeface="Montserrat" panose="00000500000000000000" pitchFamily="2" charset="0"/>
@@ -15482,23 +14720,6 @@
                       <a:pPr algn="ctr" fontAlgn="b">
                         <a:buNone/>
                       </a:pPr>
-                      <a:r>
-                        <a:rPr kumimoji="0" lang="es-MX" sz="1000" b="1" i="0" u="none" strike="noStrike" kern="1200" cap="none" spc="0" normalizeH="0" baseline="0" noProof="0">
-                          <a:ln>
-                            <a:noFill/>
-                          </a:ln>
-                          <a:solidFill>
-                            <a:prstClr val="black"/>
-                          </a:solidFill>
-                          <a:effectLst/>
-                          <a:uLnTx/>
-                          <a:uFillTx/>
-                          <a:latin typeface="Montserrat" panose="00000500000000000000" pitchFamily="2" charset="0"/>
-                          <a:ea typeface="+mn-ea"/>
-                          <a:cs typeface="+mn-cs"/>
-                        </a:rPr>
-                        <a:t>0.0%</a:t>
-                      </a:r>
                       <a:endParaRPr lang="es-MX" sz="1000" b="1" i="0" u="none" strike="noStrike" dirty="0">
                         <a:effectLst/>
                         <a:latin typeface="Montserrat" panose="00000500000000000000" pitchFamily="2" charset="0"/>
@@ -15573,23 +14794,6 @@
                       <a:pPr algn="ctr" fontAlgn="b">
                         <a:buNone/>
                       </a:pPr>
-                      <a:r>
-                        <a:rPr kumimoji="0" lang="es-MX" sz="1000" b="1" i="0" u="none" strike="noStrike" kern="1200" cap="none" spc="0" normalizeH="0" baseline="0" noProof="0">
-                          <a:ln>
-                            <a:noFill/>
-                          </a:ln>
-                          <a:solidFill>
-                            <a:prstClr val="black"/>
-                          </a:solidFill>
-                          <a:effectLst/>
-                          <a:uLnTx/>
-                          <a:uFillTx/>
-                          <a:latin typeface="Montserrat" panose="00000500000000000000" pitchFamily="2" charset="0"/>
-                          <a:ea typeface="+mn-ea"/>
-                          <a:cs typeface="+mn-cs"/>
-                        </a:rPr>
-                        <a:t>0.0%</a:t>
-                      </a:r>
                       <a:endParaRPr lang="es-MX" sz="1000" b="0" i="0" u="none" strike="noStrike" dirty="0">
                         <a:effectLst/>
                         <a:latin typeface="Montserrat" panose="00000500000000000000" pitchFamily="2" charset="0"/>
@@ -15660,23 +14864,6 @@
                       <a:pPr algn="ctr" fontAlgn="b">
                         <a:buNone/>
                       </a:pPr>
-                      <a:r>
-                        <a:rPr kumimoji="0" lang="es-MX" sz="1000" b="0" i="0" u="none" strike="noStrike" kern="1200" cap="none" spc="0" normalizeH="0" baseline="0" noProof="0">
-                          <a:ln>
-                            <a:noFill/>
-                          </a:ln>
-                          <a:solidFill>
-                            <a:schemeClr val="tx1"/>
-                          </a:solidFill>
-                          <a:effectLst/>
-                          <a:uLnTx/>
-                          <a:uFillTx/>
-                          <a:latin typeface="Montserrat" panose="00000500000000000000" pitchFamily="2" charset="0"/>
-                          <a:ea typeface="+mn-ea"/>
-                          <a:cs typeface="+mn-cs"/>
-                        </a:rPr>
-                        <a:t>0.0 pp</a:t>
-                      </a:r>
                       <a:endParaRPr lang="es-MX" sz="1000" b="0" i="0" u="none" strike="noStrike" dirty="0">
                         <a:solidFill>
                           <a:schemeClr val="tx1"/>
@@ -15757,23 +14944,6 @@
                       <a:pPr algn="ctr" fontAlgn="b">
                         <a:buNone/>
                       </a:pPr>
-                      <a:r>
-                        <a:rPr kumimoji="0" lang="es-MX" sz="1000" b="0" i="0" u="none" strike="noStrike" kern="1200" cap="none" spc="0" normalizeH="0" baseline="0" noProof="0">
-                          <a:ln>
-                            <a:noFill/>
-                          </a:ln>
-                          <a:solidFill>
-                            <a:prstClr val="black"/>
-                          </a:solidFill>
-                          <a:effectLst/>
-                          <a:uLnTx/>
-                          <a:uFillTx/>
-                          <a:latin typeface="Montserrat" panose="00000500000000000000" pitchFamily="2" charset="0"/>
-                          <a:ea typeface="+mn-ea"/>
-                          <a:cs typeface="+mn-cs"/>
-                        </a:rPr>
-                        <a:t>0</a:t>
-                      </a:r>
                       <a:endParaRPr lang="es-MX" sz="1000" b="0" i="0" u="none" strike="noStrike" dirty="0">
                         <a:effectLst/>
                         <a:latin typeface="Montserrat" panose="00000500000000000000" pitchFamily="2" charset="0"/>
@@ -15843,23 +15013,6 @@
                       <a:pPr algn="ctr" fontAlgn="b">
                         <a:buNone/>
                       </a:pPr>
-                      <a:r>
-                        <a:rPr kumimoji="0" lang="es-MX" sz="1000" b="1" i="0" u="none" strike="noStrike" kern="1200" cap="none" spc="0" normalizeH="0" baseline="0" noProof="0">
-                          <a:ln>
-                            <a:noFill/>
-                          </a:ln>
-                          <a:solidFill>
-                            <a:prstClr val="black"/>
-                          </a:solidFill>
-                          <a:effectLst/>
-                          <a:uLnTx/>
-                          <a:uFillTx/>
-                          <a:latin typeface="Montserrat" panose="00000500000000000000" pitchFamily="2" charset="0"/>
-                          <a:ea typeface="+mn-ea"/>
-                          <a:cs typeface="+mn-cs"/>
-                        </a:rPr>
-                        <a:t>0.0%</a:t>
-                      </a:r>
                       <a:endParaRPr lang="es-MX" sz="1000" b="1" i="0" u="none" strike="noStrike" dirty="0">
                         <a:effectLst/>
                         <a:latin typeface="Montserrat" panose="00000500000000000000" pitchFamily="2" charset="0"/>
@@ -15934,23 +15087,6 @@
                       <a:pPr algn="ctr" fontAlgn="b">
                         <a:buNone/>
                       </a:pPr>
-                      <a:r>
-                        <a:rPr kumimoji="0" lang="es-MX" sz="1000" b="1" i="0" u="none" strike="noStrike" kern="1200" cap="none" spc="0" normalizeH="0" baseline="0" noProof="0">
-                          <a:ln>
-                            <a:noFill/>
-                          </a:ln>
-                          <a:solidFill>
-                            <a:prstClr val="black"/>
-                          </a:solidFill>
-                          <a:effectLst/>
-                          <a:uLnTx/>
-                          <a:uFillTx/>
-                          <a:latin typeface="Montserrat" panose="00000500000000000000" pitchFamily="2" charset="0"/>
-                          <a:ea typeface="+mn-ea"/>
-                          <a:cs typeface="+mn-cs"/>
-                        </a:rPr>
-                        <a:t>0.0%</a:t>
-                      </a:r>
                       <a:endParaRPr lang="es-MX" sz="1000" b="0" i="0" u="none" strike="noStrike" dirty="0">
                         <a:effectLst/>
                         <a:latin typeface="Montserrat" panose="00000500000000000000" pitchFamily="2" charset="0"/>
@@ -16021,23 +15157,6 @@
                       <a:pPr algn="ctr" fontAlgn="b">
                         <a:buNone/>
                       </a:pPr>
-                      <a:r>
-                        <a:rPr kumimoji="0" lang="es-MX" sz="1000" b="0" i="0" u="none" strike="noStrike" kern="1200" cap="none" spc="0" normalizeH="0" baseline="0" noProof="0">
-                          <a:ln>
-                            <a:noFill/>
-                          </a:ln>
-                          <a:solidFill>
-                            <a:schemeClr val="tx1"/>
-                          </a:solidFill>
-                          <a:effectLst/>
-                          <a:uLnTx/>
-                          <a:uFillTx/>
-                          <a:latin typeface="Montserrat" panose="00000500000000000000" pitchFamily="2" charset="0"/>
-                          <a:ea typeface="+mn-ea"/>
-                          <a:cs typeface="+mn-cs"/>
-                        </a:rPr>
-                        <a:t>0.0 pp</a:t>
-                      </a:r>
                       <a:endParaRPr lang="es-MX" sz="1000" b="0" i="0" u="none" strike="noStrike" dirty="0">
                         <a:solidFill>
                           <a:schemeClr val="tx1"/>
@@ -16118,23 +15237,6 @@
                       <a:pPr algn="ctr" fontAlgn="b">
                         <a:buNone/>
                       </a:pPr>
-                      <a:r>
-                        <a:rPr kumimoji="0" lang="es-MX" sz="1000" b="0" i="0" u="none" strike="noStrike" kern="1200" cap="none" spc="0" normalizeH="0" baseline="0" noProof="0">
-                          <a:ln>
-                            <a:noFill/>
-                          </a:ln>
-                          <a:solidFill>
-                            <a:prstClr val="black"/>
-                          </a:solidFill>
-                          <a:effectLst/>
-                          <a:uLnTx/>
-                          <a:uFillTx/>
-                          <a:latin typeface="Montserrat" panose="00000500000000000000" pitchFamily="2" charset="0"/>
-                          <a:ea typeface="+mn-ea"/>
-                          <a:cs typeface="+mn-cs"/>
-                        </a:rPr>
-                        <a:t>0</a:t>
-                      </a:r>
                       <a:endParaRPr lang="es-MX" sz="1000" b="0" i="0" u="none" strike="noStrike" dirty="0">
                         <a:effectLst/>
                         <a:latin typeface="Montserrat" panose="00000500000000000000" pitchFamily="2" charset="0"/>
@@ -16202,23 +15304,6 @@
                     <a:lstStyle/>
                     <a:p>
                       <a:pPr algn="ctr" fontAlgn="b"/>
-                      <a:r>
-                        <a:rPr kumimoji="0" lang="es-MX" sz="1000" b="1" i="0" u="none" strike="noStrike" kern="1200" cap="none" spc="0" normalizeH="0" baseline="0" noProof="0">
-                          <a:ln>
-                            <a:noFill/>
-                          </a:ln>
-                          <a:solidFill>
-                            <a:prstClr val="black"/>
-                          </a:solidFill>
-                          <a:effectLst/>
-                          <a:uLnTx/>
-                          <a:uFillTx/>
-                          <a:latin typeface="Montserrat" panose="00000500000000000000" pitchFamily="2" charset="0"/>
-                          <a:ea typeface="+mn-ea"/>
-                          <a:cs typeface="+mn-cs"/>
-                        </a:rPr>
-                        <a:t>0.0%</a:t>
-                      </a:r>
                       <a:endParaRPr lang="es-MX" sz="900" b="1" i="0" u="none" strike="noStrike" dirty="0">
                         <a:effectLst/>
                         <a:latin typeface="Montserrat" panose="00000500000000000000" pitchFamily="2" charset="0"/>
@@ -16291,23 +15376,6 @@
                     <a:lstStyle/>
                     <a:p>
                       <a:pPr algn="ctr" fontAlgn="b"/>
-                      <a:r>
-                        <a:rPr kumimoji="0" lang="es-MX" sz="1000" b="1" i="0" u="none" strike="noStrike" kern="1200" cap="none" spc="0" normalizeH="0" baseline="0" noProof="0">
-                          <a:ln>
-                            <a:noFill/>
-                          </a:ln>
-                          <a:solidFill>
-                            <a:prstClr val="black"/>
-                          </a:solidFill>
-                          <a:effectLst/>
-                          <a:uLnTx/>
-                          <a:uFillTx/>
-                          <a:latin typeface="Montserrat" panose="00000500000000000000" pitchFamily="2" charset="0"/>
-                          <a:ea typeface="+mn-ea"/>
-                          <a:cs typeface="+mn-cs"/>
-                        </a:rPr>
-                        <a:t>0.0%</a:t>
-                      </a:r>
                       <a:endParaRPr lang="es-MX" sz="900" b="0" i="0" u="none" strike="noStrike" dirty="0">
                         <a:effectLst/>
                         <a:latin typeface="Montserrat" panose="00000500000000000000" pitchFamily="2" charset="0"/>
@@ -16392,23 +15460,6 @@
                         <a:tabLst/>
                         <a:defRPr/>
                       </a:pPr>
-                      <a:r>
-                        <a:rPr kumimoji="0" lang="es-MX" sz="1000" b="0" i="0" u="none" strike="noStrike" kern="1200" cap="none" spc="0" normalizeH="0" baseline="0" noProof="0">
-                          <a:ln>
-                            <a:noFill/>
-                          </a:ln>
-                          <a:solidFill>
-                            <a:schemeClr val="tx1"/>
-                          </a:solidFill>
-                          <a:effectLst/>
-                          <a:uLnTx/>
-                          <a:uFillTx/>
-                          <a:latin typeface="Montserrat" panose="00000500000000000000" pitchFamily="2" charset="0"/>
-                          <a:ea typeface="+mn-ea"/>
-                          <a:cs typeface="+mn-cs"/>
-                        </a:rPr>
-                        <a:t>0.0 pp</a:t>
-                      </a:r>
                       <a:endParaRPr kumimoji="0" lang="es-MX" sz="900" b="0" i="0" u="none" strike="noStrike" kern="1200" cap="none" spc="0" normalizeH="0" baseline="0" noProof="0" dirty="0">
                         <a:ln>
                           <a:noFill/>
@@ -16496,23 +15547,6 @@
                       <a:pPr algn="ctr" fontAlgn="b">
                         <a:buNone/>
                       </a:pPr>
-                      <a:r>
-                        <a:rPr kumimoji="0" lang="es-MX" sz="1000" b="0" i="0" u="none" strike="noStrike" kern="1200" cap="none" spc="0" normalizeH="0" baseline="0" noProof="0">
-                          <a:ln>
-                            <a:noFill/>
-                          </a:ln>
-                          <a:solidFill>
-                            <a:prstClr val="black"/>
-                          </a:solidFill>
-                          <a:effectLst/>
-                          <a:uLnTx/>
-                          <a:uFillTx/>
-                          <a:latin typeface="Montserrat" panose="00000500000000000000" pitchFamily="2" charset="0"/>
-                          <a:ea typeface="+mn-ea"/>
-                          <a:cs typeface="+mn-cs"/>
-                        </a:rPr>
-                        <a:t>0</a:t>
-                      </a:r>
                       <a:endParaRPr lang="es-MX" sz="1000" b="0" i="0" u="none" strike="noStrike" dirty="0">
                         <a:effectLst/>
                         <a:latin typeface="Montserrat" panose="00000500000000000000" pitchFamily="2" charset="0"/>
@@ -16580,23 +15614,6 @@
                     <a:lstStyle/>
                     <a:p>
                       <a:pPr algn="ctr" fontAlgn="b"/>
-                      <a:r>
-                        <a:rPr kumimoji="0" lang="es-MX" sz="1000" b="1" i="0" u="none" strike="noStrike" kern="1200" cap="none" spc="0" normalizeH="0" baseline="0" noProof="0">
-                          <a:ln>
-                            <a:noFill/>
-                          </a:ln>
-                          <a:solidFill>
-                            <a:prstClr val="black"/>
-                          </a:solidFill>
-                          <a:effectLst/>
-                          <a:uLnTx/>
-                          <a:uFillTx/>
-                          <a:latin typeface="Montserrat" panose="00000500000000000000" pitchFamily="2" charset="0"/>
-                          <a:ea typeface="+mn-ea"/>
-                          <a:cs typeface="+mn-cs"/>
-                        </a:rPr>
-                        <a:t>0.0%</a:t>
-                      </a:r>
                       <a:endParaRPr lang="es-MX" sz="900" b="1" i="0" u="none" strike="noStrike" dirty="0">
                         <a:effectLst/>
                         <a:latin typeface="Montserrat" panose="00000500000000000000" pitchFamily="2" charset="0"/>
@@ -16669,23 +15686,6 @@
                     <a:lstStyle/>
                     <a:p>
                       <a:pPr algn="ctr" fontAlgn="b"/>
-                      <a:r>
-                        <a:rPr kumimoji="0" lang="es-MX" sz="1000" b="1" i="0" u="none" strike="noStrike" kern="1200" cap="none" spc="0" normalizeH="0" baseline="0" noProof="0">
-                          <a:ln>
-                            <a:noFill/>
-                          </a:ln>
-                          <a:solidFill>
-                            <a:prstClr val="black"/>
-                          </a:solidFill>
-                          <a:effectLst/>
-                          <a:uLnTx/>
-                          <a:uFillTx/>
-                          <a:latin typeface="Montserrat" panose="00000500000000000000" pitchFamily="2" charset="0"/>
-                          <a:ea typeface="+mn-ea"/>
-                          <a:cs typeface="+mn-cs"/>
-                        </a:rPr>
-                        <a:t>0.0%</a:t>
-                      </a:r>
                       <a:endParaRPr lang="es-MX" sz="900" b="0" i="0" u="none" strike="noStrike" dirty="0">
                         <a:effectLst/>
                         <a:latin typeface="Montserrat" panose="00000500000000000000" pitchFamily="2" charset="0"/>
@@ -16770,23 +15770,6 @@
                         <a:tabLst/>
                         <a:defRPr/>
                       </a:pPr>
-                      <a:r>
-                        <a:rPr kumimoji="0" lang="es-MX" sz="1000" b="0" i="0" u="none" strike="noStrike" kern="1200" cap="none" spc="0" normalizeH="0" baseline="0" noProof="0">
-                          <a:ln>
-                            <a:noFill/>
-                          </a:ln>
-                          <a:solidFill>
-                            <a:schemeClr val="tx1"/>
-                          </a:solidFill>
-                          <a:effectLst/>
-                          <a:uLnTx/>
-                          <a:uFillTx/>
-                          <a:latin typeface="Montserrat" panose="00000500000000000000" pitchFamily="2" charset="0"/>
-                          <a:ea typeface="+mn-ea"/>
-                          <a:cs typeface="+mn-cs"/>
-                        </a:rPr>
-                        <a:t>0.0 pp</a:t>
-                      </a:r>
                       <a:endParaRPr kumimoji="0" lang="es-MX" sz="900" b="0" i="0" u="none" strike="noStrike" kern="1200" cap="none" spc="0" normalizeH="0" baseline="0" noProof="0" dirty="0">
                         <a:ln>
                           <a:noFill/>
@@ -16874,23 +15857,6 @@
                       <a:pPr algn="ctr" fontAlgn="b">
                         <a:buNone/>
                       </a:pPr>
-                      <a:r>
-                        <a:rPr kumimoji="0" lang="es-MX" sz="1000" b="0" i="0" u="none" strike="noStrike" kern="1200" cap="none" spc="0" normalizeH="0" baseline="0" noProof="0" dirty="0">
-                          <a:ln>
-                            <a:noFill/>
-                          </a:ln>
-                          <a:solidFill>
-                            <a:prstClr val="black"/>
-                          </a:solidFill>
-                          <a:effectLst/>
-                          <a:uLnTx/>
-                          <a:uFillTx/>
-                          <a:latin typeface="Montserrat" panose="00000500000000000000" pitchFamily="2" charset="0"/>
-                          <a:ea typeface="+mn-ea"/>
-                          <a:cs typeface="+mn-cs"/>
-                        </a:rPr>
-                        <a:t>0</a:t>
-                      </a:r>
                       <a:endParaRPr lang="es-MX" sz="1000" b="0" i="0" u="none" strike="noStrike" dirty="0">
                         <a:effectLst/>
                         <a:latin typeface="Montserrat" panose="00000500000000000000" pitchFamily="2" charset="0"/>
@@ -16958,23 +15924,6 @@
                     <a:lstStyle/>
                     <a:p>
                       <a:pPr algn="ctr" fontAlgn="b"/>
-                      <a:r>
-                        <a:rPr kumimoji="0" lang="es-MX" sz="1000" b="1" i="0" u="none" strike="noStrike" kern="1200" cap="none" spc="0" normalizeH="0" baseline="0" noProof="0" dirty="0">
-                          <a:ln>
-                            <a:noFill/>
-                          </a:ln>
-                          <a:solidFill>
-                            <a:prstClr val="black"/>
-                          </a:solidFill>
-                          <a:effectLst/>
-                          <a:uLnTx/>
-                          <a:uFillTx/>
-                          <a:latin typeface="Montserrat" panose="00000500000000000000" pitchFamily="2" charset="0"/>
-                          <a:ea typeface="+mn-ea"/>
-                          <a:cs typeface="+mn-cs"/>
-                        </a:rPr>
-                        <a:t>0.0%</a:t>
-                      </a:r>
                       <a:endParaRPr lang="es-MX" sz="900" b="1" i="0" u="none" strike="noStrike" dirty="0">
                         <a:effectLst/>
                         <a:latin typeface="Montserrat" panose="00000500000000000000" pitchFamily="2" charset="0"/>
@@ -17047,23 +15996,6 @@
                     <a:lstStyle/>
                     <a:p>
                       <a:pPr algn="ctr" fontAlgn="b"/>
-                      <a:r>
-                        <a:rPr kumimoji="0" lang="es-MX" sz="1000" b="1" i="0" u="none" strike="noStrike" kern="1200" cap="none" spc="0" normalizeH="0" baseline="0" noProof="0" dirty="0">
-                          <a:ln>
-                            <a:noFill/>
-                          </a:ln>
-                          <a:solidFill>
-                            <a:prstClr val="black"/>
-                          </a:solidFill>
-                          <a:effectLst/>
-                          <a:uLnTx/>
-                          <a:uFillTx/>
-                          <a:latin typeface="Montserrat" panose="00000500000000000000" pitchFamily="2" charset="0"/>
-                          <a:ea typeface="+mn-ea"/>
-                          <a:cs typeface="+mn-cs"/>
-                        </a:rPr>
-                        <a:t>0.0%</a:t>
-                      </a:r>
                       <a:endParaRPr lang="es-MX" sz="900" b="0" i="0" u="none" strike="noStrike" dirty="0">
                         <a:effectLst/>
                         <a:latin typeface="Montserrat" panose="00000500000000000000" pitchFamily="2" charset="0"/>
@@ -17148,40 +16080,6 @@
                         <a:tabLst/>
                         <a:defRPr/>
                       </a:pPr>
-                      <a:r>
-                        <a:rPr kumimoji="0" lang="es-MX" sz="1000" b="0" i="0" u="none" strike="noStrike" kern="1200" cap="none" spc="0" normalizeH="0" baseline="0" noProof="0" dirty="0">
-                          <a:ln>
-                            <a:noFill/>
-                          </a:ln>
-                          <a:solidFill>
-                            <a:schemeClr val="tx1"/>
-                          </a:solidFill>
-                          <a:effectLst/>
-                          <a:uLnTx/>
-                          <a:uFillTx/>
-                          <a:latin typeface="Montserrat" panose="00000500000000000000" pitchFamily="2" charset="0"/>
-                          <a:ea typeface="+mn-ea"/>
-                          <a:cs typeface="+mn-cs"/>
-                        </a:rPr>
-                        <a:t>0.0 </a:t>
-                      </a:r>
-                      <a:r>
-                        <a:rPr kumimoji="0" lang="es-MX" sz="1000" b="0" i="0" u="none" strike="noStrike" kern="1200" cap="none" spc="0" normalizeH="0" baseline="0" noProof="0" dirty="0" err="1">
-                          <a:ln>
-                            <a:noFill/>
-                          </a:ln>
-                          <a:solidFill>
-                            <a:schemeClr val="tx1"/>
-                          </a:solidFill>
-                          <a:effectLst/>
-                          <a:uLnTx/>
-                          <a:uFillTx/>
-                          <a:latin typeface="Montserrat" panose="00000500000000000000" pitchFamily="2" charset="0"/>
-                          <a:ea typeface="+mn-ea"/>
-                          <a:cs typeface="+mn-cs"/>
-                        </a:rPr>
-                        <a:t>pp</a:t>
-                      </a:r>
                       <a:endParaRPr kumimoji="0" lang="es-MX" sz="900" b="0" i="0" u="none" strike="noStrike" kern="1200" cap="none" spc="0" normalizeH="0" baseline="0" noProof="0" dirty="0">
                         <a:ln>
                           <a:noFill/>
@@ -20600,7 +19498,7 @@
           <p:nvPr>
             <p:extLst>
               <p:ext uri="{D42A27DB-BD31-4B8C-83A1-F6EECF244321}">
-                <p14:modId xmlns:p14="http://schemas.microsoft.com/office/powerpoint/2010/main" val="2512372112"/>
+                <p14:modId xmlns:p14="http://schemas.microsoft.com/office/powerpoint/2010/main" val="1380754489"/>
               </p:ext>
             </p:extLst>
           </p:nvPr>
@@ -20630,7 +19528,7 @@
           <p:nvPr>
             <p:extLst>
               <p:ext uri="{D42A27DB-BD31-4B8C-83A1-F6EECF244321}">
-                <p14:modId xmlns:p14="http://schemas.microsoft.com/office/powerpoint/2010/main" val="3939107462"/>
+                <p14:modId xmlns:p14="http://schemas.microsoft.com/office/powerpoint/2010/main" val="3974364454"/>
               </p:ext>
             </p:extLst>
           </p:nvPr>
@@ -21085,13 +19983,10 @@
                       <a:pPr algn="ctr" fontAlgn="b">
                         <a:buNone/>
                       </a:pPr>
-                      <a:r>
-                        <a:rPr lang="es-MX" sz="1000" b="1" i="0" u="none" strike="noStrike" dirty="0">
-                          <a:effectLst/>
-                          <a:latin typeface="Montserrat" panose="00000500000000000000" pitchFamily="2" charset="0"/>
-                        </a:rPr>
-                        <a:t>0</a:t>
-                      </a:r>
+                      <a:endParaRPr lang="es-MX" sz="1000" b="1" i="0" u="none" strike="noStrike" dirty="0">
+                        <a:effectLst/>
+                        <a:latin typeface="Montserrat" panose="00000500000000000000" pitchFamily="2" charset="0"/>
+                      </a:endParaRPr>
                     </a:p>
                   </a:txBody>
                   <a:tcPr marL="7620" marR="7620" marT="7620" marB="0" anchor="ctr">
@@ -21141,13 +20036,10 @@
                       <a:pPr algn="ctr" fontAlgn="b">
                         <a:buNone/>
                       </a:pPr>
-                      <a:r>
-                        <a:rPr lang="es-MX" sz="1000" b="1" i="0" u="none" strike="noStrike" dirty="0">
-                          <a:effectLst/>
-                          <a:latin typeface="Montserrat" panose="00000500000000000000" pitchFamily="2" charset="0"/>
-                        </a:rPr>
-                        <a:t>0.0%</a:t>
-                      </a:r>
+                      <a:endParaRPr lang="es-MX" sz="1000" b="1" i="0" u="none" strike="noStrike" dirty="0">
+                        <a:effectLst/>
+                        <a:latin typeface="Montserrat" panose="00000500000000000000" pitchFamily="2" charset="0"/>
+                      </a:endParaRPr>
                     </a:p>
                   </a:txBody>
                   <a:tcPr marL="7620" marR="7620" marT="7620" marB="0" anchor="ctr">
@@ -21202,13 +20094,10 @@
                       <a:pPr algn="ctr" fontAlgn="b">
                         <a:buNone/>
                       </a:pPr>
-                      <a:r>
-                        <a:rPr lang="es-MX" sz="1000" b="1" i="0" u="none" strike="noStrike" dirty="0">
-                          <a:effectLst/>
-                          <a:latin typeface="Montserrat" panose="00000500000000000000" pitchFamily="2" charset="0"/>
-                        </a:rPr>
-                        <a:t>0.0%</a:t>
-                      </a:r>
+                      <a:endParaRPr lang="es-MX" sz="1000" b="1" i="0" u="none" strike="noStrike" dirty="0">
+                        <a:effectLst/>
+                        <a:latin typeface="Montserrat" panose="00000500000000000000" pitchFamily="2" charset="0"/>
+                      </a:endParaRPr>
                     </a:p>
                   </a:txBody>
                   <a:tcPr marL="7620" marR="7620" marT="7620" marB="0" anchor="ctr">
@@ -21273,23 +20162,6 @@
                         <a:tabLst/>
                         <a:defRPr/>
                       </a:pPr>
-                      <a:r>
-                        <a:rPr kumimoji="0" lang="es-MX" sz="1000" b="0" i="0" u="none" strike="noStrike" kern="1200" cap="none" spc="0" normalizeH="0" baseline="0" noProof="0">
-                          <a:ln>
-                            <a:noFill/>
-                          </a:ln>
-                          <a:solidFill>
-                            <a:schemeClr val="tx1"/>
-                          </a:solidFill>
-                          <a:effectLst/>
-                          <a:uLnTx/>
-                          <a:uFillTx/>
-                          <a:latin typeface="Montserrat" panose="00000500000000000000" pitchFamily="2" charset="0"/>
-                          <a:ea typeface="+mn-ea"/>
-                          <a:cs typeface="+mn-cs"/>
-                        </a:rPr>
-                        <a:t>0.0 pp</a:t>
-                      </a:r>
                       <a:endParaRPr kumimoji="0" lang="es-MX" sz="1000" b="0" i="0" u="none" strike="noStrike" kern="1200" cap="none" spc="0" normalizeH="0" baseline="0" noProof="0" dirty="0">
                         <a:ln>
                           <a:noFill/>
@@ -21361,23 +20233,6 @@
                       <a:pPr algn="ctr" fontAlgn="b">
                         <a:buNone/>
                       </a:pPr>
-                      <a:r>
-                        <a:rPr kumimoji="0" lang="es-MX" sz="1000" b="0" i="0" u="none" strike="noStrike" kern="1200" cap="none" spc="0" normalizeH="0" baseline="0" noProof="0">
-                          <a:ln>
-                            <a:noFill/>
-                          </a:ln>
-                          <a:solidFill>
-                            <a:prstClr val="black"/>
-                          </a:solidFill>
-                          <a:effectLst/>
-                          <a:uLnTx/>
-                          <a:uFillTx/>
-                          <a:latin typeface="Montserrat" panose="00000500000000000000" pitchFamily="2" charset="0"/>
-                          <a:ea typeface="+mn-ea"/>
-                          <a:cs typeface="+mn-cs"/>
-                        </a:rPr>
-                        <a:t>0</a:t>
-                      </a:r>
                       <a:endParaRPr lang="es-MX" sz="1000" b="0" i="0" u="none" strike="noStrike" dirty="0">
                         <a:effectLst/>
                         <a:latin typeface="Montserrat" panose="00000500000000000000" pitchFamily="2" charset="0"/>
@@ -21431,23 +20286,6 @@
                       <a:pPr algn="ctr" fontAlgn="b">
                         <a:buNone/>
                       </a:pPr>
-                      <a:r>
-                        <a:rPr kumimoji="0" lang="es-MX" sz="1000" b="1" i="0" u="none" strike="noStrike" kern="1200" cap="none" spc="0" normalizeH="0" baseline="0" noProof="0">
-                          <a:ln>
-                            <a:noFill/>
-                          </a:ln>
-                          <a:solidFill>
-                            <a:prstClr val="black"/>
-                          </a:solidFill>
-                          <a:effectLst/>
-                          <a:uLnTx/>
-                          <a:uFillTx/>
-                          <a:latin typeface="Montserrat" panose="00000500000000000000" pitchFamily="2" charset="0"/>
-                          <a:ea typeface="+mn-ea"/>
-                          <a:cs typeface="+mn-cs"/>
-                        </a:rPr>
-                        <a:t>0.0%</a:t>
-                      </a:r>
                       <a:endParaRPr lang="es-MX" sz="1000" b="1" i="0" u="none" strike="noStrike" dirty="0">
                         <a:effectLst/>
                         <a:latin typeface="Montserrat" panose="00000500000000000000" pitchFamily="2" charset="0"/>
@@ -21506,23 +20344,6 @@
                       <a:pPr algn="ctr" fontAlgn="b">
                         <a:buNone/>
                       </a:pPr>
-                      <a:r>
-                        <a:rPr kumimoji="0" lang="es-MX" sz="1000" b="1" i="0" u="none" strike="noStrike" kern="1200" cap="none" spc="0" normalizeH="0" baseline="0" noProof="0" dirty="0">
-                          <a:ln>
-                            <a:noFill/>
-                          </a:ln>
-                          <a:solidFill>
-                            <a:prstClr val="black"/>
-                          </a:solidFill>
-                          <a:effectLst/>
-                          <a:uLnTx/>
-                          <a:uFillTx/>
-                          <a:latin typeface="Montserrat" panose="00000500000000000000" pitchFamily="2" charset="0"/>
-                          <a:ea typeface="+mn-ea"/>
-                          <a:cs typeface="+mn-cs"/>
-                        </a:rPr>
-                        <a:t>0.0%</a:t>
-                      </a:r>
                       <a:endParaRPr lang="es-MX" sz="1000" b="0" i="0" u="none" strike="noStrike" dirty="0">
                         <a:effectLst/>
                         <a:latin typeface="Montserrat" panose="00000500000000000000" pitchFamily="2" charset="0"/>
@@ -21591,23 +20412,6 @@
                         <a:tabLst/>
                         <a:defRPr/>
                       </a:pPr>
-                      <a:r>
-                        <a:rPr kumimoji="0" lang="es-MX" sz="1000" b="0" i="0" u="none" strike="noStrike" kern="1200" cap="none" spc="0" normalizeH="0" baseline="0" noProof="0">
-                          <a:ln>
-                            <a:noFill/>
-                          </a:ln>
-                          <a:solidFill>
-                            <a:schemeClr val="tx1"/>
-                          </a:solidFill>
-                          <a:effectLst/>
-                          <a:uLnTx/>
-                          <a:uFillTx/>
-                          <a:latin typeface="Montserrat" panose="00000500000000000000" pitchFamily="2" charset="0"/>
-                          <a:ea typeface="+mn-ea"/>
-                          <a:cs typeface="+mn-cs"/>
-                        </a:rPr>
-                        <a:t>0.0 pp</a:t>
-                      </a:r>
                       <a:endParaRPr kumimoji="0" lang="es-MX" sz="1000" b="0" i="0" u="none" strike="noStrike" kern="1200" cap="none" spc="0" normalizeH="0" baseline="0" noProof="0" dirty="0">
                         <a:ln>
                           <a:noFill/>
@@ -21679,23 +20483,6 @@
                       <a:pPr algn="ctr" fontAlgn="b">
                         <a:buNone/>
                       </a:pPr>
-                      <a:r>
-                        <a:rPr kumimoji="0" lang="es-MX" sz="1000" b="0" i="0" u="none" strike="noStrike" kern="1200" cap="none" spc="0" normalizeH="0" baseline="0" noProof="0">
-                          <a:ln>
-                            <a:noFill/>
-                          </a:ln>
-                          <a:solidFill>
-                            <a:prstClr val="black"/>
-                          </a:solidFill>
-                          <a:effectLst/>
-                          <a:uLnTx/>
-                          <a:uFillTx/>
-                          <a:latin typeface="Montserrat" panose="00000500000000000000" pitchFamily="2" charset="0"/>
-                          <a:ea typeface="+mn-ea"/>
-                          <a:cs typeface="+mn-cs"/>
-                        </a:rPr>
-                        <a:t>0</a:t>
-                      </a:r>
                       <a:endParaRPr lang="es-MX" sz="1000" b="0" i="0" u="none" strike="noStrike" dirty="0">
                         <a:effectLst/>
                         <a:latin typeface="Montserrat" panose="00000500000000000000" pitchFamily="2" charset="0"/>
@@ -21749,23 +20536,6 @@
                       <a:pPr algn="ctr" fontAlgn="b">
                         <a:buNone/>
                       </a:pPr>
-                      <a:r>
-                        <a:rPr kumimoji="0" lang="es-MX" sz="1000" b="1" i="0" u="none" strike="noStrike" kern="1200" cap="none" spc="0" normalizeH="0" baseline="0" noProof="0">
-                          <a:ln>
-                            <a:noFill/>
-                          </a:ln>
-                          <a:solidFill>
-                            <a:prstClr val="black"/>
-                          </a:solidFill>
-                          <a:effectLst/>
-                          <a:uLnTx/>
-                          <a:uFillTx/>
-                          <a:latin typeface="Montserrat" panose="00000500000000000000" pitchFamily="2" charset="0"/>
-                          <a:ea typeface="+mn-ea"/>
-                          <a:cs typeface="+mn-cs"/>
-                        </a:rPr>
-                        <a:t>0.0%</a:t>
-                      </a:r>
                       <a:endParaRPr lang="es-MX" sz="1000" b="1" i="0" u="none" strike="noStrike" dirty="0">
                         <a:effectLst/>
                         <a:latin typeface="Montserrat" panose="00000500000000000000" pitchFamily="2" charset="0"/>
@@ -21822,23 +20592,6 @@
                     <a:lstStyle/>
                     <a:p>
                       <a:pPr algn="ctr" fontAlgn="b"/>
-                      <a:r>
-                        <a:rPr kumimoji="0" lang="es-MX" sz="1000" b="1" i="0" u="none" strike="noStrike" kern="1200" cap="none" spc="0" normalizeH="0" baseline="0" noProof="0">
-                          <a:ln>
-                            <a:noFill/>
-                          </a:ln>
-                          <a:solidFill>
-                            <a:prstClr val="black"/>
-                          </a:solidFill>
-                          <a:effectLst/>
-                          <a:uLnTx/>
-                          <a:uFillTx/>
-                          <a:latin typeface="Montserrat" panose="00000500000000000000" pitchFamily="2" charset="0"/>
-                          <a:ea typeface="+mn-ea"/>
-                          <a:cs typeface="+mn-cs"/>
-                        </a:rPr>
-                        <a:t>0.0%</a:t>
-                      </a:r>
                       <a:endParaRPr lang="es-MX" sz="1000" b="0" i="0" u="none" strike="noStrike" dirty="0">
                         <a:effectLst/>
                         <a:latin typeface="Montserrat" panose="00000500000000000000" pitchFamily="2" charset="0"/>
@@ -21907,23 +20660,6 @@
                         <a:tabLst/>
                         <a:defRPr/>
                       </a:pPr>
-                      <a:r>
-                        <a:rPr kumimoji="0" lang="es-MX" sz="1000" b="0" i="0" u="none" strike="noStrike" kern="1200" cap="none" spc="0" normalizeH="0" baseline="0" noProof="0">
-                          <a:ln>
-                            <a:noFill/>
-                          </a:ln>
-                          <a:solidFill>
-                            <a:schemeClr val="tx1"/>
-                          </a:solidFill>
-                          <a:effectLst/>
-                          <a:uLnTx/>
-                          <a:uFillTx/>
-                          <a:latin typeface="Montserrat" panose="00000500000000000000" pitchFamily="2" charset="0"/>
-                          <a:ea typeface="+mn-ea"/>
-                          <a:cs typeface="+mn-cs"/>
-                        </a:rPr>
-                        <a:t>0.0 pp</a:t>
-                      </a:r>
                       <a:endParaRPr kumimoji="0" lang="es-MX" sz="1000" b="0" i="0" u="none" strike="noStrike" kern="1200" cap="none" spc="0" normalizeH="0" baseline="0" noProof="0" dirty="0">
                         <a:ln>
                           <a:noFill/>
@@ -21995,23 +20731,6 @@
                       <a:pPr algn="ctr" fontAlgn="b">
                         <a:buNone/>
                       </a:pPr>
-                      <a:r>
-                        <a:rPr kumimoji="0" lang="es-MX" sz="1000" b="0" i="0" u="none" strike="noStrike" kern="1200" cap="none" spc="0" normalizeH="0" baseline="0" noProof="0">
-                          <a:ln>
-                            <a:noFill/>
-                          </a:ln>
-                          <a:solidFill>
-                            <a:prstClr val="black"/>
-                          </a:solidFill>
-                          <a:effectLst/>
-                          <a:uLnTx/>
-                          <a:uFillTx/>
-                          <a:latin typeface="Montserrat" panose="00000500000000000000" pitchFamily="2" charset="0"/>
-                          <a:ea typeface="+mn-ea"/>
-                          <a:cs typeface="+mn-cs"/>
-                        </a:rPr>
-                        <a:t>0</a:t>
-                      </a:r>
                       <a:endParaRPr lang="es-MX" sz="1000" b="0" i="0" u="none" strike="noStrike" dirty="0">
                         <a:effectLst/>
                         <a:latin typeface="Montserrat" panose="00000500000000000000" pitchFamily="2" charset="0"/>
@@ -22065,23 +20784,6 @@
                       <a:pPr algn="ctr" fontAlgn="b">
                         <a:buNone/>
                       </a:pPr>
-                      <a:r>
-                        <a:rPr kumimoji="0" lang="es-MX" sz="1000" b="1" i="0" u="none" strike="noStrike" kern="1200" cap="none" spc="0" normalizeH="0" baseline="0" noProof="0">
-                          <a:ln>
-                            <a:noFill/>
-                          </a:ln>
-                          <a:solidFill>
-                            <a:prstClr val="black"/>
-                          </a:solidFill>
-                          <a:effectLst/>
-                          <a:uLnTx/>
-                          <a:uFillTx/>
-                          <a:latin typeface="Montserrat" panose="00000500000000000000" pitchFamily="2" charset="0"/>
-                          <a:ea typeface="+mn-ea"/>
-                          <a:cs typeface="+mn-cs"/>
-                        </a:rPr>
-                        <a:t>0.0%</a:t>
-                      </a:r>
                       <a:endParaRPr lang="es-MX" sz="1000" b="1" i="0" u="none" strike="noStrike" dirty="0">
                         <a:effectLst/>
                         <a:latin typeface="Montserrat" panose="00000500000000000000" pitchFamily="2" charset="0"/>
@@ -22140,23 +20842,6 @@
                       <a:pPr algn="ctr" fontAlgn="b">
                         <a:buNone/>
                       </a:pPr>
-                      <a:r>
-                        <a:rPr kumimoji="0" lang="es-MX" sz="1000" b="1" i="0" u="none" strike="noStrike" kern="1200" cap="none" spc="0" normalizeH="0" baseline="0" noProof="0">
-                          <a:ln>
-                            <a:noFill/>
-                          </a:ln>
-                          <a:solidFill>
-                            <a:prstClr val="black"/>
-                          </a:solidFill>
-                          <a:effectLst/>
-                          <a:uLnTx/>
-                          <a:uFillTx/>
-                          <a:latin typeface="Montserrat" panose="00000500000000000000" pitchFamily="2" charset="0"/>
-                          <a:ea typeface="+mn-ea"/>
-                          <a:cs typeface="+mn-cs"/>
-                        </a:rPr>
-                        <a:t>0.0%</a:t>
-                      </a:r>
                       <a:endParaRPr lang="es-MX" sz="1000" b="0" i="0" u="none" strike="noStrike" dirty="0">
                         <a:effectLst/>
                         <a:latin typeface="Montserrat" panose="00000500000000000000" pitchFamily="2" charset="0"/>
@@ -22225,23 +20910,6 @@
                         <a:tabLst/>
                         <a:defRPr/>
                       </a:pPr>
-                      <a:r>
-                        <a:rPr kumimoji="0" lang="es-MX" sz="1000" b="0" i="0" u="none" strike="noStrike" kern="1200" cap="none" spc="0" normalizeH="0" baseline="0" noProof="0">
-                          <a:ln>
-                            <a:noFill/>
-                          </a:ln>
-                          <a:solidFill>
-                            <a:schemeClr val="tx1"/>
-                          </a:solidFill>
-                          <a:effectLst/>
-                          <a:uLnTx/>
-                          <a:uFillTx/>
-                          <a:latin typeface="Montserrat" panose="00000500000000000000" pitchFamily="2" charset="0"/>
-                          <a:ea typeface="+mn-ea"/>
-                          <a:cs typeface="+mn-cs"/>
-                        </a:rPr>
-                        <a:t>0.0 pp</a:t>
-                      </a:r>
                       <a:endParaRPr kumimoji="0" lang="es-MX" sz="1000" b="0" i="0" u="none" strike="noStrike" kern="1200" cap="none" spc="0" normalizeH="0" baseline="0" noProof="0" dirty="0">
                         <a:ln>
                           <a:noFill/>
@@ -22313,23 +20981,6 @@
                       <a:pPr algn="ctr" fontAlgn="b">
                         <a:buNone/>
                       </a:pPr>
-                      <a:r>
-                        <a:rPr kumimoji="0" lang="es-MX" sz="1000" b="0" i="0" u="none" strike="noStrike" kern="1200" cap="none" spc="0" normalizeH="0" baseline="0" noProof="0">
-                          <a:ln>
-                            <a:noFill/>
-                          </a:ln>
-                          <a:solidFill>
-                            <a:prstClr val="black"/>
-                          </a:solidFill>
-                          <a:effectLst/>
-                          <a:uLnTx/>
-                          <a:uFillTx/>
-                          <a:latin typeface="Montserrat" panose="00000500000000000000" pitchFamily="2" charset="0"/>
-                          <a:ea typeface="+mn-ea"/>
-                          <a:cs typeface="+mn-cs"/>
-                        </a:rPr>
-                        <a:t>0</a:t>
-                      </a:r>
                       <a:endParaRPr lang="es-MX" sz="1000" b="0" i="0" u="none" strike="noStrike" dirty="0">
                         <a:effectLst/>
                         <a:latin typeface="Montserrat" panose="00000500000000000000" pitchFamily="2" charset="0"/>
@@ -22383,23 +21034,6 @@
                       <a:pPr algn="ctr" fontAlgn="b">
                         <a:buNone/>
                       </a:pPr>
-                      <a:r>
-                        <a:rPr kumimoji="0" lang="es-MX" sz="1000" b="1" i="0" u="none" strike="noStrike" kern="1200" cap="none" spc="0" normalizeH="0" baseline="0" noProof="0">
-                          <a:ln>
-                            <a:noFill/>
-                          </a:ln>
-                          <a:solidFill>
-                            <a:prstClr val="black"/>
-                          </a:solidFill>
-                          <a:effectLst/>
-                          <a:uLnTx/>
-                          <a:uFillTx/>
-                          <a:latin typeface="Montserrat" panose="00000500000000000000" pitchFamily="2" charset="0"/>
-                          <a:ea typeface="+mn-ea"/>
-                          <a:cs typeface="+mn-cs"/>
-                        </a:rPr>
-                        <a:t>0.0%</a:t>
-                      </a:r>
                       <a:endParaRPr lang="es-MX" sz="1000" b="1" i="0" u="none" strike="noStrike" dirty="0">
                         <a:effectLst/>
                         <a:latin typeface="Montserrat" panose="00000500000000000000" pitchFamily="2" charset="0"/>
@@ -22458,23 +21092,6 @@
                       <a:pPr algn="ctr" fontAlgn="b">
                         <a:buNone/>
                       </a:pPr>
-                      <a:r>
-                        <a:rPr kumimoji="0" lang="es-MX" sz="1000" b="1" i="0" u="none" strike="noStrike" kern="1200" cap="none" spc="0" normalizeH="0" baseline="0" noProof="0">
-                          <a:ln>
-                            <a:noFill/>
-                          </a:ln>
-                          <a:solidFill>
-                            <a:prstClr val="black"/>
-                          </a:solidFill>
-                          <a:effectLst/>
-                          <a:uLnTx/>
-                          <a:uFillTx/>
-                          <a:latin typeface="Montserrat" panose="00000500000000000000" pitchFamily="2" charset="0"/>
-                          <a:ea typeface="+mn-ea"/>
-                          <a:cs typeface="+mn-cs"/>
-                        </a:rPr>
-                        <a:t>0.0%</a:t>
-                      </a:r>
                       <a:endParaRPr lang="es-MX" sz="1000" b="0" i="0" u="none" strike="noStrike" dirty="0">
                         <a:effectLst/>
                         <a:latin typeface="Montserrat" panose="00000500000000000000" pitchFamily="2" charset="0"/>
@@ -22543,23 +21160,6 @@
                         <a:tabLst/>
                         <a:defRPr/>
                       </a:pPr>
-                      <a:r>
-                        <a:rPr kumimoji="0" lang="es-MX" sz="1000" b="0" i="0" u="none" strike="noStrike" kern="1200" cap="none" spc="0" normalizeH="0" baseline="0" noProof="0">
-                          <a:ln>
-                            <a:noFill/>
-                          </a:ln>
-                          <a:solidFill>
-                            <a:schemeClr val="tx1"/>
-                          </a:solidFill>
-                          <a:effectLst/>
-                          <a:uLnTx/>
-                          <a:uFillTx/>
-                          <a:latin typeface="Montserrat" panose="00000500000000000000" pitchFamily="2" charset="0"/>
-                          <a:ea typeface="+mn-ea"/>
-                          <a:cs typeface="+mn-cs"/>
-                        </a:rPr>
-                        <a:t>0.0 pp</a:t>
-                      </a:r>
                       <a:endParaRPr kumimoji="0" lang="es-MX" sz="1000" b="0" i="0" u="none" strike="noStrike" kern="1200" cap="none" spc="0" normalizeH="0" baseline="0" noProof="0" dirty="0">
                         <a:ln>
                           <a:noFill/>
@@ -22631,23 +21231,6 @@
                       <a:pPr algn="ctr" fontAlgn="b">
                         <a:buNone/>
                       </a:pPr>
-                      <a:r>
-                        <a:rPr kumimoji="0" lang="es-MX" sz="1000" b="0" i="0" u="none" strike="noStrike" kern="1200" cap="none" spc="0" normalizeH="0" baseline="0" noProof="0">
-                          <a:ln>
-                            <a:noFill/>
-                          </a:ln>
-                          <a:solidFill>
-                            <a:prstClr val="black"/>
-                          </a:solidFill>
-                          <a:effectLst/>
-                          <a:uLnTx/>
-                          <a:uFillTx/>
-                          <a:latin typeface="Montserrat" panose="00000500000000000000" pitchFamily="2" charset="0"/>
-                          <a:ea typeface="+mn-ea"/>
-                          <a:cs typeface="+mn-cs"/>
-                        </a:rPr>
-                        <a:t>0</a:t>
-                      </a:r>
                       <a:endParaRPr lang="es-MX" sz="1000" b="0" i="0" u="none" strike="noStrike" dirty="0">
                         <a:effectLst/>
                         <a:latin typeface="Montserrat" panose="00000500000000000000" pitchFamily="2" charset="0"/>
@@ -22701,23 +21284,6 @@
                       <a:pPr algn="ctr" fontAlgn="b">
                         <a:buNone/>
                       </a:pPr>
-                      <a:r>
-                        <a:rPr kumimoji="0" lang="es-MX" sz="1000" b="1" i="0" u="none" strike="noStrike" kern="1200" cap="none" spc="0" normalizeH="0" baseline="0" noProof="0">
-                          <a:ln>
-                            <a:noFill/>
-                          </a:ln>
-                          <a:solidFill>
-                            <a:prstClr val="black"/>
-                          </a:solidFill>
-                          <a:effectLst/>
-                          <a:uLnTx/>
-                          <a:uFillTx/>
-                          <a:latin typeface="Montserrat" panose="00000500000000000000" pitchFamily="2" charset="0"/>
-                          <a:ea typeface="+mn-ea"/>
-                          <a:cs typeface="+mn-cs"/>
-                        </a:rPr>
-                        <a:t>0.0%</a:t>
-                      </a:r>
                       <a:endParaRPr lang="es-MX" sz="1000" b="1" i="0" u="none" strike="noStrike" dirty="0">
                         <a:effectLst/>
                         <a:latin typeface="Montserrat" panose="00000500000000000000" pitchFamily="2" charset="0"/>
@@ -22774,23 +21340,6 @@
                     <a:lstStyle/>
                     <a:p>
                       <a:pPr algn="ctr" fontAlgn="b"/>
-                      <a:r>
-                        <a:rPr kumimoji="0" lang="es-MX" sz="1000" b="1" i="0" u="none" strike="noStrike" kern="1200" cap="none" spc="0" normalizeH="0" baseline="0" noProof="0">
-                          <a:ln>
-                            <a:noFill/>
-                          </a:ln>
-                          <a:solidFill>
-                            <a:prstClr val="black"/>
-                          </a:solidFill>
-                          <a:effectLst/>
-                          <a:uLnTx/>
-                          <a:uFillTx/>
-                          <a:latin typeface="Montserrat" panose="00000500000000000000" pitchFamily="2" charset="0"/>
-                          <a:ea typeface="+mn-ea"/>
-                          <a:cs typeface="+mn-cs"/>
-                        </a:rPr>
-                        <a:t>0.0%</a:t>
-                      </a:r>
                       <a:endParaRPr lang="es-MX" sz="1000" b="0" i="0" u="none" strike="noStrike" dirty="0">
                         <a:effectLst/>
                         <a:latin typeface="Montserrat" panose="00000500000000000000" pitchFamily="2" charset="0"/>
@@ -22859,23 +21408,6 @@
                         <a:tabLst/>
                         <a:defRPr/>
                       </a:pPr>
-                      <a:r>
-                        <a:rPr kumimoji="0" lang="es-MX" sz="1000" b="0" i="0" u="none" strike="noStrike" kern="1200" cap="none" spc="0" normalizeH="0" baseline="0" noProof="0">
-                          <a:ln>
-                            <a:noFill/>
-                          </a:ln>
-                          <a:solidFill>
-                            <a:schemeClr val="tx1"/>
-                          </a:solidFill>
-                          <a:effectLst/>
-                          <a:uLnTx/>
-                          <a:uFillTx/>
-                          <a:latin typeface="Montserrat" panose="00000500000000000000" pitchFamily="2" charset="0"/>
-                          <a:ea typeface="+mn-ea"/>
-                          <a:cs typeface="+mn-cs"/>
-                        </a:rPr>
-                        <a:t>0.0 pp</a:t>
-                      </a:r>
                       <a:endParaRPr kumimoji="0" lang="es-MX" sz="1000" b="0" i="0" u="none" strike="noStrike" kern="1200" cap="none" spc="0" normalizeH="0" baseline="0" noProof="0" dirty="0">
                         <a:ln>
                           <a:noFill/>
@@ -22947,23 +21479,6 @@
                       <a:pPr algn="ctr" fontAlgn="b">
                         <a:buNone/>
                       </a:pPr>
-                      <a:r>
-                        <a:rPr kumimoji="0" lang="es-MX" sz="1000" b="0" i="0" u="none" strike="noStrike" kern="1200" cap="none" spc="0" normalizeH="0" baseline="0" noProof="0">
-                          <a:ln>
-                            <a:noFill/>
-                          </a:ln>
-                          <a:solidFill>
-                            <a:prstClr val="black"/>
-                          </a:solidFill>
-                          <a:effectLst/>
-                          <a:uLnTx/>
-                          <a:uFillTx/>
-                          <a:latin typeface="Montserrat" panose="00000500000000000000" pitchFamily="2" charset="0"/>
-                          <a:ea typeface="+mn-ea"/>
-                          <a:cs typeface="+mn-cs"/>
-                        </a:rPr>
-                        <a:t>0</a:t>
-                      </a:r>
                       <a:endParaRPr lang="es-MX" sz="1000" b="0" i="0" u="none" strike="noStrike" dirty="0">
                         <a:effectLst/>
                         <a:latin typeface="Montserrat" panose="00000500000000000000" pitchFamily="2" charset="0"/>
@@ -23017,23 +21532,6 @@
                       <a:pPr algn="ctr" fontAlgn="b">
                         <a:buNone/>
                       </a:pPr>
-                      <a:r>
-                        <a:rPr kumimoji="0" lang="es-MX" sz="1000" b="1" i="0" u="none" strike="noStrike" kern="1200" cap="none" spc="0" normalizeH="0" baseline="0" noProof="0">
-                          <a:ln>
-                            <a:noFill/>
-                          </a:ln>
-                          <a:solidFill>
-                            <a:prstClr val="black"/>
-                          </a:solidFill>
-                          <a:effectLst/>
-                          <a:uLnTx/>
-                          <a:uFillTx/>
-                          <a:latin typeface="Montserrat" panose="00000500000000000000" pitchFamily="2" charset="0"/>
-                          <a:ea typeface="+mn-ea"/>
-                          <a:cs typeface="+mn-cs"/>
-                        </a:rPr>
-                        <a:t>0.0%</a:t>
-                      </a:r>
                       <a:endParaRPr lang="es-MX" sz="1000" b="1" i="0" u="none" strike="noStrike" dirty="0">
                         <a:effectLst/>
                         <a:latin typeface="Montserrat" panose="00000500000000000000" pitchFamily="2" charset="0"/>
@@ -23092,23 +21590,6 @@
                       <a:pPr algn="ctr" fontAlgn="b">
                         <a:buNone/>
                       </a:pPr>
-                      <a:r>
-                        <a:rPr kumimoji="0" lang="es-MX" sz="1000" b="1" i="0" u="none" strike="noStrike" kern="1200" cap="none" spc="0" normalizeH="0" baseline="0" noProof="0">
-                          <a:ln>
-                            <a:noFill/>
-                          </a:ln>
-                          <a:solidFill>
-                            <a:prstClr val="black"/>
-                          </a:solidFill>
-                          <a:effectLst/>
-                          <a:uLnTx/>
-                          <a:uFillTx/>
-                          <a:latin typeface="Montserrat" panose="00000500000000000000" pitchFamily="2" charset="0"/>
-                          <a:ea typeface="+mn-ea"/>
-                          <a:cs typeface="+mn-cs"/>
-                        </a:rPr>
-                        <a:t>0.0%</a:t>
-                      </a:r>
                       <a:endParaRPr lang="es-MX" sz="1000" b="0" i="0" u="none" strike="noStrike" dirty="0">
                         <a:effectLst/>
                         <a:latin typeface="Montserrat" panose="00000500000000000000" pitchFamily="2" charset="0"/>
@@ -23177,23 +21658,6 @@
                         <a:tabLst/>
                         <a:defRPr/>
                       </a:pPr>
-                      <a:r>
-                        <a:rPr kumimoji="0" lang="es-MX" sz="1000" b="0" i="0" u="none" strike="noStrike" kern="1200" cap="none" spc="0" normalizeH="0" baseline="0" noProof="0">
-                          <a:ln>
-                            <a:noFill/>
-                          </a:ln>
-                          <a:solidFill>
-                            <a:schemeClr val="tx1"/>
-                          </a:solidFill>
-                          <a:effectLst/>
-                          <a:uLnTx/>
-                          <a:uFillTx/>
-                          <a:latin typeface="Montserrat" panose="00000500000000000000" pitchFamily="2" charset="0"/>
-                          <a:ea typeface="+mn-ea"/>
-                          <a:cs typeface="+mn-cs"/>
-                        </a:rPr>
-                        <a:t>0.0 pp</a:t>
-                      </a:r>
                       <a:endParaRPr kumimoji="0" lang="es-MX" sz="1000" b="0" i="0" u="none" strike="noStrike" kern="1200" cap="none" spc="0" normalizeH="0" baseline="0" noProof="0" dirty="0">
                         <a:ln>
                           <a:noFill/>
@@ -23265,23 +21729,6 @@
                       <a:pPr algn="ctr" fontAlgn="b">
                         <a:buNone/>
                       </a:pPr>
-                      <a:r>
-                        <a:rPr kumimoji="0" lang="es-MX" sz="1000" b="0" i="0" u="none" strike="noStrike" kern="1200" cap="none" spc="0" normalizeH="0" baseline="0" noProof="0">
-                          <a:ln>
-                            <a:noFill/>
-                          </a:ln>
-                          <a:solidFill>
-                            <a:prstClr val="black"/>
-                          </a:solidFill>
-                          <a:effectLst/>
-                          <a:uLnTx/>
-                          <a:uFillTx/>
-                          <a:latin typeface="Montserrat" panose="00000500000000000000" pitchFamily="2" charset="0"/>
-                          <a:ea typeface="+mn-ea"/>
-                          <a:cs typeface="+mn-cs"/>
-                        </a:rPr>
-                        <a:t>0</a:t>
-                      </a:r>
                       <a:endParaRPr lang="es-MX" sz="1000" b="0" i="0" u="none" strike="noStrike" dirty="0">
                         <a:effectLst/>
                         <a:latin typeface="Montserrat" panose="00000500000000000000" pitchFamily="2" charset="0"/>
@@ -23349,23 +21796,6 @@
                         <a:tabLst/>
                         <a:defRPr/>
                       </a:pPr>
-                      <a:r>
-                        <a:rPr kumimoji="0" lang="es-MX" sz="1000" b="1" i="0" u="none" strike="noStrike" kern="1200" cap="none" spc="0" normalizeH="0" baseline="0" noProof="0">
-                          <a:ln>
-                            <a:noFill/>
-                          </a:ln>
-                          <a:solidFill>
-                            <a:prstClr val="black"/>
-                          </a:solidFill>
-                          <a:effectLst/>
-                          <a:uLnTx/>
-                          <a:uFillTx/>
-                          <a:latin typeface="Montserrat" panose="00000500000000000000" pitchFamily="2" charset="0"/>
-                          <a:ea typeface="+mn-ea"/>
-                          <a:cs typeface="+mn-cs"/>
-                        </a:rPr>
-                        <a:t>0.0%</a:t>
-                      </a:r>
                       <a:endParaRPr kumimoji="0" lang="es-MX" sz="1000" b="1" i="0" u="none" strike="noStrike" kern="1200" cap="none" spc="0" normalizeH="0" baseline="0" noProof="0" dirty="0">
                         <a:ln>
                           <a:noFill/>
@@ -23432,23 +21862,6 @@
                     <a:lstStyle/>
                     <a:p>
                       <a:pPr algn="ctr" fontAlgn="b"/>
-                      <a:r>
-                        <a:rPr kumimoji="0" lang="es-MX" sz="1000" b="1" i="0" u="none" strike="noStrike" kern="1200" cap="none" spc="0" normalizeH="0" baseline="0" noProof="0">
-                          <a:ln>
-                            <a:noFill/>
-                          </a:ln>
-                          <a:solidFill>
-                            <a:prstClr val="black"/>
-                          </a:solidFill>
-                          <a:effectLst/>
-                          <a:uLnTx/>
-                          <a:uFillTx/>
-                          <a:latin typeface="Montserrat" panose="00000500000000000000" pitchFamily="2" charset="0"/>
-                          <a:ea typeface="+mn-ea"/>
-                          <a:cs typeface="+mn-cs"/>
-                        </a:rPr>
-                        <a:t>0.0%</a:t>
-                      </a:r>
                       <a:endParaRPr lang="es-MX" sz="1000" b="0" i="0" u="none" strike="noStrike" dirty="0">
                         <a:effectLst/>
                         <a:latin typeface="Montserrat" panose="00000500000000000000" pitchFamily="2" charset="0"/>
@@ -23517,23 +21930,6 @@
                         <a:tabLst/>
                         <a:defRPr/>
                       </a:pPr>
-                      <a:r>
-                        <a:rPr kumimoji="0" lang="es-MX" sz="1000" b="0" i="0" u="none" strike="noStrike" kern="1200" cap="none" spc="0" normalizeH="0" baseline="0" noProof="0">
-                          <a:ln>
-                            <a:noFill/>
-                          </a:ln>
-                          <a:solidFill>
-                            <a:schemeClr val="tx1"/>
-                          </a:solidFill>
-                          <a:effectLst/>
-                          <a:uLnTx/>
-                          <a:uFillTx/>
-                          <a:latin typeface="Montserrat" panose="00000500000000000000" pitchFamily="2" charset="0"/>
-                          <a:ea typeface="+mn-ea"/>
-                          <a:cs typeface="+mn-cs"/>
-                        </a:rPr>
-                        <a:t>0.0 pp</a:t>
-                      </a:r>
                       <a:endParaRPr kumimoji="0" lang="es-MX" sz="1000" b="0" i="0" u="none" strike="noStrike" kern="1200" cap="none" spc="0" normalizeH="0" baseline="0" noProof="0" dirty="0">
                         <a:ln>
                           <a:noFill/>
@@ -23605,23 +22001,6 @@
                       <a:pPr algn="ctr" fontAlgn="b">
                         <a:buNone/>
                       </a:pPr>
-                      <a:r>
-                        <a:rPr kumimoji="0" lang="es-MX" sz="1000" b="0" i="0" u="none" strike="noStrike" kern="1200" cap="none" spc="0" normalizeH="0" baseline="0" noProof="0" dirty="0">
-                          <a:ln>
-                            <a:noFill/>
-                          </a:ln>
-                          <a:solidFill>
-                            <a:prstClr val="black"/>
-                          </a:solidFill>
-                          <a:effectLst/>
-                          <a:uLnTx/>
-                          <a:uFillTx/>
-                          <a:latin typeface="Montserrat" panose="00000500000000000000" pitchFamily="2" charset="0"/>
-                          <a:ea typeface="+mn-ea"/>
-                          <a:cs typeface="+mn-cs"/>
-                        </a:rPr>
-                        <a:t>0</a:t>
-                      </a:r>
                       <a:endParaRPr lang="es-MX" sz="1000" b="0" i="0" u="none" strike="noStrike" dirty="0">
                         <a:effectLst/>
                         <a:latin typeface="Montserrat" panose="00000500000000000000" pitchFamily="2" charset="0"/>
@@ -23689,23 +22068,20 @@
                         <a:tabLst/>
                         <a:defRPr/>
                       </a:pPr>
-                      <a:r>
-                        <a:rPr kumimoji="0" lang="es-MX" sz="1000" b="1" i="0" u="none" strike="noStrike" kern="1200" cap="none" spc="0" normalizeH="0" baseline="0" noProof="0" dirty="0">
-                          <a:ln>
-                            <a:noFill/>
-                          </a:ln>
-                          <a:solidFill>
-                            <a:prstClr val="black"/>
-                          </a:solidFill>
-                          <a:effectLst/>
-                          <a:uLnTx/>
-                          <a:uFillTx/>
-                          <a:latin typeface="Montserrat" panose="00000500000000000000" pitchFamily="2" charset="0"/>
-                          <a:ea typeface="+mn-ea"/>
-                          <a:cs typeface="+mn-cs"/>
-                        </a:rPr>
-                        <a:t>0.0%</a:t>
-                      </a:r>
+                      <a:endParaRPr kumimoji="0" lang="es-MX" sz="1000" b="1" i="0" u="none" strike="noStrike" kern="1200" cap="none" spc="0" normalizeH="0" baseline="0" noProof="0" dirty="0">
+                        <a:ln>
+                          <a:noFill/>
+                        </a:ln>
+                        <a:solidFill>
+                          <a:prstClr val="black"/>
+                        </a:solidFill>
+                        <a:effectLst/>
+                        <a:uLnTx/>
+                        <a:uFillTx/>
+                        <a:latin typeface="Montserrat" panose="00000500000000000000" pitchFamily="2" charset="0"/>
+                        <a:ea typeface="+mn-ea"/>
+                        <a:cs typeface="+mn-cs"/>
+                      </a:endParaRPr>
                     </a:p>
                   </a:txBody>
                   <a:tcPr marL="7620" marR="7620" marT="7620" marB="0" anchor="ctr">
@@ -23758,23 +22134,6 @@
                     <a:lstStyle/>
                     <a:p>
                       <a:pPr algn="ctr" fontAlgn="b"/>
-                      <a:r>
-                        <a:rPr kumimoji="0" lang="es-MX" sz="1000" b="1" i="0" u="none" strike="noStrike" kern="1200" cap="none" spc="0" normalizeH="0" baseline="0" noProof="0" dirty="0">
-                          <a:ln>
-                            <a:noFill/>
-                          </a:ln>
-                          <a:solidFill>
-                            <a:prstClr val="black"/>
-                          </a:solidFill>
-                          <a:effectLst/>
-                          <a:uLnTx/>
-                          <a:uFillTx/>
-                          <a:latin typeface="Montserrat" panose="00000500000000000000" pitchFamily="2" charset="0"/>
-                          <a:ea typeface="+mn-ea"/>
-                          <a:cs typeface="+mn-cs"/>
-                        </a:rPr>
-                        <a:t>0.0%</a:t>
-                      </a:r>
                       <a:endParaRPr lang="es-MX" sz="1000" b="0" i="0" u="none" strike="noStrike" dirty="0">
                         <a:effectLst/>
                         <a:latin typeface="Montserrat" panose="00000500000000000000" pitchFamily="2" charset="0"/>
@@ -23843,40 +22202,6 @@
                         <a:tabLst/>
                         <a:defRPr/>
                       </a:pPr>
-                      <a:r>
-                        <a:rPr kumimoji="0" lang="es-MX" sz="1000" b="0" i="0" u="none" strike="noStrike" kern="1200" cap="none" spc="0" normalizeH="0" baseline="0" noProof="0" dirty="0">
-                          <a:ln>
-                            <a:noFill/>
-                          </a:ln>
-                          <a:solidFill>
-                            <a:schemeClr val="tx1"/>
-                          </a:solidFill>
-                          <a:effectLst/>
-                          <a:uLnTx/>
-                          <a:uFillTx/>
-                          <a:latin typeface="Montserrat" panose="00000500000000000000" pitchFamily="2" charset="0"/>
-                          <a:ea typeface="+mn-ea"/>
-                          <a:cs typeface="+mn-cs"/>
-                        </a:rPr>
-                        <a:t>0.0 </a:t>
-                      </a:r>
-                      <a:r>
-                        <a:rPr kumimoji="0" lang="es-MX" sz="1000" b="0" i="0" u="none" strike="noStrike" kern="1200" cap="none" spc="0" normalizeH="0" baseline="0" noProof="0" dirty="0" err="1">
-                          <a:ln>
-                            <a:noFill/>
-                          </a:ln>
-                          <a:solidFill>
-                            <a:schemeClr val="tx1"/>
-                          </a:solidFill>
-                          <a:effectLst/>
-                          <a:uLnTx/>
-                          <a:uFillTx/>
-                          <a:latin typeface="Montserrat" panose="00000500000000000000" pitchFamily="2" charset="0"/>
-                          <a:ea typeface="+mn-ea"/>
-                          <a:cs typeface="+mn-cs"/>
-                        </a:rPr>
-                        <a:t>pp</a:t>
-                      </a:r>
                       <a:endParaRPr kumimoji="0" lang="es-MX" sz="1000" b="0" i="0" u="none" strike="noStrike" kern="1200" cap="none" spc="0" normalizeH="0" baseline="0" noProof="0" dirty="0">
                         <a:ln>
                           <a:noFill/>
@@ -26595,7 +24920,7 @@
           <p:nvPr>
             <p:extLst>
               <p:ext uri="{D42A27DB-BD31-4B8C-83A1-F6EECF244321}">
-                <p14:modId xmlns:p14="http://schemas.microsoft.com/office/powerpoint/2010/main" val="1729604434"/>
+                <p14:modId xmlns:p14="http://schemas.microsoft.com/office/powerpoint/2010/main" val="3140990918"/>
               </p:ext>
             </p:extLst>
           </p:nvPr>
@@ -27050,13 +25375,10 @@
                       <a:pPr algn="ctr" fontAlgn="b">
                         <a:buNone/>
                       </a:pPr>
-                      <a:r>
-                        <a:rPr lang="es-MX" sz="1000" b="1" i="0" u="none" strike="noStrike" dirty="0">
-                          <a:effectLst/>
-                          <a:latin typeface="Montserrat" panose="00000500000000000000" pitchFamily="2" charset="0"/>
-                        </a:rPr>
-                        <a:t>0</a:t>
-                      </a:r>
+                      <a:endParaRPr lang="es-MX" sz="1000" b="1" i="0" u="none" strike="noStrike" dirty="0">
+                        <a:effectLst/>
+                        <a:latin typeface="Montserrat" panose="00000500000000000000" pitchFamily="2" charset="0"/>
+                      </a:endParaRPr>
                     </a:p>
                   </a:txBody>
                   <a:tcPr marL="7620" marR="7620" marT="7620" marB="0" anchor="ctr">
@@ -27106,13 +25428,10 @@
                       <a:pPr algn="ctr" fontAlgn="b">
                         <a:buNone/>
                       </a:pPr>
-                      <a:r>
-                        <a:rPr lang="es-MX" sz="1000" b="1" i="0" u="none" strike="noStrike" dirty="0">
-                          <a:effectLst/>
-                          <a:latin typeface="Montserrat" panose="00000500000000000000" pitchFamily="2" charset="0"/>
-                        </a:rPr>
-                        <a:t>0.0%</a:t>
-                      </a:r>
+                      <a:endParaRPr lang="es-MX" sz="1000" b="1" i="0" u="none" strike="noStrike" dirty="0">
+                        <a:effectLst/>
+                        <a:latin typeface="Montserrat" panose="00000500000000000000" pitchFamily="2" charset="0"/>
+                      </a:endParaRPr>
                     </a:p>
                   </a:txBody>
                   <a:tcPr marL="7620" marR="7620" marT="7620" marB="0" anchor="ctr">
@@ -27167,13 +25486,10 @@
                       <a:pPr algn="ctr" fontAlgn="b">
                         <a:buNone/>
                       </a:pPr>
-                      <a:r>
-                        <a:rPr lang="es-MX" sz="1000" b="1" i="0" u="none" strike="noStrike" dirty="0">
-                          <a:effectLst/>
-                          <a:latin typeface="Montserrat" panose="00000500000000000000" pitchFamily="2" charset="0"/>
-                        </a:rPr>
-                        <a:t>0.0%</a:t>
-                      </a:r>
+                      <a:endParaRPr lang="es-MX" sz="1000" b="1" i="0" u="none" strike="noStrike" dirty="0">
+                        <a:effectLst/>
+                        <a:latin typeface="Montserrat" panose="00000500000000000000" pitchFamily="2" charset="0"/>
+                      </a:endParaRPr>
                     </a:p>
                   </a:txBody>
                   <a:tcPr marL="7620" marR="7620" marT="7620" marB="0" anchor="ctr">
@@ -27224,26 +25540,6 @@
                       <a:pPr algn="ctr" fontAlgn="b">
                         <a:buNone/>
                       </a:pPr>
-                      <a:r>
-                        <a:rPr lang="es-MX" sz="1000" b="1" i="0" u="none" strike="noStrike" dirty="0">
-                          <a:solidFill>
-                            <a:schemeClr val="tx1"/>
-                          </a:solidFill>
-                          <a:effectLst/>
-                          <a:latin typeface="Montserrat" panose="00000500000000000000" pitchFamily="2" charset="0"/>
-                        </a:rPr>
-                        <a:t>0.0 </a:t>
-                      </a:r>
-                      <a:r>
-                        <a:rPr lang="es-MX" sz="1000" b="1" i="0" u="none" strike="noStrike" dirty="0" err="1">
-                          <a:solidFill>
-                            <a:schemeClr val="tx1"/>
-                          </a:solidFill>
-                          <a:effectLst/>
-                          <a:latin typeface="Montserrat" panose="00000500000000000000" pitchFamily="2" charset="0"/>
-                        </a:rPr>
-                        <a:t>pp</a:t>
-                      </a:r>
                       <a:endParaRPr lang="es-MX" sz="1000" b="1" i="0" u="none" strike="noStrike" dirty="0">
                         <a:solidFill>
                           <a:schemeClr val="tx1"/>
@@ -27308,13 +25604,10 @@
                       <a:pPr algn="ctr" fontAlgn="b">
                         <a:buNone/>
                       </a:pPr>
-                      <a:r>
-                        <a:rPr lang="es-MX" sz="1000" b="0" i="0" u="none" strike="noStrike" dirty="0">
-                          <a:effectLst/>
-                          <a:latin typeface="Montserrat" panose="00000500000000000000" pitchFamily="2" charset="0"/>
-                        </a:rPr>
-                        <a:t>0</a:t>
-                      </a:r>
+                      <a:endParaRPr lang="es-MX" sz="1000" b="0" i="0" u="none" strike="noStrike" dirty="0">
+                        <a:effectLst/>
+                        <a:latin typeface="Montserrat" panose="00000500000000000000" pitchFamily="2" charset="0"/>
+                      </a:endParaRPr>
                     </a:p>
                   </a:txBody>
                   <a:tcPr marL="7620" marR="7620" marT="7620" marB="0" anchor="ctr">
@@ -27364,13 +25657,10 @@
                       <a:pPr algn="ctr" fontAlgn="b">
                         <a:buNone/>
                       </a:pPr>
-                      <a:r>
-                        <a:rPr lang="es-MX" sz="1000" b="0" i="0" u="none" strike="noStrike" dirty="0">
-                          <a:effectLst/>
-                          <a:latin typeface="Montserrat" panose="00000500000000000000" pitchFamily="2" charset="0"/>
-                        </a:rPr>
-                        <a:t>0.0%</a:t>
-                      </a:r>
+                      <a:endParaRPr lang="es-MX" sz="1000" b="0" i="0" u="none" strike="noStrike" dirty="0">
+                        <a:effectLst/>
+                        <a:latin typeface="Montserrat" panose="00000500000000000000" pitchFamily="2" charset="0"/>
+                      </a:endParaRPr>
                     </a:p>
                   </a:txBody>
                   <a:tcPr marL="7620" marR="7620" marT="7620" marB="0" anchor="ctr">
@@ -27425,13 +25715,10 @@
                       <a:pPr algn="ctr" fontAlgn="b">
                         <a:buNone/>
                       </a:pPr>
-                      <a:r>
-                        <a:rPr lang="es-MX" sz="1000" b="0" i="0" u="none" strike="noStrike" dirty="0">
-                          <a:effectLst/>
-                          <a:latin typeface="Montserrat" panose="00000500000000000000" pitchFamily="2" charset="0"/>
-                        </a:rPr>
-                        <a:t>0.0%</a:t>
-                      </a:r>
+                      <a:endParaRPr lang="es-MX" sz="1000" b="0" i="0" u="none" strike="noStrike" dirty="0">
+                        <a:effectLst/>
+                        <a:latin typeface="Montserrat" panose="00000500000000000000" pitchFamily="2" charset="0"/>
+                      </a:endParaRPr>
                     </a:p>
                   </a:txBody>
                   <a:tcPr marL="7620" marR="7620" marT="7620" marB="0" anchor="ctr">
@@ -27482,26 +25769,6 @@
                       <a:pPr algn="ctr" fontAlgn="b">
                         <a:buNone/>
                       </a:pPr>
-                      <a:r>
-                        <a:rPr lang="es-MX" sz="1000" b="0" i="0" u="none" strike="noStrike" dirty="0">
-                          <a:solidFill>
-                            <a:schemeClr val="tx1"/>
-                          </a:solidFill>
-                          <a:effectLst/>
-                          <a:latin typeface="Montserrat" panose="00000500000000000000" pitchFamily="2" charset="0"/>
-                        </a:rPr>
-                        <a:t>0.0 </a:t>
-                      </a:r>
-                      <a:r>
-                        <a:rPr lang="es-MX" sz="1000" b="0" i="0" u="none" strike="noStrike" dirty="0" err="1">
-                          <a:solidFill>
-                            <a:schemeClr val="tx1"/>
-                          </a:solidFill>
-                          <a:effectLst/>
-                          <a:latin typeface="Montserrat" panose="00000500000000000000" pitchFamily="2" charset="0"/>
-                        </a:rPr>
-                        <a:t>pp</a:t>
-                      </a:r>
                       <a:endParaRPr lang="es-MX" sz="1000" b="0" i="0" u="none" strike="noStrike" dirty="0">
                         <a:solidFill>
                           <a:schemeClr val="tx1"/>
@@ -27566,13 +25833,10 @@
                       <a:pPr algn="ctr" fontAlgn="b">
                         <a:buNone/>
                       </a:pPr>
-                      <a:r>
-                        <a:rPr lang="es-MX" sz="1000" b="0" i="0" u="none" strike="noStrike" dirty="0">
-                          <a:effectLst/>
-                          <a:latin typeface="Montserrat" panose="00000500000000000000" pitchFamily="2" charset="0"/>
-                        </a:rPr>
-                        <a:t>0</a:t>
-                      </a:r>
+                      <a:endParaRPr lang="es-MX" sz="1000" b="0" i="0" u="none" strike="noStrike" dirty="0">
+                        <a:effectLst/>
+                        <a:latin typeface="Montserrat" panose="00000500000000000000" pitchFamily="2" charset="0"/>
+                      </a:endParaRPr>
                     </a:p>
                   </a:txBody>
                   <a:tcPr marL="7620" marR="7620" marT="7620" marB="0" anchor="ctr">
@@ -27622,13 +25886,10 @@
                       <a:pPr algn="ctr" fontAlgn="b">
                         <a:buNone/>
                       </a:pPr>
-                      <a:r>
-                        <a:rPr lang="es-MX" sz="1000" b="0" i="0" u="none" strike="noStrike" dirty="0">
-                          <a:effectLst/>
-                          <a:latin typeface="Montserrat" panose="00000500000000000000" pitchFamily="2" charset="0"/>
-                        </a:rPr>
-                        <a:t>0.0%</a:t>
-                      </a:r>
+                      <a:endParaRPr lang="es-MX" sz="1000" b="0" i="0" u="none" strike="noStrike" dirty="0">
+                        <a:effectLst/>
+                        <a:latin typeface="Montserrat" panose="00000500000000000000" pitchFamily="2" charset="0"/>
+                      </a:endParaRPr>
                     </a:p>
                   </a:txBody>
                   <a:tcPr marL="7620" marR="7620" marT="7620" marB="0" anchor="ctr">
@@ -27683,13 +25944,10 @@
                       <a:pPr algn="ctr" fontAlgn="b">
                         <a:buNone/>
                       </a:pPr>
-                      <a:r>
-                        <a:rPr lang="es-MX" sz="1000" b="0" i="0" u="none" strike="noStrike" dirty="0">
-                          <a:effectLst/>
-                          <a:latin typeface="Montserrat" panose="00000500000000000000" pitchFamily="2" charset="0"/>
-                        </a:rPr>
-                        <a:t>0.0%</a:t>
-                      </a:r>
+                      <a:endParaRPr lang="es-MX" sz="1000" b="0" i="0" u="none" strike="noStrike" dirty="0">
+                        <a:effectLst/>
+                        <a:latin typeface="Montserrat" panose="00000500000000000000" pitchFamily="2" charset="0"/>
+                      </a:endParaRPr>
                     </a:p>
                   </a:txBody>
                   <a:tcPr marL="7620" marR="7620" marT="7620" marB="0" anchor="ctr">
@@ -27740,26 +25998,6 @@
                       <a:pPr algn="ctr" fontAlgn="b">
                         <a:buNone/>
                       </a:pPr>
-                      <a:r>
-                        <a:rPr lang="es-MX" sz="1000" b="0" i="0" u="none" strike="noStrike" dirty="0">
-                          <a:solidFill>
-                            <a:schemeClr val="tx1"/>
-                          </a:solidFill>
-                          <a:effectLst/>
-                          <a:latin typeface="Montserrat" panose="00000500000000000000" pitchFamily="2" charset="0"/>
-                        </a:rPr>
-                        <a:t>0.0 </a:t>
-                      </a:r>
-                      <a:r>
-                        <a:rPr lang="es-MX" sz="1000" b="0" i="0" u="none" strike="noStrike" dirty="0" err="1">
-                          <a:solidFill>
-                            <a:schemeClr val="tx1"/>
-                          </a:solidFill>
-                          <a:effectLst/>
-                          <a:latin typeface="Montserrat" panose="00000500000000000000" pitchFamily="2" charset="0"/>
-                        </a:rPr>
-                        <a:t>pp</a:t>
-                      </a:r>
                       <a:endParaRPr lang="es-MX" sz="1000" b="0" i="0" u="none" strike="noStrike" dirty="0">
                         <a:solidFill>
                           <a:schemeClr val="tx1"/>
@@ -27824,13 +26062,10 @@
                       <a:pPr algn="ctr" fontAlgn="b">
                         <a:buNone/>
                       </a:pPr>
-                      <a:r>
-                        <a:rPr lang="es-MX" sz="1000" b="0" i="0" u="none" strike="noStrike" dirty="0">
-                          <a:effectLst/>
-                          <a:latin typeface="Montserrat" panose="00000500000000000000" pitchFamily="2" charset="0"/>
-                        </a:rPr>
-                        <a:t>0</a:t>
-                      </a:r>
+                      <a:endParaRPr lang="es-MX" sz="1000" b="0" i="0" u="none" strike="noStrike" dirty="0">
+                        <a:effectLst/>
+                        <a:latin typeface="Montserrat" panose="00000500000000000000" pitchFamily="2" charset="0"/>
+                      </a:endParaRPr>
                     </a:p>
                   </a:txBody>
                   <a:tcPr marL="7620" marR="7620" marT="7620" marB="0" anchor="ctr">
@@ -27880,13 +26115,10 @@
                       <a:pPr algn="ctr" fontAlgn="b">
                         <a:buNone/>
                       </a:pPr>
-                      <a:r>
-                        <a:rPr lang="es-MX" sz="1000" b="0" i="0" u="none" strike="noStrike" dirty="0">
-                          <a:effectLst/>
-                          <a:latin typeface="Montserrat" panose="00000500000000000000" pitchFamily="2" charset="0"/>
-                        </a:rPr>
-                        <a:t>0.0%</a:t>
-                      </a:r>
+                      <a:endParaRPr lang="es-MX" sz="1000" b="0" i="0" u="none" strike="noStrike" dirty="0">
+                        <a:effectLst/>
+                        <a:latin typeface="Montserrat" panose="00000500000000000000" pitchFamily="2" charset="0"/>
+                      </a:endParaRPr>
                     </a:p>
                   </a:txBody>
                   <a:tcPr marL="7620" marR="7620" marT="7620" marB="0" anchor="ctr">
@@ -27941,13 +26173,10 @@
                       <a:pPr algn="ctr" fontAlgn="b">
                         <a:buNone/>
                       </a:pPr>
-                      <a:r>
-                        <a:rPr lang="es-MX" sz="1000" b="0" i="0" u="none" strike="noStrike" dirty="0">
-                          <a:effectLst/>
-                          <a:latin typeface="Montserrat" panose="00000500000000000000" pitchFamily="2" charset="0"/>
-                        </a:rPr>
-                        <a:t>0.0%</a:t>
-                      </a:r>
+                      <a:endParaRPr lang="es-MX" sz="1000" b="0" i="0" u="none" strike="noStrike" dirty="0">
+                        <a:effectLst/>
+                        <a:latin typeface="Montserrat" panose="00000500000000000000" pitchFamily="2" charset="0"/>
+                      </a:endParaRPr>
                     </a:p>
                   </a:txBody>
                   <a:tcPr marL="7620" marR="7620" marT="7620" marB="0" anchor="ctr">
@@ -27998,26 +26227,6 @@
                       <a:pPr algn="ctr" fontAlgn="b">
                         <a:buNone/>
                       </a:pPr>
-                      <a:r>
-                        <a:rPr lang="es-MX" sz="1000" b="0" i="0" u="none" strike="noStrike" dirty="0">
-                          <a:solidFill>
-                            <a:schemeClr val="tx1"/>
-                          </a:solidFill>
-                          <a:effectLst/>
-                          <a:latin typeface="Montserrat" panose="00000500000000000000" pitchFamily="2" charset="0"/>
-                        </a:rPr>
-                        <a:t>0.0 </a:t>
-                      </a:r>
-                      <a:r>
-                        <a:rPr lang="es-MX" sz="1000" b="0" i="0" u="none" strike="noStrike" dirty="0" err="1">
-                          <a:solidFill>
-                            <a:schemeClr val="tx1"/>
-                          </a:solidFill>
-                          <a:effectLst/>
-                          <a:latin typeface="Montserrat" panose="00000500000000000000" pitchFamily="2" charset="0"/>
-                        </a:rPr>
-                        <a:t>pp</a:t>
-                      </a:r>
                       <a:endParaRPr lang="es-MX" sz="1000" b="0" i="0" u="none" strike="noStrike" dirty="0">
                         <a:solidFill>
                           <a:schemeClr val="tx1"/>
@@ -28082,13 +26291,10 @@
                       <a:pPr algn="ctr" fontAlgn="b">
                         <a:buNone/>
                       </a:pPr>
-                      <a:r>
-                        <a:rPr lang="es-MX" sz="1000" b="0" i="0" u="none" strike="noStrike" dirty="0">
-                          <a:effectLst/>
-                          <a:latin typeface="Montserrat" panose="00000500000000000000" pitchFamily="2" charset="0"/>
-                        </a:rPr>
-                        <a:t>0</a:t>
-                      </a:r>
+                      <a:endParaRPr lang="es-MX" sz="1000" b="0" i="0" u="none" strike="noStrike" dirty="0">
+                        <a:effectLst/>
+                        <a:latin typeface="Montserrat" panose="00000500000000000000" pitchFamily="2" charset="0"/>
+                      </a:endParaRPr>
                     </a:p>
                   </a:txBody>
                   <a:tcPr marL="7620" marR="7620" marT="7620" marB="0" anchor="ctr">
@@ -28138,13 +26344,10 @@
                       <a:pPr algn="ctr" fontAlgn="b">
                         <a:buNone/>
                       </a:pPr>
-                      <a:r>
-                        <a:rPr lang="es-MX" sz="1000" b="0" i="0" u="none" strike="noStrike" dirty="0">
-                          <a:effectLst/>
-                          <a:latin typeface="Montserrat" panose="00000500000000000000" pitchFamily="2" charset="0"/>
-                        </a:rPr>
-                        <a:t>0.0%</a:t>
-                      </a:r>
+                      <a:endParaRPr lang="es-MX" sz="1000" b="0" i="0" u="none" strike="noStrike" dirty="0">
+                        <a:effectLst/>
+                        <a:latin typeface="Montserrat" panose="00000500000000000000" pitchFamily="2" charset="0"/>
+                      </a:endParaRPr>
                     </a:p>
                   </a:txBody>
                   <a:tcPr marL="7620" marR="7620" marT="7620" marB="0" anchor="ctr">
@@ -28199,13 +26402,10 @@
                       <a:pPr algn="ctr" fontAlgn="b">
                         <a:buNone/>
                       </a:pPr>
-                      <a:r>
-                        <a:rPr lang="es-MX" sz="1000" b="0" i="0" u="none" strike="noStrike" dirty="0">
-                          <a:effectLst/>
-                          <a:latin typeface="Montserrat" panose="00000500000000000000" pitchFamily="2" charset="0"/>
-                        </a:rPr>
-                        <a:t>0.0%</a:t>
-                      </a:r>
+                      <a:endParaRPr lang="es-MX" sz="1000" b="0" i="0" u="none" strike="noStrike" dirty="0">
+                        <a:effectLst/>
+                        <a:latin typeface="Montserrat" panose="00000500000000000000" pitchFamily="2" charset="0"/>
+                      </a:endParaRPr>
                     </a:p>
                   </a:txBody>
                   <a:tcPr marL="7620" marR="7620" marT="7620" marB="0" anchor="ctr">
@@ -28256,26 +26456,6 @@
                       <a:pPr algn="ctr" fontAlgn="b">
                         <a:buNone/>
                       </a:pPr>
-                      <a:r>
-                        <a:rPr lang="es-MX" sz="1000" b="0" i="0" u="none" strike="noStrike" dirty="0">
-                          <a:solidFill>
-                            <a:schemeClr val="tx1"/>
-                          </a:solidFill>
-                          <a:effectLst/>
-                          <a:latin typeface="Montserrat" panose="00000500000000000000" pitchFamily="2" charset="0"/>
-                        </a:rPr>
-                        <a:t>0.0 </a:t>
-                      </a:r>
-                      <a:r>
-                        <a:rPr lang="es-MX" sz="1000" b="0" i="0" u="none" strike="noStrike" dirty="0" err="1">
-                          <a:solidFill>
-                            <a:schemeClr val="tx1"/>
-                          </a:solidFill>
-                          <a:effectLst/>
-                          <a:latin typeface="Montserrat" panose="00000500000000000000" pitchFamily="2" charset="0"/>
-                        </a:rPr>
-                        <a:t>pp</a:t>
-                      </a:r>
                       <a:endParaRPr lang="es-MX" sz="1000" b="0" i="0" u="none" strike="noStrike" dirty="0">
                         <a:solidFill>
                           <a:schemeClr val="tx1"/>
@@ -31015,7 +29195,7 @@
           <p:nvPr>
             <p:extLst>
               <p:ext uri="{D42A27DB-BD31-4B8C-83A1-F6EECF244321}">
-                <p14:modId xmlns:p14="http://schemas.microsoft.com/office/powerpoint/2010/main" val="1825560135"/>
+                <p14:modId xmlns:p14="http://schemas.microsoft.com/office/powerpoint/2010/main" val="2696008896"/>
               </p:ext>
             </p:extLst>
           </p:nvPr>
@@ -31273,18 +29453,15 @@
                       <a:pPr algn="l" fontAlgn="b">
                         <a:buNone/>
                       </a:pPr>
-                      <a:r>
-                        <a:rPr lang="es-MX" sz="1400" b="0" i="0" u="none" strike="noStrike" kern="1200" dirty="0">
-                          <a:solidFill>
-                            <a:srgbClr val="00B050"/>
-                          </a:solidFill>
-                          <a:effectLst/>
-                          <a:latin typeface="Montserrat" panose="00000500000000000000" pitchFamily="2" charset="0"/>
-                          <a:ea typeface="+mn-ea"/>
-                          <a:cs typeface="+mn-cs"/>
-                        </a:rPr>
-                        <a:t>La empresa me permite aprender y crecer</a:t>
-                      </a:r>
+                      <a:endParaRPr lang="es-MX" sz="1400" b="0" i="0" u="none" strike="noStrike" kern="1200" dirty="0">
+                        <a:solidFill>
+                          <a:srgbClr val="00B050"/>
+                        </a:solidFill>
+                        <a:effectLst/>
+                        <a:latin typeface="Montserrat" panose="00000500000000000000" pitchFamily="2" charset="0"/>
+                        <a:ea typeface="+mn-ea"/>
+                        <a:cs typeface="+mn-cs"/>
+                      </a:endParaRPr>
                     </a:p>
                   </a:txBody>
                   <a:tcPr marL="7620" marR="7620" marT="7620" marB="0" anchor="ctr">
@@ -31342,18 +29519,15 @@
                       <a:pPr marL="0" algn="ctr" defTabSz="918058" rtl="0" eaLnBrk="1" fontAlgn="b" latinLnBrk="0" hangingPunct="1">
                         <a:buNone/>
                       </a:pPr>
-                      <a:r>
-                        <a:rPr lang="es-MX" sz="1400" b="1" i="0" u="none" strike="noStrike" kern="1200" dirty="0">
-                          <a:solidFill>
-                            <a:srgbClr val="00B050"/>
-                          </a:solidFill>
-                          <a:effectLst/>
-                          <a:latin typeface="Montserrat" panose="00000500000000000000" pitchFamily="2" charset="0"/>
-                          <a:ea typeface="+mn-ea"/>
-                          <a:cs typeface="+mn-cs"/>
-                        </a:rPr>
-                        <a:t>14</a:t>
-                      </a:r>
+                      <a:endParaRPr lang="es-MX" sz="1400" b="1" i="0" u="none" strike="noStrike" kern="1200" dirty="0">
+                        <a:solidFill>
+                          <a:srgbClr val="00B050"/>
+                        </a:solidFill>
+                        <a:effectLst/>
+                        <a:latin typeface="Montserrat" panose="00000500000000000000" pitchFamily="2" charset="0"/>
+                        <a:ea typeface="+mn-ea"/>
+                        <a:cs typeface="+mn-cs"/>
+                      </a:endParaRPr>
                     </a:p>
                   </a:txBody>
                   <a:tcPr marL="7620" marR="7620" marT="7620" marB="0" anchor="ctr">
@@ -31412,20 +29586,17 @@
                       <a:pPr algn="ctr" fontAlgn="b">
                         <a:buNone/>
                       </a:pPr>
-                      <a:r>
-                        <a:rPr lang="es-MX" sz="1400" b="1" i="0" u="none" strike="noStrike" kern="1200" dirty="0">
-                          <a:solidFill>
-                            <a:schemeClr val="bg1">
-                              <a:lumMod val="50000"/>
-                            </a:schemeClr>
-                          </a:solidFill>
-                          <a:effectLst/>
-                          <a:latin typeface="Montserrat" panose="00000500000000000000" pitchFamily="2" charset="0"/>
-                          <a:ea typeface="+mn-ea"/>
-                          <a:cs typeface="Calibri" panose="020F0502020204030204" pitchFamily="34" charset="0"/>
-                        </a:rPr>
-                        <a:t>Desarrollo y crecimiento</a:t>
-                      </a:r>
+                      <a:endParaRPr lang="es-MX" sz="1400" b="1" i="0" u="none" strike="noStrike" kern="1200" dirty="0">
+                        <a:solidFill>
+                          <a:schemeClr val="bg1">
+                            <a:lumMod val="50000"/>
+                          </a:schemeClr>
+                        </a:solidFill>
+                        <a:effectLst/>
+                        <a:latin typeface="Montserrat" panose="00000500000000000000" pitchFamily="2" charset="0"/>
+                        <a:ea typeface="+mn-ea"/>
+                        <a:cs typeface="Calibri" panose="020F0502020204030204" pitchFamily="34" charset="0"/>
+                      </a:endParaRPr>
                     </a:p>
                   </a:txBody>
                   <a:tcPr marL="7620" marR="7620" marT="7620" marB="0" anchor="ctr">
@@ -31491,18 +29662,15 @@
                       <a:pPr algn="l" fontAlgn="b">
                         <a:buNone/>
                       </a:pPr>
-                      <a:r>
-                        <a:rPr lang="es-MX" sz="1400" b="0" i="0" u="none" strike="noStrike" kern="1200" dirty="0">
-                          <a:solidFill>
-                            <a:srgbClr val="00B050"/>
-                          </a:solidFill>
-                          <a:effectLst/>
-                          <a:latin typeface="Montserrat" panose="00000500000000000000" pitchFamily="2" charset="0"/>
-                          <a:ea typeface="+mn-ea"/>
-                          <a:cs typeface="+mn-cs"/>
-                        </a:rPr>
-                        <a:t>Estoy orgulloso de pertenecer al grupo /Es una buena empresa /recomendable</a:t>
-                      </a:r>
+                      <a:endParaRPr lang="es-MX" sz="1400" b="0" i="0" u="none" strike="noStrike" kern="1200" dirty="0">
+                        <a:solidFill>
+                          <a:srgbClr val="00B050"/>
+                        </a:solidFill>
+                        <a:effectLst/>
+                        <a:latin typeface="Montserrat" panose="00000500000000000000" pitchFamily="2" charset="0"/>
+                        <a:ea typeface="+mn-ea"/>
+                        <a:cs typeface="+mn-cs"/>
+                      </a:endParaRPr>
                     </a:p>
                   </a:txBody>
                   <a:tcPr marL="7620" marR="7620" marT="7620" marB="0" anchor="ctr">
@@ -31560,18 +29728,15 @@
                       <a:pPr marL="0" algn="ctr" defTabSz="918058" rtl="0" eaLnBrk="1" fontAlgn="b" latinLnBrk="0" hangingPunct="1">
                         <a:buNone/>
                       </a:pPr>
-                      <a:r>
-                        <a:rPr lang="es-MX" sz="1400" b="1" i="0" u="none" strike="noStrike" kern="1200" dirty="0">
-                          <a:solidFill>
-                            <a:srgbClr val="00B050"/>
-                          </a:solidFill>
-                          <a:effectLst/>
-                          <a:latin typeface="Montserrat" panose="00000500000000000000" pitchFamily="2" charset="0"/>
-                          <a:ea typeface="+mn-ea"/>
-                          <a:cs typeface="+mn-cs"/>
-                        </a:rPr>
-                        <a:t>7</a:t>
-                      </a:r>
+                      <a:endParaRPr lang="es-MX" sz="1400" b="1" i="0" u="none" strike="noStrike" kern="1200" dirty="0">
+                        <a:solidFill>
+                          <a:srgbClr val="00B050"/>
+                        </a:solidFill>
+                        <a:effectLst/>
+                        <a:latin typeface="Montserrat" panose="00000500000000000000" pitchFamily="2" charset="0"/>
+                        <a:ea typeface="+mn-ea"/>
+                        <a:cs typeface="+mn-cs"/>
+                      </a:endParaRPr>
                     </a:p>
                   </a:txBody>
                   <a:tcPr marL="7620" marR="7620" marT="7620" marB="0" anchor="ctr">
@@ -31630,20 +29795,17 @@
                       <a:pPr algn="ctr" fontAlgn="b">
                         <a:buNone/>
                       </a:pPr>
-                      <a:r>
-                        <a:rPr lang="es-MX" sz="1400" b="1" i="0" u="none" strike="noStrike" kern="1200" dirty="0">
-                          <a:solidFill>
-                            <a:schemeClr val="bg1">
-                              <a:lumMod val="50000"/>
-                            </a:schemeClr>
-                          </a:solidFill>
-                          <a:effectLst/>
-                          <a:latin typeface="Montserrat" panose="00000500000000000000" pitchFamily="2" charset="0"/>
-                          <a:ea typeface="+mn-ea"/>
-                          <a:cs typeface="Calibri" panose="020F0502020204030204" pitchFamily="34" charset="0"/>
-                        </a:rPr>
-                        <a:t>Imagen de la empresa</a:t>
-                      </a:r>
+                      <a:endParaRPr lang="es-MX" sz="1400" b="1" i="0" u="none" strike="noStrike" kern="1200" dirty="0">
+                        <a:solidFill>
+                          <a:schemeClr val="bg1">
+                            <a:lumMod val="50000"/>
+                          </a:schemeClr>
+                        </a:solidFill>
+                        <a:effectLst/>
+                        <a:latin typeface="Montserrat" panose="00000500000000000000" pitchFamily="2" charset="0"/>
+                        <a:ea typeface="+mn-ea"/>
+                        <a:cs typeface="Calibri" panose="020F0502020204030204" pitchFamily="34" charset="0"/>
+                      </a:endParaRPr>
                     </a:p>
                   </a:txBody>
                   <a:tcPr marL="7620" marR="7620" marT="7620" marB="0" anchor="ctr">
@@ -31709,18 +29871,15 @@
                       <a:pPr algn="l" fontAlgn="b">
                         <a:buNone/>
                       </a:pPr>
-                      <a:r>
-                        <a:rPr lang="es-MX" sz="1400" b="0" i="0" u="none" strike="noStrike" kern="1200" dirty="0">
-                          <a:solidFill>
-                            <a:srgbClr val="00B050"/>
-                          </a:solidFill>
-                          <a:effectLst/>
-                          <a:latin typeface="Montserrat" panose="00000500000000000000" pitchFamily="2" charset="0"/>
-                          <a:ea typeface="+mn-ea"/>
-                          <a:cs typeface="+mn-cs"/>
-                        </a:rPr>
-                        <a:t>La empresa me da estabilidad (laboral/económica)</a:t>
-                      </a:r>
+                      <a:endParaRPr lang="es-MX" sz="1400" b="0" i="0" u="none" strike="noStrike" kern="1200" dirty="0">
+                        <a:solidFill>
+                          <a:srgbClr val="00B050"/>
+                        </a:solidFill>
+                        <a:effectLst/>
+                        <a:latin typeface="Montserrat" panose="00000500000000000000" pitchFamily="2" charset="0"/>
+                        <a:ea typeface="+mn-ea"/>
+                        <a:cs typeface="+mn-cs"/>
+                      </a:endParaRPr>
                     </a:p>
                   </a:txBody>
                   <a:tcPr marL="7620" marR="7620" marT="7620" marB="0" anchor="ctr">
@@ -31778,18 +29937,15 @@
                       <a:pPr marL="0" algn="ctr" defTabSz="918058" rtl="0" eaLnBrk="1" fontAlgn="b" latinLnBrk="0" hangingPunct="1">
                         <a:buNone/>
                       </a:pPr>
-                      <a:r>
-                        <a:rPr lang="es-MX" sz="1400" b="1" i="0" u="none" strike="noStrike" kern="1200">
-                          <a:solidFill>
-                            <a:srgbClr val="00B050"/>
-                          </a:solidFill>
-                          <a:effectLst/>
-                          <a:latin typeface="Montserrat" panose="00000500000000000000" pitchFamily="2" charset="0"/>
-                          <a:ea typeface="+mn-ea"/>
-                          <a:cs typeface="+mn-cs"/>
-                        </a:rPr>
-                        <a:t>6</a:t>
-                      </a:r>
+                      <a:endParaRPr lang="es-MX" sz="1400" b="1" i="0" u="none" strike="noStrike" kern="1200">
+                        <a:solidFill>
+                          <a:srgbClr val="00B050"/>
+                        </a:solidFill>
+                        <a:effectLst/>
+                        <a:latin typeface="Montserrat" panose="00000500000000000000" pitchFamily="2" charset="0"/>
+                        <a:ea typeface="+mn-ea"/>
+                        <a:cs typeface="+mn-cs"/>
+                      </a:endParaRPr>
                     </a:p>
                   </a:txBody>
                   <a:tcPr marL="7620" marR="7620" marT="7620" marB="0" anchor="ctr">
@@ -31848,20 +30004,17 @@
                       <a:pPr algn="ctr" fontAlgn="b">
                         <a:buNone/>
                       </a:pPr>
-                      <a:r>
-                        <a:rPr lang="es-MX" sz="1400" b="1" i="0" u="none" strike="noStrike" kern="1200" dirty="0">
-                          <a:solidFill>
-                            <a:schemeClr val="bg1">
-                              <a:lumMod val="50000"/>
-                            </a:schemeClr>
-                          </a:solidFill>
-                          <a:effectLst/>
-                          <a:latin typeface="Montserrat" panose="00000500000000000000" pitchFamily="2" charset="0"/>
-                          <a:ea typeface="+mn-ea"/>
-                          <a:cs typeface="Calibri" panose="020F0502020204030204" pitchFamily="34" charset="0"/>
-                        </a:rPr>
-                        <a:t>Compensación</a:t>
-                      </a:r>
+                      <a:endParaRPr lang="es-MX" sz="1400" b="1" i="0" u="none" strike="noStrike" kern="1200" dirty="0">
+                        <a:solidFill>
+                          <a:schemeClr val="bg1">
+                            <a:lumMod val="50000"/>
+                          </a:schemeClr>
+                        </a:solidFill>
+                        <a:effectLst/>
+                        <a:latin typeface="Montserrat" panose="00000500000000000000" pitchFamily="2" charset="0"/>
+                        <a:ea typeface="+mn-ea"/>
+                        <a:cs typeface="Calibri" panose="020F0502020204030204" pitchFamily="34" charset="0"/>
+                      </a:endParaRPr>
                     </a:p>
                   </a:txBody>
                   <a:tcPr marL="7620" marR="7620" marT="7620" marB="0" anchor="ctr">
@@ -31927,18 +30080,15 @@
                       <a:pPr algn="l" fontAlgn="b">
                         <a:buNone/>
                       </a:pPr>
-                      <a:r>
-                        <a:rPr lang="es-MX" sz="1400" b="0" i="0" u="none" strike="noStrike" kern="1200" dirty="0">
-                          <a:solidFill>
-                            <a:srgbClr val="00B050"/>
-                          </a:solidFill>
-                          <a:effectLst/>
-                          <a:latin typeface="Montserrat" panose="00000500000000000000" pitchFamily="2" charset="0"/>
-                          <a:ea typeface="+mn-ea"/>
-                          <a:cs typeface="+mn-cs"/>
-                        </a:rPr>
-                        <a:t>Hay buen ambiente de trabajo</a:t>
-                      </a:r>
+                      <a:endParaRPr lang="es-MX" sz="1400" b="0" i="0" u="none" strike="noStrike" kern="1200" dirty="0">
+                        <a:solidFill>
+                          <a:srgbClr val="00B050"/>
+                        </a:solidFill>
+                        <a:effectLst/>
+                        <a:latin typeface="Montserrat" panose="00000500000000000000" pitchFamily="2" charset="0"/>
+                        <a:ea typeface="+mn-ea"/>
+                        <a:cs typeface="+mn-cs"/>
+                      </a:endParaRPr>
                     </a:p>
                   </a:txBody>
                   <a:tcPr marL="7620" marR="7620" marT="7620" marB="0" anchor="ctr">
@@ -31996,18 +30146,15 @@
                       <a:pPr marL="0" algn="ctr" defTabSz="918058" rtl="0" eaLnBrk="1" fontAlgn="b" latinLnBrk="0" hangingPunct="1">
                         <a:buNone/>
                       </a:pPr>
-                      <a:r>
-                        <a:rPr lang="es-MX" sz="1400" b="1" i="0" u="none" strike="noStrike" kern="1200">
-                          <a:solidFill>
-                            <a:srgbClr val="00B050"/>
-                          </a:solidFill>
-                          <a:effectLst/>
-                          <a:latin typeface="Montserrat" panose="00000500000000000000" pitchFamily="2" charset="0"/>
-                          <a:ea typeface="+mn-ea"/>
-                          <a:cs typeface="+mn-cs"/>
-                        </a:rPr>
-                        <a:t>4</a:t>
-                      </a:r>
+                      <a:endParaRPr lang="es-MX" sz="1400" b="1" i="0" u="none" strike="noStrike" kern="1200">
+                        <a:solidFill>
+                          <a:srgbClr val="00B050"/>
+                        </a:solidFill>
+                        <a:effectLst/>
+                        <a:latin typeface="Montserrat" panose="00000500000000000000" pitchFamily="2" charset="0"/>
+                        <a:ea typeface="+mn-ea"/>
+                        <a:cs typeface="+mn-cs"/>
+                      </a:endParaRPr>
                     </a:p>
                   </a:txBody>
                   <a:tcPr marL="7620" marR="7620" marT="7620" marB="0" anchor="ctr">
@@ -32066,20 +30213,17 @@
                       <a:pPr algn="ctr" fontAlgn="b">
                         <a:buNone/>
                       </a:pPr>
-                      <a:r>
-                        <a:rPr lang="es-MX" sz="1400" b="1" i="0" u="none" strike="noStrike" kern="1200" dirty="0">
-                          <a:solidFill>
-                            <a:schemeClr val="bg1">
-                              <a:lumMod val="50000"/>
-                            </a:schemeClr>
-                          </a:solidFill>
-                          <a:effectLst/>
-                          <a:latin typeface="Montserrat" panose="00000500000000000000" pitchFamily="2" charset="0"/>
-                          <a:ea typeface="+mn-ea"/>
-                          <a:cs typeface="Calibri" panose="020F0502020204030204" pitchFamily="34" charset="0"/>
-                        </a:rPr>
-                        <a:t>Ambiente laboral</a:t>
-                      </a:r>
+                      <a:endParaRPr lang="es-MX" sz="1400" b="1" i="0" u="none" strike="noStrike" kern="1200" dirty="0">
+                        <a:solidFill>
+                          <a:schemeClr val="bg1">
+                            <a:lumMod val="50000"/>
+                          </a:schemeClr>
+                        </a:solidFill>
+                        <a:effectLst/>
+                        <a:latin typeface="Montserrat" panose="00000500000000000000" pitchFamily="2" charset="0"/>
+                        <a:ea typeface="+mn-ea"/>
+                        <a:cs typeface="Calibri" panose="020F0502020204030204" pitchFamily="34" charset="0"/>
+                      </a:endParaRPr>
                     </a:p>
                   </a:txBody>
                   <a:tcPr marL="7620" marR="7620" marT="7620" marB="0" anchor="ctr">
@@ -32145,18 +30289,15 @@
                       <a:pPr algn="l" fontAlgn="b">
                         <a:buNone/>
                       </a:pPr>
-                      <a:r>
-                        <a:rPr lang="es-MX" sz="1400" b="0" i="0" u="none" strike="noStrike" kern="1200" dirty="0">
-                          <a:solidFill>
-                            <a:srgbClr val="00B050"/>
-                          </a:solidFill>
-                          <a:effectLst/>
-                          <a:latin typeface="Montserrat" panose="00000500000000000000" pitchFamily="2" charset="0"/>
-                          <a:ea typeface="+mn-ea"/>
-                          <a:cs typeface="+mn-cs"/>
-                        </a:rPr>
-                        <a:t>La empresa está a la vanguardia / Cambios positivos</a:t>
-                      </a:r>
+                      <a:endParaRPr lang="es-MX" sz="1400" b="0" i="0" u="none" strike="noStrike" kern="1200" dirty="0">
+                        <a:solidFill>
+                          <a:srgbClr val="00B050"/>
+                        </a:solidFill>
+                        <a:effectLst/>
+                        <a:latin typeface="Montserrat" panose="00000500000000000000" pitchFamily="2" charset="0"/>
+                        <a:ea typeface="+mn-ea"/>
+                        <a:cs typeface="+mn-cs"/>
+                      </a:endParaRPr>
                     </a:p>
                   </a:txBody>
                   <a:tcPr marL="7620" marR="7620" marT="7620" marB="0" anchor="ctr">
@@ -32214,18 +30355,15 @@
                       <a:pPr marL="0" algn="ctr" defTabSz="918058" rtl="0" eaLnBrk="1" fontAlgn="b" latinLnBrk="0" hangingPunct="1">
                         <a:buNone/>
                       </a:pPr>
-                      <a:r>
-                        <a:rPr lang="es-MX" sz="1400" b="1" i="0" u="none" strike="noStrike" kern="1200" dirty="0">
-                          <a:solidFill>
-                            <a:srgbClr val="00B050"/>
-                          </a:solidFill>
-                          <a:effectLst/>
-                          <a:latin typeface="Montserrat" panose="00000500000000000000" pitchFamily="2" charset="0"/>
-                          <a:ea typeface="+mn-ea"/>
-                          <a:cs typeface="+mn-cs"/>
-                        </a:rPr>
-                        <a:t>3</a:t>
-                      </a:r>
+                      <a:endParaRPr lang="es-MX" sz="1400" b="1" i="0" u="none" strike="noStrike" kern="1200" dirty="0">
+                        <a:solidFill>
+                          <a:srgbClr val="00B050"/>
+                        </a:solidFill>
+                        <a:effectLst/>
+                        <a:latin typeface="Montserrat" panose="00000500000000000000" pitchFamily="2" charset="0"/>
+                        <a:ea typeface="+mn-ea"/>
+                        <a:cs typeface="+mn-cs"/>
+                      </a:endParaRPr>
                     </a:p>
                   </a:txBody>
                   <a:tcPr marL="7620" marR="7620" marT="7620" marB="0" anchor="ctr">
@@ -32284,20 +30422,17 @@
                       <a:pPr algn="ctr" fontAlgn="b">
                         <a:buNone/>
                       </a:pPr>
-                      <a:r>
-                        <a:rPr lang="es-MX" sz="1400" b="1" i="0" u="none" strike="noStrike" kern="1200" dirty="0">
-                          <a:solidFill>
-                            <a:schemeClr val="bg1">
-                              <a:lumMod val="50000"/>
-                            </a:schemeClr>
-                          </a:solidFill>
-                          <a:effectLst/>
-                          <a:latin typeface="Montserrat" panose="00000500000000000000" pitchFamily="2" charset="0"/>
-                          <a:ea typeface="+mn-ea"/>
-                          <a:cs typeface="Calibri" panose="020F0502020204030204" pitchFamily="34" charset="0"/>
-                        </a:rPr>
-                        <a:t>Organización Estructural</a:t>
-                      </a:r>
+                      <a:endParaRPr lang="es-MX" sz="1400" b="1" i="0" u="none" strike="noStrike" kern="1200" dirty="0">
+                        <a:solidFill>
+                          <a:schemeClr val="bg1">
+                            <a:lumMod val="50000"/>
+                          </a:schemeClr>
+                        </a:solidFill>
+                        <a:effectLst/>
+                        <a:latin typeface="Montserrat" panose="00000500000000000000" pitchFamily="2" charset="0"/>
+                        <a:ea typeface="+mn-ea"/>
+                        <a:cs typeface="Calibri" panose="020F0502020204030204" pitchFamily="34" charset="0"/>
+                      </a:endParaRPr>
                     </a:p>
                   </a:txBody>
                   <a:tcPr marL="7620" marR="7620" marT="7620" marB="0" anchor="ctr">
@@ -32363,18 +30498,15 @@
                       <a:pPr algn="l" fontAlgn="b">
                         <a:buNone/>
                       </a:pPr>
-                      <a:r>
-                        <a:rPr lang="es-MX" sz="1400" b="0" i="0" u="none" strike="noStrike" kern="1200" dirty="0">
-                          <a:solidFill>
-                            <a:srgbClr val="00B050"/>
-                          </a:solidFill>
-                          <a:effectLst/>
-                          <a:latin typeface="Montserrat" panose="00000500000000000000" pitchFamily="2" charset="0"/>
-                          <a:ea typeface="+mn-ea"/>
-                          <a:cs typeface="+mn-cs"/>
-                        </a:rPr>
-                        <a:t>Buen salario</a:t>
-                      </a:r>
+                      <a:endParaRPr lang="es-MX" sz="1400" b="0" i="0" u="none" strike="noStrike" kern="1200" dirty="0">
+                        <a:solidFill>
+                          <a:srgbClr val="00B050"/>
+                        </a:solidFill>
+                        <a:effectLst/>
+                        <a:latin typeface="Montserrat" panose="00000500000000000000" pitchFamily="2" charset="0"/>
+                        <a:ea typeface="+mn-ea"/>
+                        <a:cs typeface="+mn-cs"/>
+                      </a:endParaRPr>
                     </a:p>
                   </a:txBody>
                   <a:tcPr marL="7620" marR="7620" marT="7620" marB="0" anchor="ctr">
@@ -32432,18 +30564,15 @@
                       <a:pPr marL="0" algn="ctr" defTabSz="918058" rtl="0" eaLnBrk="1" fontAlgn="b" latinLnBrk="0" hangingPunct="1">
                         <a:buNone/>
                       </a:pPr>
-                      <a:r>
-                        <a:rPr lang="es-MX" sz="1400" b="1" i="0" u="none" strike="noStrike" kern="1200">
-                          <a:solidFill>
-                            <a:srgbClr val="00B050"/>
-                          </a:solidFill>
-                          <a:effectLst/>
-                          <a:latin typeface="Montserrat" panose="00000500000000000000" pitchFamily="2" charset="0"/>
-                          <a:ea typeface="+mn-ea"/>
-                          <a:cs typeface="+mn-cs"/>
-                        </a:rPr>
-                        <a:t>2</a:t>
-                      </a:r>
+                      <a:endParaRPr lang="es-MX" sz="1400" b="1" i="0" u="none" strike="noStrike" kern="1200">
+                        <a:solidFill>
+                          <a:srgbClr val="00B050"/>
+                        </a:solidFill>
+                        <a:effectLst/>
+                        <a:latin typeface="Montserrat" panose="00000500000000000000" pitchFamily="2" charset="0"/>
+                        <a:ea typeface="+mn-ea"/>
+                        <a:cs typeface="+mn-cs"/>
+                      </a:endParaRPr>
                     </a:p>
                   </a:txBody>
                   <a:tcPr marL="7620" marR="7620" marT="7620" marB="0" anchor="ctr">
@@ -32502,20 +30631,17 @@
                       <a:pPr algn="ctr" fontAlgn="b">
                         <a:buNone/>
                       </a:pPr>
-                      <a:r>
-                        <a:rPr lang="es-MX" sz="1400" b="1" i="0" u="none" strike="noStrike" kern="1200" dirty="0">
-                          <a:solidFill>
-                            <a:schemeClr val="bg1">
-                              <a:lumMod val="50000"/>
-                            </a:schemeClr>
-                          </a:solidFill>
-                          <a:effectLst/>
-                          <a:latin typeface="Montserrat" panose="00000500000000000000" pitchFamily="2" charset="0"/>
-                          <a:ea typeface="+mn-ea"/>
-                          <a:cs typeface="Calibri" panose="020F0502020204030204" pitchFamily="34" charset="0"/>
-                        </a:rPr>
-                        <a:t>Compensación</a:t>
-                      </a:r>
+                      <a:endParaRPr lang="es-MX" sz="1400" b="1" i="0" u="none" strike="noStrike" kern="1200" dirty="0">
+                        <a:solidFill>
+                          <a:schemeClr val="bg1">
+                            <a:lumMod val="50000"/>
+                          </a:schemeClr>
+                        </a:solidFill>
+                        <a:effectLst/>
+                        <a:latin typeface="Montserrat" panose="00000500000000000000" pitchFamily="2" charset="0"/>
+                        <a:ea typeface="+mn-ea"/>
+                        <a:cs typeface="Calibri" panose="020F0502020204030204" pitchFamily="34" charset="0"/>
+                      </a:endParaRPr>
                     </a:p>
                   </a:txBody>
                   <a:tcPr marL="7620" marR="7620" marT="7620" marB="0" anchor="ctr">
@@ -32581,18 +30707,15 @@
                       <a:pPr algn="l" fontAlgn="b">
                         <a:buNone/>
                       </a:pPr>
-                      <a:r>
-                        <a:rPr lang="es-MX" sz="1400" b="0" i="0" u="none" strike="noStrike" kern="1200" dirty="0">
-                          <a:solidFill>
-                            <a:srgbClr val="00B050"/>
-                          </a:solidFill>
-                          <a:effectLst/>
-                          <a:latin typeface="Montserrat" panose="00000500000000000000" pitchFamily="2" charset="0"/>
-                          <a:ea typeface="+mn-ea"/>
-                          <a:cs typeface="+mn-cs"/>
-                        </a:rPr>
-                        <a:t>La empresa te brinda su apoyo en todo momento</a:t>
-                      </a:r>
+                      <a:endParaRPr lang="es-MX" sz="1400" b="0" i="0" u="none" strike="noStrike" kern="1200" dirty="0">
+                        <a:solidFill>
+                          <a:srgbClr val="00B050"/>
+                        </a:solidFill>
+                        <a:effectLst/>
+                        <a:latin typeface="Montserrat" panose="00000500000000000000" pitchFamily="2" charset="0"/>
+                        <a:ea typeface="+mn-ea"/>
+                        <a:cs typeface="+mn-cs"/>
+                      </a:endParaRPr>
                     </a:p>
                   </a:txBody>
                   <a:tcPr marL="7620" marR="7620" marT="7620" marB="0" anchor="ctr">
@@ -32650,18 +30773,15 @@
                       <a:pPr marL="0" algn="ctr" defTabSz="918058" rtl="0" eaLnBrk="1" fontAlgn="b" latinLnBrk="0" hangingPunct="1">
                         <a:buNone/>
                       </a:pPr>
-                      <a:r>
-                        <a:rPr lang="es-MX" sz="1400" b="1" i="0" u="none" strike="noStrike" kern="1200">
-                          <a:solidFill>
-                            <a:srgbClr val="00B050"/>
-                          </a:solidFill>
-                          <a:effectLst/>
-                          <a:latin typeface="Montserrat" panose="00000500000000000000" pitchFamily="2" charset="0"/>
-                          <a:ea typeface="+mn-ea"/>
-                          <a:cs typeface="+mn-cs"/>
-                        </a:rPr>
-                        <a:t>2</a:t>
-                      </a:r>
+                      <a:endParaRPr lang="es-MX" sz="1400" b="1" i="0" u="none" strike="noStrike" kern="1200">
+                        <a:solidFill>
+                          <a:srgbClr val="00B050"/>
+                        </a:solidFill>
+                        <a:effectLst/>
+                        <a:latin typeface="Montserrat" panose="00000500000000000000" pitchFamily="2" charset="0"/>
+                        <a:ea typeface="+mn-ea"/>
+                        <a:cs typeface="+mn-cs"/>
+                      </a:endParaRPr>
                     </a:p>
                   </a:txBody>
                   <a:tcPr marL="7620" marR="7620" marT="7620" marB="0" anchor="ctr">
@@ -32720,20 +30840,17 @@
                       <a:pPr algn="ctr" fontAlgn="b">
                         <a:buNone/>
                       </a:pPr>
-                      <a:r>
-                        <a:rPr lang="es-MX" sz="1400" b="1" i="0" u="none" strike="noStrike" kern="1200">
-                          <a:solidFill>
-                            <a:schemeClr val="bg1">
-                              <a:lumMod val="50000"/>
-                            </a:schemeClr>
-                          </a:solidFill>
-                          <a:effectLst/>
-                          <a:latin typeface="Montserrat" panose="00000500000000000000" pitchFamily="2" charset="0"/>
-                          <a:ea typeface="+mn-ea"/>
-                          <a:cs typeface="Calibri" panose="020F0502020204030204" pitchFamily="34" charset="0"/>
-                        </a:rPr>
-                        <a:t>Apoyo al personal</a:t>
-                      </a:r>
+                      <a:endParaRPr lang="es-MX" sz="1400" b="1" i="0" u="none" strike="noStrike" kern="1200">
+                        <a:solidFill>
+                          <a:schemeClr val="bg1">
+                            <a:lumMod val="50000"/>
+                          </a:schemeClr>
+                        </a:solidFill>
+                        <a:effectLst/>
+                        <a:latin typeface="Montserrat" panose="00000500000000000000" pitchFamily="2" charset="0"/>
+                        <a:ea typeface="+mn-ea"/>
+                        <a:cs typeface="Calibri" panose="020F0502020204030204" pitchFamily="34" charset="0"/>
+                      </a:endParaRPr>
                     </a:p>
                   </a:txBody>
                   <a:tcPr marL="7620" marR="7620" marT="7620" marB="0" anchor="ctr">
@@ -32799,18 +30916,15 @@
                       <a:pPr algn="l" fontAlgn="b">
                         <a:buNone/>
                       </a:pPr>
-                      <a:r>
-                        <a:rPr lang="es-MX" sz="1400" b="0" i="0" u="none" strike="noStrike" kern="1200" dirty="0">
-                          <a:solidFill>
-                            <a:srgbClr val="00B050"/>
-                          </a:solidFill>
-                          <a:effectLst/>
-                          <a:latin typeface="Montserrat" panose="00000500000000000000" pitchFamily="2" charset="0"/>
-                          <a:ea typeface="+mn-ea"/>
-                          <a:cs typeface="+mn-cs"/>
-                        </a:rPr>
-                        <a:t>Líderes te apoyan/ Te escuchan</a:t>
-                      </a:r>
+                      <a:endParaRPr lang="es-MX" sz="1400" b="0" i="0" u="none" strike="noStrike" kern="1200" dirty="0">
+                        <a:solidFill>
+                          <a:srgbClr val="00B050"/>
+                        </a:solidFill>
+                        <a:effectLst/>
+                        <a:latin typeface="Montserrat" panose="00000500000000000000" pitchFamily="2" charset="0"/>
+                        <a:ea typeface="+mn-ea"/>
+                        <a:cs typeface="+mn-cs"/>
+                      </a:endParaRPr>
                     </a:p>
                   </a:txBody>
                   <a:tcPr marL="7620" marR="7620" marT="7620" marB="0" anchor="ctr">
@@ -32868,18 +30982,15 @@
                       <a:pPr marL="0" algn="ctr" defTabSz="918058" rtl="0" eaLnBrk="1" fontAlgn="b" latinLnBrk="0" hangingPunct="1">
                         <a:buNone/>
                       </a:pPr>
-                      <a:r>
-                        <a:rPr lang="es-MX" sz="1400" b="1" i="0" u="none" strike="noStrike" kern="1200" dirty="0">
-                          <a:solidFill>
-                            <a:srgbClr val="00B050"/>
-                          </a:solidFill>
-                          <a:effectLst/>
-                          <a:latin typeface="Montserrat" panose="00000500000000000000" pitchFamily="2" charset="0"/>
-                          <a:ea typeface="+mn-ea"/>
-                          <a:cs typeface="+mn-cs"/>
-                        </a:rPr>
-                        <a:t>2</a:t>
-                      </a:r>
+                      <a:endParaRPr lang="es-MX" sz="1400" b="1" i="0" u="none" strike="noStrike" kern="1200" dirty="0">
+                        <a:solidFill>
+                          <a:srgbClr val="00B050"/>
+                        </a:solidFill>
+                        <a:effectLst/>
+                        <a:latin typeface="Montserrat" panose="00000500000000000000" pitchFamily="2" charset="0"/>
+                        <a:ea typeface="+mn-ea"/>
+                        <a:cs typeface="+mn-cs"/>
+                      </a:endParaRPr>
                     </a:p>
                   </a:txBody>
                   <a:tcPr marL="7620" marR="7620" marT="7620" marB="0" anchor="ctr">
@@ -32938,20 +31049,17 @@
                       <a:pPr algn="ctr" fontAlgn="b">
                         <a:buNone/>
                       </a:pPr>
-                      <a:r>
-                        <a:rPr lang="es-MX" sz="1400" b="1" i="0" u="none" strike="noStrike" kern="1200" dirty="0">
-                          <a:solidFill>
-                            <a:schemeClr val="bg1">
-                              <a:lumMod val="50000"/>
-                            </a:schemeClr>
-                          </a:solidFill>
-                          <a:effectLst/>
-                          <a:latin typeface="Montserrat" panose="00000500000000000000" pitchFamily="2" charset="0"/>
-                          <a:ea typeface="+mn-ea"/>
-                          <a:cs typeface="Calibri" panose="020F0502020204030204" pitchFamily="34" charset="0"/>
-                        </a:rPr>
-                        <a:t>Liderazgo</a:t>
-                      </a:r>
+                      <a:endParaRPr lang="es-MX" sz="1400" b="1" i="0" u="none" strike="noStrike" kern="1200" dirty="0">
+                        <a:solidFill>
+                          <a:schemeClr val="bg1">
+                            <a:lumMod val="50000"/>
+                          </a:schemeClr>
+                        </a:solidFill>
+                        <a:effectLst/>
+                        <a:latin typeface="Montserrat" panose="00000500000000000000" pitchFamily="2" charset="0"/>
+                        <a:ea typeface="+mn-ea"/>
+                        <a:cs typeface="Calibri" panose="020F0502020204030204" pitchFamily="34" charset="0"/>
+                      </a:endParaRPr>
                     </a:p>
                   </a:txBody>
                   <a:tcPr marL="7620" marR="7620" marT="7620" marB="0" anchor="ctr">
@@ -33017,18 +31125,15 @@
                       <a:pPr algn="l" fontAlgn="b">
                         <a:buNone/>
                       </a:pPr>
-                      <a:r>
-                        <a:rPr lang="es-MX" sz="1400" b="0" i="0" u="none" strike="noStrike" kern="1200" dirty="0">
-                          <a:solidFill>
-                            <a:srgbClr val="FF0000"/>
-                          </a:solidFill>
-                          <a:effectLst/>
-                          <a:latin typeface="Montserrat" panose="00000500000000000000" pitchFamily="2" charset="0"/>
-                          <a:ea typeface="+mn-ea"/>
-                          <a:cs typeface="+mn-cs"/>
-                        </a:rPr>
-                        <a:t>Horario de trabajo extenso / no veo a mi familia</a:t>
-                      </a:r>
+                      <a:endParaRPr lang="es-MX" sz="1400" b="0" i="0" u="none" strike="noStrike" kern="1200" dirty="0">
+                        <a:solidFill>
+                          <a:srgbClr val="FF0000"/>
+                        </a:solidFill>
+                        <a:effectLst/>
+                        <a:latin typeface="Montserrat" panose="00000500000000000000" pitchFamily="2" charset="0"/>
+                        <a:ea typeface="+mn-ea"/>
+                        <a:cs typeface="+mn-cs"/>
+                      </a:endParaRPr>
                     </a:p>
                   </a:txBody>
                   <a:tcPr marL="7620" marR="7620" marT="7620" marB="0" anchor="ctr">
@@ -33086,18 +31191,15 @@
                       <a:pPr marL="0" algn="ctr" defTabSz="918058" rtl="0" eaLnBrk="1" fontAlgn="b" latinLnBrk="0" hangingPunct="1">
                         <a:buNone/>
                       </a:pPr>
-                      <a:r>
-                        <a:rPr lang="es-MX" sz="1400" b="1" i="0" u="none" strike="noStrike" kern="1200" dirty="0">
-                          <a:solidFill>
-                            <a:srgbClr val="FF0000"/>
-                          </a:solidFill>
-                          <a:effectLst/>
-                          <a:latin typeface="Montserrat" panose="00000500000000000000" pitchFamily="2" charset="0"/>
-                          <a:ea typeface="+mn-ea"/>
-                          <a:cs typeface="+mn-cs"/>
-                        </a:rPr>
-                        <a:t>1</a:t>
-                      </a:r>
+                      <a:endParaRPr lang="es-MX" sz="1400" b="1" i="0" u="none" strike="noStrike" kern="1200" dirty="0">
+                        <a:solidFill>
+                          <a:srgbClr val="FF0000"/>
+                        </a:solidFill>
+                        <a:effectLst/>
+                        <a:latin typeface="Montserrat" panose="00000500000000000000" pitchFamily="2" charset="0"/>
+                        <a:ea typeface="+mn-ea"/>
+                        <a:cs typeface="+mn-cs"/>
+                      </a:endParaRPr>
                     </a:p>
                   </a:txBody>
                   <a:tcPr marL="7620" marR="7620" marT="7620" marB="0" anchor="ctr">
@@ -33156,20 +31258,17 @@
                       <a:pPr algn="ctr" fontAlgn="b">
                         <a:buNone/>
                       </a:pPr>
-                      <a:r>
-                        <a:rPr lang="es-MX" sz="1400" b="1" i="0" u="none" strike="noStrike" kern="1200">
-                          <a:solidFill>
-                            <a:schemeClr val="bg1">
-                              <a:lumMod val="50000"/>
-                            </a:schemeClr>
-                          </a:solidFill>
-                          <a:effectLst/>
-                          <a:latin typeface="Montserrat" panose="00000500000000000000" pitchFamily="2" charset="0"/>
-                          <a:ea typeface="+mn-ea"/>
-                          <a:cs typeface="Calibri" panose="020F0502020204030204" pitchFamily="34" charset="0"/>
-                        </a:rPr>
-                        <a:t>Condiciones de Trabajo</a:t>
-                      </a:r>
+                      <a:endParaRPr lang="es-MX" sz="1400" b="1" i="0" u="none" strike="noStrike" kern="1200">
+                        <a:solidFill>
+                          <a:schemeClr val="bg1">
+                            <a:lumMod val="50000"/>
+                          </a:schemeClr>
+                        </a:solidFill>
+                        <a:effectLst/>
+                        <a:latin typeface="Montserrat" panose="00000500000000000000" pitchFamily="2" charset="0"/>
+                        <a:ea typeface="+mn-ea"/>
+                        <a:cs typeface="Calibri" panose="020F0502020204030204" pitchFamily="34" charset="0"/>
+                      </a:endParaRPr>
                     </a:p>
                   </a:txBody>
                   <a:tcPr marL="7620" marR="7620" marT="7620" marB="0" anchor="ctr">
@@ -33235,18 +31334,15 @@
                       <a:pPr algn="l" fontAlgn="b">
                         <a:buNone/>
                       </a:pPr>
-                      <a:r>
-                        <a:rPr lang="es-MX" sz="1400" b="0" i="0" u="none" strike="noStrike" kern="1200" dirty="0">
-                          <a:solidFill>
-                            <a:srgbClr val="00B050"/>
-                          </a:solidFill>
-                          <a:effectLst/>
-                          <a:latin typeface="Montserrat" panose="00000500000000000000" pitchFamily="2" charset="0"/>
-                          <a:ea typeface="+mn-ea"/>
-                          <a:cs typeface="+mn-cs"/>
-                        </a:rPr>
-                        <a:t>La empresa tiene buenas prestaciones y beneficios</a:t>
-                      </a:r>
+                      <a:endParaRPr lang="es-MX" sz="1400" b="0" i="0" u="none" strike="noStrike" kern="1200" dirty="0">
+                        <a:solidFill>
+                          <a:srgbClr val="00B050"/>
+                        </a:solidFill>
+                        <a:effectLst/>
+                        <a:latin typeface="Montserrat" panose="00000500000000000000" pitchFamily="2" charset="0"/>
+                        <a:ea typeface="+mn-ea"/>
+                        <a:cs typeface="+mn-cs"/>
+                      </a:endParaRPr>
                     </a:p>
                   </a:txBody>
                   <a:tcPr marL="7620" marR="7620" marT="7620" marB="0" anchor="ctr">
@@ -33304,18 +31400,15 @@
                       <a:pPr marL="0" algn="ctr" defTabSz="918058" rtl="0" eaLnBrk="1" fontAlgn="b" latinLnBrk="0" hangingPunct="1">
                         <a:buNone/>
                       </a:pPr>
-                      <a:r>
-                        <a:rPr lang="es-MX" sz="1400" b="1" i="0" u="none" strike="noStrike" kern="1200" dirty="0">
-                          <a:solidFill>
-                            <a:srgbClr val="00B050"/>
-                          </a:solidFill>
-                          <a:effectLst/>
-                          <a:latin typeface="Montserrat" panose="00000500000000000000" pitchFamily="2" charset="0"/>
-                          <a:ea typeface="+mn-ea"/>
-                          <a:cs typeface="+mn-cs"/>
-                        </a:rPr>
-                        <a:t>1</a:t>
-                      </a:r>
+                      <a:endParaRPr lang="es-MX" sz="1400" b="1" i="0" u="none" strike="noStrike" kern="1200" dirty="0">
+                        <a:solidFill>
+                          <a:srgbClr val="00B050"/>
+                        </a:solidFill>
+                        <a:effectLst/>
+                        <a:latin typeface="Montserrat" panose="00000500000000000000" pitchFamily="2" charset="0"/>
+                        <a:ea typeface="+mn-ea"/>
+                        <a:cs typeface="+mn-cs"/>
+                      </a:endParaRPr>
                     </a:p>
                   </a:txBody>
                   <a:tcPr marL="7620" marR="7620" marT="7620" marB="0" anchor="ctr">
@@ -33374,20 +31467,17 @@
                       <a:pPr algn="ctr" fontAlgn="b">
                         <a:buNone/>
                       </a:pPr>
-                      <a:r>
-                        <a:rPr lang="es-MX" sz="1400" b="1" i="0" u="none" strike="noStrike" kern="1200" dirty="0">
-                          <a:solidFill>
-                            <a:schemeClr val="bg1">
-                              <a:lumMod val="50000"/>
-                            </a:schemeClr>
-                          </a:solidFill>
-                          <a:effectLst/>
-                          <a:latin typeface="Montserrat" panose="00000500000000000000" pitchFamily="2" charset="0"/>
-                          <a:ea typeface="+mn-ea"/>
-                          <a:cs typeface="Calibri" panose="020F0502020204030204" pitchFamily="34" charset="0"/>
-                        </a:rPr>
-                        <a:t>Compensación</a:t>
-                      </a:r>
+                      <a:endParaRPr lang="es-MX" sz="1400" b="1" i="0" u="none" strike="noStrike" kern="1200" dirty="0">
+                        <a:solidFill>
+                          <a:schemeClr val="bg1">
+                            <a:lumMod val="50000"/>
+                          </a:schemeClr>
+                        </a:solidFill>
+                        <a:effectLst/>
+                        <a:latin typeface="Montserrat" panose="00000500000000000000" pitchFamily="2" charset="0"/>
+                        <a:ea typeface="+mn-ea"/>
+                        <a:cs typeface="Calibri" panose="020F0502020204030204" pitchFamily="34" charset="0"/>
+                      </a:endParaRPr>
                     </a:p>
                   </a:txBody>
                   <a:tcPr marL="7620" marR="7620" marT="7620" marB="0" anchor="ctr">
@@ -35126,7 +33216,7 @@
           <p:nvPr>
             <p:extLst>
               <p:ext uri="{D42A27DB-BD31-4B8C-83A1-F6EECF244321}">
-                <p14:modId xmlns:p14="http://schemas.microsoft.com/office/powerpoint/2010/main" val="1424337381"/>
+                <p14:modId xmlns:p14="http://schemas.microsoft.com/office/powerpoint/2010/main" val="216155960"/>
               </p:ext>
             </p:extLst>
           </p:nvPr>
@@ -35384,18 +33474,15 @@
                       <a:pPr algn="l" fontAlgn="b">
                         <a:buNone/>
                       </a:pPr>
-                      <a:r>
-                        <a:rPr lang="es-MX" sz="1400" b="0" i="0" u="none" strike="noStrike" kern="1200" dirty="0">
-                          <a:solidFill>
-                            <a:srgbClr val="FF0000"/>
-                          </a:solidFill>
-                          <a:effectLst/>
-                          <a:latin typeface="Montserrat" panose="00000500000000000000" pitchFamily="2" charset="0"/>
-                          <a:ea typeface="+mn-ea"/>
-                          <a:cs typeface="+mn-cs"/>
-                        </a:rPr>
-                        <a:t>Inestabilidad laboral / amenazas de despido / alta rotación de personal</a:t>
-                      </a:r>
+                      <a:endParaRPr lang="es-MX" sz="1400" b="0" i="0" u="none" strike="noStrike" kern="1200" dirty="0">
+                        <a:solidFill>
+                          <a:srgbClr val="FF0000"/>
+                        </a:solidFill>
+                        <a:effectLst/>
+                        <a:latin typeface="Montserrat" panose="00000500000000000000" pitchFamily="2" charset="0"/>
+                        <a:ea typeface="+mn-ea"/>
+                        <a:cs typeface="+mn-cs"/>
+                      </a:endParaRPr>
                     </a:p>
                   </a:txBody>
                   <a:tcPr marL="7620" marR="7620" marT="7620" marB="0" anchor="ctr">
@@ -35453,18 +33540,15 @@
                       <a:pPr marL="0" algn="ctr" defTabSz="918058" rtl="0" eaLnBrk="1" fontAlgn="b" latinLnBrk="0" hangingPunct="1">
                         <a:buNone/>
                       </a:pPr>
-                      <a:r>
-                        <a:rPr lang="es-MX" sz="1400" b="1" i="0" u="none" strike="noStrike" kern="1200" dirty="0">
-                          <a:solidFill>
-                            <a:srgbClr val="FF0000"/>
-                          </a:solidFill>
-                          <a:effectLst/>
-                          <a:latin typeface="Montserrat" panose="00000500000000000000" pitchFamily="2" charset="0"/>
-                          <a:ea typeface="+mn-ea"/>
-                          <a:cs typeface="+mn-cs"/>
-                        </a:rPr>
-                        <a:t>4</a:t>
-                      </a:r>
+                      <a:endParaRPr lang="es-MX" sz="1400" b="1" i="0" u="none" strike="noStrike" kern="1200" dirty="0">
+                        <a:solidFill>
+                          <a:srgbClr val="FF0000"/>
+                        </a:solidFill>
+                        <a:effectLst/>
+                        <a:latin typeface="Montserrat" panose="00000500000000000000" pitchFamily="2" charset="0"/>
+                        <a:ea typeface="+mn-ea"/>
+                        <a:cs typeface="+mn-cs"/>
+                      </a:endParaRPr>
                     </a:p>
                   </a:txBody>
                   <a:tcPr marL="7620" marR="7620" marT="7620" marB="0" anchor="ctr">
@@ -35523,20 +33607,17 @@
                       <a:pPr algn="ctr" fontAlgn="b">
                         <a:buNone/>
                       </a:pPr>
-                      <a:r>
-                        <a:rPr lang="es-MX" sz="1400" b="1" i="0" u="none" strike="noStrike" kern="1200" dirty="0">
-                          <a:solidFill>
-                            <a:schemeClr val="bg1">
-                              <a:lumMod val="50000"/>
-                            </a:schemeClr>
-                          </a:solidFill>
-                          <a:effectLst/>
-                          <a:latin typeface="Montserrat" panose="00000500000000000000" pitchFamily="2" charset="0"/>
-                          <a:ea typeface="+mn-ea"/>
-                          <a:cs typeface="Calibri" panose="020F0502020204030204" pitchFamily="34" charset="0"/>
-                        </a:rPr>
-                        <a:t>Desarrollo y crecimiento</a:t>
-                      </a:r>
+                      <a:endParaRPr lang="es-MX" sz="1400" b="1" i="0" u="none" strike="noStrike" kern="1200" dirty="0">
+                        <a:solidFill>
+                          <a:schemeClr val="bg1">
+                            <a:lumMod val="50000"/>
+                          </a:schemeClr>
+                        </a:solidFill>
+                        <a:effectLst/>
+                        <a:latin typeface="Montserrat" panose="00000500000000000000" pitchFamily="2" charset="0"/>
+                        <a:ea typeface="+mn-ea"/>
+                        <a:cs typeface="Calibri" panose="020F0502020204030204" pitchFamily="34" charset="0"/>
+                      </a:endParaRPr>
                     </a:p>
                   </a:txBody>
                   <a:tcPr marL="7620" marR="7620" marT="7620" marB="0" anchor="ctr">
@@ -35602,18 +33683,15 @@
                       <a:pPr algn="l" fontAlgn="b">
                         <a:buNone/>
                       </a:pPr>
-                      <a:r>
-                        <a:rPr lang="es-MX" sz="1400" b="0" i="0" u="none" strike="noStrike" kern="1200" dirty="0">
-                          <a:solidFill>
-                            <a:srgbClr val="00B050"/>
-                          </a:solidFill>
-                          <a:effectLst/>
-                          <a:latin typeface="Montserrat" panose="00000500000000000000" pitchFamily="2" charset="0"/>
-                          <a:ea typeface="+mn-ea"/>
-                          <a:cs typeface="+mn-cs"/>
-                        </a:rPr>
-                        <a:t>Buen salario</a:t>
-                      </a:r>
+                      <a:endParaRPr lang="es-MX" sz="1400" b="0" i="0" u="none" strike="noStrike" kern="1200" dirty="0">
+                        <a:solidFill>
+                          <a:srgbClr val="00B050"/>
+                        </a:solidFill>
+                        <a:effectLst/>
+                        <a:latin typeface="Montserrat" panose="00000500000000000000" pitchFamily="2" charset="0"/>
+                        <a:ea typeface="+mn-ea"/>
+                        <a:cs typeface="+mn-cs"/>
+                      </a:endParaRPr>
                     </a:p>
                   </a:txBody>
                   <a:tcPr marL="7620" marR="7620" marT="7620" marB="0" anchor="ctr">
@@ -35671,18 +33749,15 @@
                       <a:pPr marL="0" algn="ctr" defTabSz="918058" rtl="0" eaLnBrk="1" fontAlgn="b" latinLnBrk="0" hangingPunct="1">
                         <a:buNone/>
                       </a:pPr>
-                      <a:r>
-                        <a:rPr lang="es-MX" sz="1400" b="1" i="0" u="none" strike="noStrike" kern="1200" dirty="0">
-                          <a:solidFill>
-                            <a:srgbClr val="00B050"/>
-                          </a:solidFill>
-                          <a:effectLst/>
-                          <a:latin typeface="Montserrat" panose="00000500000000000000" pitchFamily="2" charset="0"/>
-                          <a:ea typeface="+mn-ea"/>
-                          <a:cs typeface="+mn-cs"/>
-                        </a:rPr>
-                        <a:t>3</a:t>
-                      </a:r>
+                      <a:endParaRPr lang="es-MX" sz="1400" b="1" i="0" u="none" strike="noStrike" kern="1200" dirty="0">
+                        <a:solidFill>
+                          <a:srgbClr val="00B050"/>
+                        </a:solidFill>
+                        <a:effectLst/>
+                        <a:latin typeface="Montserrat" panose="00000500000000000000" pitchFamily="2" charset="0"/>
+                        <a:ea typeface="+mn-ea"/>
+                        <a:cs typeface="+mn-cs"/>
+                      </a:endParaRPr>
                     </a:p>
                   </a:txBody>
                   <a:tcPr marL="7620" marR="7620" marT="7620" marB="0" anchor="ctr">
@@ -35741,20 +33816,17 @@
                       <a:pPr algn="ctr" fontAlgn="b">
                         <a:buNone/>
                       </a:pPr>
-                      <a:r>
-                        <a:rPr lang="es-MX" sz="1400" b="1" i="0" u="none" strike="noStrike" kern="1200" dirty="0">
-                          <a:solidFill>
-                            <a:schemeClr val="bg1">
-                              <a:lumMod val="50000"/>
-                            </a:schemeClr>
-                          </a:solidFill>
-                          <a:effectLst/>
-                          <a:latin typeface="Montserrat" panose="00000500000000000000" pitchFamily="2" charset="0"/>
-                          <a:ea typeface="+mn-ea"/>
-                          <a:cs typeface="Calibri" panose="020F0502020204030204" pitchFamily="34" charset="0"/>
-                        </a:rPr>
-                        <a:t>Compensación</a:t>
-                      </a:r>
+                      <a:endParaRPr lang="es-MX" sz="1400" b="1" i="0" u="none" strike="noStrike" kern="1200" dirty="0">
+                        <a:solidFill>
+                          <a:schemeClr val="bg1">
+                            <a:lumMod val="50000"/>
+                          </a:schemeClr>
+                        </a:solidFill>
+                        <a:effectLst/>
+                        <a:latin typeface="Montserrat" panose="00000500000000000000" pitchFamily="2" charset="0"/>
+                        <a:ea typeface="+mn-ea"/>
+                        <a:cs typeface="Calibri" panose="020F0502020204030204" pitchFamily="34" charset="0"/>
+                      </a:endParaRPr>
                     </a:p>
                   </a:txBody>
                   <a:tcPr marL="7620" marR="7620" marT="7620" marB="0" anchor="ctr">
@@ -35820,18 +33892,15 @@
                       <a:pPr algn="l" fontAlgn="b">
                         <a:buNone/>
                       </a:pPr>
-                      <a:r>
-                        <a:rPr lang="es-MX" sz="1400" b="0" i="0" u="none" strike="noStrike" kern="1200">
-                          <a:solidFill>
-                            <a:srgbClr val="00B050"/>
-                          </a:solidFill>
-                          <a:effectLst/>
-                          <a:latin typeface="Montserrat" panose="00000500000000000000" pitchFamily="2" charset="0"/>
-                          <a:ea typeface="+mn-ea"/>
-                          <a:cs typeface="+mn-cs"/>
-                        </a:rPr>
-                        <a:t>Estoy orgulloso de pertenecer al grupo /Es una buena empresa /recomendable</a:t>
-                      </a:r>
+                      <a:endParaRPr lang="es-MX" sz="1400" b="0" i="0" u="none" strike="noStrike" kern="1200">
+                        <a:solidFill>
+                          <a:srgbClr val="00B050"/>
+                        </a:solidFill>
+                        <a:effectLst/>
+                        <a:latin typeface="Montserrat" panose="00000500000000000000" pitchFamily="2" charset="0"/>
+                        <a:ea typeface="+mn-ea"/>
+                        <a:cs typeface="+mn-cs"/>
+                      </a:endParaRPr>
                     </a:p>
                   </a:txBody>
                   <a:tcPr marL="7620" marR="7620" marT="7620" marB="0" anchor="ctr">
@@ -35889,18 +33958,15 @@
                       <a:pPr marL="0" algn="ctr" defTabSz="918058" rtl="0" eaLnBrk="1" fontAlgn="b" latinLnBrk="0" hangingPunct="1">
                         <a:buNone/>
                       </a:pPr>
-                      <a:r>
-                        <a:rPr lang="es-MX" sz="1400" b="1" i="0" u="none" strike="noStrike" kern="1200">
-                          <a:solidFill>
-                            <a:srgbClr val="00B050"/>
-                          </a:solidFill>
-                          <a:effectLst/>
-                          <a:latin typeface="Montserrat" panose="00000500000000000000" pitchFamily="2" charset="0"/>
-                          <a:ea typeface="+mn-ea"/>
-                          <a:cs typeface="+mn-cs"/>
-                        </a:rPr>
-                        <a:t>3</a:t>
-                      </a:r>
+                      <a:endParaRPr lang="es-MX" sz="1400" b="1" i="0" u="none" strike="noStrike" kern="1200">
+                        <a:solidFill>
+                          <a:srgbClr val="00B050"/>
+                        </a:solidFill>
+                        <a:effectLst/>
+                        <a:latin typeface="Montserrat" panose="00000500000000000000" pitchFamily="2" charset="0"/>
+                        <a:ea typeface="+mn-ea"/>
+                        <a:cs typeface="+mn-cs"/>
+                      </a:endParaRPr>
                     </a:p>
                   </a:txBody>
                   <a:tcPr marL="7620" marR="7620" marT="7620" marB="0" anchor="ctr">
@@ -35959,20 +34025,17 @@
                       <a:pPr algn="ctr" fontAlgn="b">
                         <a:buNone/>
                       </a:pPr>
-                      <a:r>
-                        <a:rPr lang="es-MX" sz="1400" b="1" i="0" u="none" strike="noStrike" kern="1200" dirty="0">
-                          <a:solidFill>
-                            <a:schemeClr val="bg1">
-                              <a:lumMod val="50000"/>
-                            </a:schemeClr>
-                          </a:solidFill>
-                          <a:effectLst/>
-                          <a:latin typeface="Montserrat" panose="00000500000000000000" pitchFamily="2" charset="0"/>
-                          <a:ea typeface="+mn-ea"/>
-                          <a:cs typeface="Calibri" panose="020F0502020204030204" pitchFamily="34" charset="0"/>
-                        </a:rPr>
-                        <a:t>Imagen de la empresa</a:t>
-                      </a:r>
+                      <a:endParaRPr lang="es-MX" sz="1400" b="1" i="0" u="none" strike="noStrike" kern="1200" dirty="0">
+                        <a:solidFill>
+                          <a:schemeClr val="bg1">
+                            <a:lumMod val="50000"/>
+                          </a:schemeClr>
+                        </a:solidFill>
+                        <a:effectLst/>
+                        <a:latin typeface="Montserrat" panose="00000500000000000000" pitchFamily="2" charset="0"/>
+                        <a:ea typeface="+mn-ea"/>
+                        <a:cs typeface="Calibri" panose="020F0502020204030204" pitchFamily="34" charset="0"/>
+                      </a:endParaRPr>
                     </a:p>
                   </a:txBody>
                   <a:tcPr marL="7620" marR="7620" marT="7620" marB="0" anchor="ctr">
@@ -36038,18 +34101,15 @@
                       <a:pPr algn="l" fontAlgn="b">
                         <a:buNone/>
                       </a:pPr>
-                      <a:r>
-                        <a:rPr lang="es-MX" sz="1400" b="0" i="0" u="none" strike="noStrike" kern="1200" dirty="0">
-                          <a:solidFill>
-                            <a:srgbClr val="FF0000"/>
-                          </a:solidFill>
-                          <a:effectLst/>
-                          <a:latin typeface="Montserrat" panose="00000500000000000000" pitchFamily="2" charset="0"/>
-                          <a:ea typeface="+mn-ea"/>
-                          <a:cs typeface="+mn-cs"/>
-                        </a:rPr>
-                        <a:t>No hay suficientes prestaciones/beneficios</a:t>
-                      </a:r>
+                      <a:endParaRPr lang="es-MX" sz="1400" b="0" i="0" u="none" strike="noStrike" kern="1200" dirty="0">
+                        <a:solidFill>
+                          <a:srgbClr val="FF0000"/>
+                        </a:solidFill>
+                        <a:effectLst/>
+                        <a:latin typeface="Montserrat" panose="00000500000000000000" pitchFamily="2" charset="0"/>
+                        <a:ea typeface="+mn-ea"/>
+                        <a:cs typeface="+mn-cs"/>
+                      </a:endParaRPr>
                     </a:p>
                   </a:txBody>
                   <a:tcPr marL="7620" marR="7620" marT="7620" marB="0" anchor="ctr">
@@ -36107,18 +34167,15 @@
                       <a:pPr marL="0" algn="ctr" defTabSz="918058" rtl="0" eaLnBrk="1" fontAlgn="b" latinLnBrk="0" hangingPunct="1">
                         <a:buNone/>
                       </a:pPr>
-                      <a:r>
-                        <a:rPr lang="es-MX" sz="1400" b="1" i="0" u="none" strike="noStrike" kern="1200" dirty="0">
-                          <a:solidFill>
-                            <a:srgbClr val="FF0000"/>
-                          </a:solidFill>
-                          <a:effectLst/>
-                          <a:latin typeface="Montserrat" panose="00000500000000000000" pitchFamily="2" charset="0"/>
-                          <a:ea typeface="+mn-ea"/>
-                          <a:cs typeface="+mn-cs"/>
-                        </a:rPr>
-                        <a:t>3</a:t>
-                      </a:r>
+                      <a:endParaRPr lang="es-MX" sz="1400" b="1" i="0" u="none" strike="noStrike" kern="1200" dirty="0">
+                        <a:solidFill>
+                          <a:srgbClr val="FF0000"/>
+                        </a:solidFill>
+                        <a:effectLst/>
+                        <a:latin typeface="Montserrat" panose="00000500000000000000" pitchFamily="2" charset="0"/>
+                        <a:ea typeface="+mn-ea"/>
+                        <a:cs typeface="+mn-cs"/>
+                      </a:endParaRPr>
                     </a:p>
                   </a:txBody>
                   <a:tcPr marL="7620" marR="7620" marT="7620" marB="0" anchor="ctr">
@@ -36177,20 +34234,17 @@
                       <a:pPr algn="ctr" fontAlgn="b">
                         <a:buNone/>
                       </a:pPr>
-                      <a:r>
-                        <a:rPr lang="es-MX" sz="1400" b="1" i="0" u="none" strike="noStrike" kern="1200">
-                          <a:solidFill>
-                            <a:schemeClr val="bg1">
-                              <a:lumMod val="50000"/>
-                            </a:schemeClr>
-                          </a:solidFill>
-                          <a:effectLst/>
-                          <a:latin typeface="Montserrat" panose="00000500000000000000" pitchFamily="2" charset="0"/>
-                          <a:ea typeface="+mn-ea"/>
-                          <a:cs typeface="Calibri" panose="020F0502020204030204" pitchFamily="34" charset="0"/>
-                        </a:rPr>
-                        <a:t>Compensación</a:t>
-                      </a:r>
+                      <a:endParaRPr lang="es-MX" sz="1400" b="1" i="0" u="none" strike="noStrike" kern="1200">
+                        <a:solidFill>
+                          <a:schemeClr val="bg1">
+                            <a:lumMod val="50000"/>
+                          </a:schemeClr>
+                        </a:solidFill>
+                        <a:effectLst/>
+                        <a:latin typeface="Montserrat" panose="00000500000000000000" pitchFamily="2" charset="0"/>
+                        <a:ea typeface="+mn-ea"/>
+                        <a:cs typeface="Calibri" panose="020F0502020204030204" pitchFamily="34" charset="0"/>
+                      </a:endParaRPr>
                     </a:p>
                   </a:txBody>
                   <a:tcPr marL="7620" marR="7620" marT="7620" marB="0" anchor="ctr">
@@ -36256,18 +34310,15 @@
                       <a:pPr algn="l" fontAlgn="b">
                         <a:buNone/>
                       </a:pPr>
-                      <a:r>
-                        <a:rPr lang="es-MX" sz="1400" b="0" i="0" u="none" strike="noStrike" kern="1200">
-                          <a:solidFill>
-                            <a:srgbClr val="00B050"/>
-                          </a:solidFill>
-                          <a:effectLst/>
-                          <a:latin typeface="Montserrat" panose="00000500000000000000" pitchFamily="2" charset="0"/>
-                          <a:ea typeface="+mn-ea"/>
-                          <a:cs typeface="+mn-cs"/>
-                        </a:rPr>
-                        <a:t>Buena organización / definición de actividades</a:t>
-                      </a:r>
+                      <a:endParaRPr lang="es-MX" sz="1400" b="0" i="0" u="none" strike="noStrike" kern="1200">
+                        <a:solidFill>
+                          <a:srgbClr val="00B050"/>
+                        </a:solidFill>
+                        <a:effectLst/>
+                        <a:latin typeface="Montserrat" panose="00000500000000000000" pitchFamily="2" charset="0"/>
+                        <a:ea typeface="+mn-ea"/>
+                        <a:cs typeface="+mn-cs"/>
+                      </a:endParaRPr>
                     </a:p>
                   </a:txBody>
                   <a:tcPr marL="7620" marR="7620" marT="7620" marB="0" anchor="ctr">
@@ -36325,18 +34376,15 @@
                       <a:pPr marL="0" algn="ctr" defTabSz="918058" rtl="0" eaLnBrk="1" fontAlgn="b" latinLnBrk="0" hangingPunct="1">
                         <a:buNone/>
                       </a:pPr>
-                      <a:r>
-                        <a:rPr lang="es-MX" sz="1400" b="1" i="0" u="none" strike="noStrike" kern="1200" dirty="0">
-                          <a:solidFill>
-                            <a:srgbClr val="00B050"/>
-                          </a:solidFill>
-                          <a:effectLst/>
-                          <a:latin typeface="Montserrat" panose="00000500000000000000" pitchFamily="2" charset="0"/>
-                          <a:ea typeface="+mn-ea"/>
-                          <a:cs typeface="+mn-cs"/>
-                        </a:rPr>
-                        <a:t>2</a:t>
-                      </a:r>
+                      <a:endParaRPr lang="es-MX" sz="1400" b="1" i="0" u="none" strike="noStrike" kern="1200" dirty="0">
+                        <a:solidFill>
+                          <a:srgbClr val="00B050"/>
+                        </a:solidFill>
+                        <a:effectLst/>
+                        <a:latin typeface="Montserrat" panose="00000500000000000000" pitchFamily="2" charset="0"/>
+                        <a:ea typeface="+mn-ea"/>
+                        <a:cs typeface="+mn-cs"/>
+                      </a:endParaRPr>
                     </a:p>
                   </a:txBody>
                   <a:tcPr marL="7620" marR="7620" marT="7620" marB="0" anchor="ctr">
@@ -36395,20 +34443,17 @@
                       <a:pPr algn="ctr" fontAlgn="b">
                         <a:buNone/>
                       </a:pPr>
-                      <a:r>
-                        <a:rPr lang="es-MX" sz="1400" b="1" i="0" u="none" strike="noStrike" kern="1200" dirty="0">
-                          <a:solidFill>
-                            <a:schemeClr val="bg1">
-                              <a:lumMod val="50000"/>
-                            </a:schemeClr>
-                          </a:solidFill>
-                          <a:effectLst/>
-                          <a:latin typeface="Montserrat" panose="00000500000000000000" pitchFamily="2" charset="0"/>
-                          <a:ea typeface="+mn-ea"/>
-                          <a:cs typeface="Calibri" panose="020F0502020204030204" pitchFamily="34" charset="0"/>
-                        </a:rPr>
-                        <a:t>Organización Estructural</a:t>
-                      </a:r>
+                      <a:endParaRPr lang="es-MX" sz="1400" b="1" i="0" u="none" strike="noStrike" kern="1200" dirty="0">
+                        <a:solidFill>
+                          <a:schemeClr val="bg1">
+                            <a:lumMod val="50000"/>
+                          </a:schemeClr>
+                        </a:solidFill>
+                        <a:effectLst/>
+                        <a:latin typeface="Montserrat" panose="00000500000000000000" pitchFamily="2" charset="0"/>
+                        <a:ea typeface="+mn-ea"/>
+                        <a:cs typeface="Calibri" panose="020F0502020204030204" pitchFamily="34" charset="0"/>
+                      </a:endParaRPr>
                     </a:p>
                   </a:txBody>
                   <a:tcPr marL="7620" marR="7620" marT="7620" marB="0" anchor="ctr">
@@ -36474,18 +34519,15 @@
                       <a:pPr algn="l" fontAlgn="b">
                         <a:buNone/>
                       </a:pPr>
-                      <a:r>
-                        <a:rPr lang="es-MX" sz="1400" b="0" i="0" u="none" strike="noStrike" kern="1200">
-                          <a:solidFill>
-                            <a:srgbClr val="00B050"/>
-                          </a:solidFill>
-                          <a:effectLst/>
-                          <a:latin typeface="Montserrat" panose="00000500000000000000" pitchFamily="2" charset="0"/>
-                          <a:ea typeface="+mn-ea"/>
-                          <a:cs typeface="+mn-cs"/>
-                        </a:rPr>
-                        <a:t>La empresa está a la vanguardia / Cambios positivos</a:t>
-                      </a:r>
+                      <a:endParaRPr lang="es-MX" sz="1400" b="0" i="0" u="none" strike="noStrike" kern="1200">
+                        <a:solidFill>
+                          <a:srgbClr val="00B050"/>
+                        </a:solidFill>
+                        <a:effectLst/>
+                        <a:latin typeface="Montserrat" panose="00000500000000000000" pitchFamily="2" charset="0"/>
+                        <a:ea typeface="+mn-ea"/>
+                        <a:cs typeface="+mn-cs"/>
+                      </a:endParaRPr>
                     </a:p>
                   </a:txBody>
                   <a:tcPr marL="7620" marR="7620" marT="7620" marB="0" anchor="ctr">
@@ -36543,18 +34585,15 @@
                       <a:pPr marL="0" algn="ctr" defTabSz="918058" rtl="0" eaLnBrk="1" fontAlgn="b" latinLnBrk="0" hangingPunct="1">
                         <a:buNone/>
                       </a:pPr>
-                      <a:r>
-                        <a:rPr lang="es-MX" sz="1400" b="1" i="0" u="none" strike="noStrike" kern="1200">
-                          <a:solidFill>
-                            <a:srgbClr val="00B050"/>
-                          </a:solidFill>
-                          <a:effectLst/>
-                          <a:latin typeface="Montserrat" panose="00000500000000000000" pitchFamily="2" charset="0"/>
-                          <a:ea typeface="+mn-ea"/>
-                          <a:cs typeface="+mn-cs"/>
-                        </a:rPr>
-                        <a:t>2</a:t>
-                      </a:r>
+                      <a:endParaRPr lang="es-MX" sz="1400" b="1" i="0" u="none" strike="noStrike" kern="1200">
+                        <a:solidFill>
+                          <a:srgbClr val="00B050"/>
+                        </a:solidFill>
+                        <a:effectLst/>
+                        <a:latin typeface="Montserrat" panose="00000500000000000000" pitchFamily="2" charset="0"/>
+                        <a:ea typeface="+mn-ea"/>
+                        <a:cs typeface="+mn-cs"/>
+                      </a:endParaRPr>
                     </a:p>
                   </a:txBody>
                   <a:tcPr marL="7620" marR="7620" marT="7620" marB="0" anchor="ctr">
@@ -36613,20 +34652,17 @@
                       <a:pPr algn="ctr" fontAlgn="b">
                         <a:buNone/>
                       </a:pPr>
-                      <a:r>
-                        <a:rPr lang="es-MX" sz="1400" b="1" i="0" u="none" strike="noStrike" kern="1200" dirty="0">
-                          <a:solidFill>
-                            <a:schemeClr val="bg1">
-                              <a:lumMod val="50000"/>
-                            </a:schemeClr>
-                          </a:solidFill>
-                          <a:effectLst/>
-                          <a:latin typeface="Montserrat" panose="00000500000000000000" pitchFamily="2" charset="0"/>
-                          <a:ea typeface="+mn-ea"/>
-                          <a:cs typeface="Calibri" panose="020F0502020204030204" pitchFamily="34" charset="0"/>
-                        </a:rPr>
-                        <a:t>Organización Estructural</a:t>
-                      </a:r>
+                      <a:endParaRPr lang="es-MX" sz="1400" b="1" i="0" u="none" strike="noStrike" kern="1200" dirty="0">
+                        <a:solidFill>
+                          <a:schemeClr val="bg1">
+                            <a:lumMod val="50000"/>
+                          </a:schemeClr>
+                        </a:solidFill>
+                        <a:effectLst/>
+                        <a:latin typeface="Montserrat" panose="00000500000000000000" pitchFamily="2" charset="0"/>
+                        <a:ea typeface="+mn-ea"/>
+                        <a:cs typeface="Calibri" panose="020F0502020204030204" pitchFamily="34" charset="0"/>
+                      </a:endParaRPr>
                     </a:p>
                   </a:txBody>
                   <a:tcPr marL="7620" marR="7620" marT="7620" marB="0" anchor="ctr">
@@ -36692,18 +34728,15 @@
                       <a:pPr algn="l" fontAlgn="b">
                         <a:buNone/>
                       </a:pPr>
-                      <a:r>
-                        <a:rPr lang="es-MX" sz="1400" b="0" i="0" u="none" strike="noStrike" kern="1200" dirty="0">
-                          <a:solidFill>
-                            <a:srgbClr val="00B050"/>
-                          </a:solidFill>
-                          <a:effectLst/>
-                          <a:latin typeface="Montserrat" panose="00000500000000000000" pitchFamily="2" charset="0"/>
-                          <a:ea typeface="+mn-ea"/>
-                          <a:cs typeface="+mn-cs"/>
-                        </a:rPr>
-                        <a:t>La empresa me da estabilidad (laboral/económica)</a:t>
-                      </a:r>
+                      <a:endParaRPr lang="es-MX" sz="1400" b="0" i="0" u="none" strike="noStrike" kern="1200" dirty="0">
+                        <a:solidFill>
+                          <a:srgbClr val="00B050"/>
+                        </a:solidFill>
+                        <a:effectLst/>
+                        <a:latin typeface="Montserrat" panose="00000500000000000000" pitchFamily="2" charset="0"/>
+                        <a:ea typeface="+mn-ea"/>
+                        <a:cs typeface="+mn-cs"/>
+                      </a:endParaRPr>
                     </a:p>
                   </a:txBody>
                   <a:tcPr marL="7620" marR="7620" marT="7620" marB="0" anchor="ctr">
@@ -36761,18 +34794,15 @@
                       <a:pPr marL="0" algn="ctr" defTabSz="918058" rtl="0" eaLnBrk="1" fontAlgn="b" latinLnBrk="0" hangingPunct="1">
                         <a:buNone/>
                       </a:pPr>
-                      <a:r>
-                        <a:rPr lang="es-MX" sz="1400" b="1" i="0" u="none" strike="noStrike" kern="1200" dirty="0">
-                          <a:solidFill>
-                            <a:srgbClr val="00B050"/>
-                          </a:solidFill>
-                          <a:effectLst/>
-                          <a:latin typeface="Montserrat" panose="00000500000000000000" pitchFamily="2" charset="0"/>
-                          <a:ea typeface="+mn-ea"/>
-                          <a:cs typeface="+mn-cs"/>
-                        </a:rPr>
-                        <a:t>2</a:t>
-                      </a:r>
+                      <a:endParaRPr lang="es-MX" sz="1400" b="1" i="0" u="none" strike="noStrike" kern="1200" dirty="0">
+                        <a:solidFill>
+                          <a:srgbClr val="00B050"/>
+                        </a:solidFill>
+                        <a:effectLst/>
+                        <a:latin typeface="Montserrat" panose="00000500000000000000" pitchFamily="2" charset="0"/>
+                        <a:ea typeface="+mn-ea"/>
+                        <a:cs typeface="+mn-cs"/>
+                      </a:endParaRPr>
                     </a:p>
                   </a:txBody>
                   <a:tcPr marL="7620" marR="7620" marT="7620" marB="0" anchor="ctr">
@@ -36831,20 +34861,17 @@
                       <a:pPr algn="ctr" fontAlgn="b">
                         <a:buNone/>
                       </a:pPr>
-                      <a:r>
-                        <a:rPr lang="es-MX" sz="1400" b="1" i="0" u="none" strike="noStrike" kern="1200" dirty="0">
-                          <a:solidFill>
-                            <a:schemeClr val="bg1">
-                              <a:lumMod val="50000"/>
-                            </a:schemeClr>
-                          </a:solidFill>
-                          <a:effectLst/>
-                          <a:latin typeface="Montserrat" panose="00000500000000000000" pitchFamily="2" charset="0"/>
-                          <a:ea typeface="+mn-ea"/>
-                          <a:cs typeface="Calibri" panose="020F0502020204030204" pitchFamily="34" charset="0"/>
-                        </a:rPr>
-                        <a:t>Compensación</a:t>
-                      </a:r>
+                      <a:endParaRPr lang="es-MX" sz="1400" b="1" i="0" u="none" strike="noStrike" kern="1200" dirty="0">
+                        <a:solidFill>
+                          <a:schemeClr val="bg1">
+                            <a:lumMod val="50000"/>
+                          </a:schemeClr>
+                        </a:solidFill>
+                        <a:effectLst/>
+                        <a:latin typeface="Montserrat" panose="00000500000000000000" pitchFamily="2" charset="0"/>
+                        <a:ea typeface="+mn-ea"/>
+                        <a:cs typeface="Calibri" panose="020F0502020204030204" pitchFamily="34" charset="0"/>
+                      </a:endParaRPr>
                     </a:p>
                   </a:txBody>
                   <a:tcPr marL="7620" marR="7620" marT="7620" marB="0" anchor="ctr">
@@ -36910,18 +34937,15 @@
                       <a:pPr algn="l" fontAlgn="b">
                         <a:buNone/>
                       </a:pPr>
-                      <a:r>
-                        <a:rPr lang="es-MX" sz="1400" b="0" i="0" u="none" strike="noStrike" kern="1200">
-                          <a:solidFill>
-                            <a:srgbClr val="00B050"/>
-                          </a:solidFill>
-                          <a:effectLst/>
-                          <a:latin typeface="Montserrat" panose="00000500000000000000" pitchFamily="2" charset="0"/>
-                          <a:ea typeface="+mn-ea"/>
-                          <a:cs typeface="+mn-cs"/>
-                        </a:rPr>
-                        <a:t>La empresa tiene buenas prestaciones y beneficios</a:t>
-                      </a:r>
+                      <a:endParaRPr lang="es-MX" sz="1400" b="0" i="0" u="none" strike="noStrike" kern="1200">
+                        <a:solidFill>
+                          <a:srgbClr val="00B050"/>
+                        </a:solidFill>
+                        <a:effectLst/>
+                        <a:latin typeface="Montserrat" panose="00000500000000000000" pitchFamily="2" charset="0"/>
+                        <a:ea typeface="+mn-ea"/>
+                        <a:cs typeface="+mn-cs"/>
+                      </a:endParaRPr>
                     </a:p>
                   </a:txBody>
                   <a:tcPr marL="7620" marR="7620" marT="7620" marB="0" anchor="ctr">
@@ -36979,18 +35003,15 @@
                       <a:pPr marL="0" algn="ctr" defTabSz="918058" rtl="0" eaLnBrk="1" fontAlgn="b" latinLnBrk="0" hangingPunct="1">
                         <a:buNone/>
                       </a:pPr>
-                      <a:r>
-                        <a:rPr lang="es-MX" sz="1400" b="1" i="0" u="none" strike="noStrike" kern="1200">
-                          <a:solidFill>
-                            <a:srgbClr val="00B050"/>
-                          </a:solidFill>
-                          <a:effectLst/>
-                          <a:latin typeface="Montserrat" panose="00000500000000000000" pitchFamily="2" charset="0"/>
-                          <a:ea typeface="+mn-ea"/>
-                          <a:cs typeface="+mn-cs"/>
-                        </a:rPr>
-                        <a:t>2</a:t>
-                      </a:r>
+                      <a:endParaRPr lang="es-MX" sz="1400" b="1" i="0" u="none" strike="noStrike" kern="1200">
+                        <a:solidFill>
+                          <a:srgbClr val="00B050"/>
+                        </a:solidFill>
+                        <a:effectLst/>
+                        <a:latin typeface="Montserrat" panose="00000500000000000000" pitchFamily="2" charset="0"/>
+                        <a:ea typeface="+mn-ea"/>
+                        <a:cs typeface="+mn-cs"/>
+                      </a:endParaRPr>
                     </a:p>
                   </a:txBody>
                   <a:tcPr marL="7620" marR="7620" marT="7620" marB="0" anchor="ctr">
@@ -37049,20 +35070,17 @@
                       <a:pPr algn="ctr" fontAlgn="b">
                         <a:buNone/>
                       </a:pPr>
-                      <a:r>
-                        <a:rPr lang="es-MX" sz="1400" b="1" i="0" u="none" strike="noStrike" kern="1200" dirty="0">
-                          <a:solidFill>
-                            <a:schemeClr val="bg1">
-                              <a:lumMod val="50000"/>
-                            </a:schemeClr>
-                          </a:solidFill>
-                          <a:effectLst/>
-                          <a:latin typeface="Montserrat" panose="00000500000000000000" pitchFamily="2" charset="0"/>
-                          <a:ea typeface="+mn-ea"/>
-                          <a:cs typeface="Calibri" panose="020F0502020204030204" pitchFamily="34" charset="0"/>
-                        </a:rPr>
-                        <a:t>Compensación</a:t>
-                      </a:r>
+                      <a:endParaRPr lang="es-MX" sz="1400" b="1" i="0" u="none" strike="noStrike" kern="1200" dirty="0">
+                        <a:solidFill>
+                          <a:schemeClr val="bg1">
+                            <a:lumMod val="50000"/>
+                          </a:schemeClr>
+                        </a:solidFill>
+                        <a:effectLst/>
+                        <a:latin typeface="Montserrat" panose="00000500000000000000" pitchFamily="2" charset="0"/>
+                        <a:ea typeface="+mn-ea"/>
+                        <a:cs typeface="Calibri" panose="020F0502020204030204" pitchFamily="34" charset="0"/>
+                      </a:endParaRPr>
                     </a:p>
                   </a:txBody>
                   <a:tcPr marL="7620" marR="7620" marT="7620" marB="0" anchor="ctr">
@@ -37128,18 +35146,15 @@
                       <a:pPr algn="l" fontAlgn="b">
                         <a:buNone/>
                       </a:pPr>
-                      <a:r>
-                        <a:rPr lang="es-MX" sz="1400" b="0" i="0" u="none" strike="noStrike" kern="1200" dirty="0">
-                          <a:solidFill>
-                            <a:srgbClr val="FF0000"/>
-                          </a:solidFill>
-                          <a:effectLst/>
-                          <a:latin typeface="Montserrat" panose="00000500000000000000" pitchFamily="2" charset="0"/>
-                          <a:ea typeface="+mn-ea"/>
-                          <a:cs typeface="+mn-cs"/>
-                        </a:rPr>
-                        <a:t>No hay home office</a:t>
-                      </a:r>
+                      <a:endParaRPr lang="es-MX" sz="1400" b="0" i="0" u="none" strike="noStrike" kern="1200" dirty="0">
+                        <a:solidFill>
+                          <a:srgbClr val="FF0000"/>
+                        </a:solidFill>
+                        <a:effectLst/>
+                        <a:latin typeface="Montserrat" panose="00000500000000000000" pitchFamily="2" charset="0"/>
+                        <a:ea typeface="+mn-ea"/>
+                        <a:cs typeface="+mn-cs"/>
+                      </a:endParaRPr>
                     </a:p>
                   </a:txBody>
                   <a:tcPr marL="7620" marR="7620" marT="7620" marB="0" anchor="ctr">
@@ -37197,18 +35212,15 @@
                       <a:pPr marL="0" algn="ctr" defTabSz="918058" rtl="0" eaLnBrk="1" fontAlgn="b" latinLnBrk="0" hangingPunct="1">
                         <a:buNone/>
                       </a:pPr>
-                      <a:r>
-                        <a:rPr lang="es-MX" sz="1400" b="1" i="0" u="none" strike="noStrike" kern="1200" dirty="0">
-                          <a:solidFill>
-                            <a:srgbClr val="FF0000"/>
-                          </a:solidFill>
-                          <a:effectLst/>
-                          <a:latin typeface="Montserrat" panose="00000500000000000000" pitchFamily="2" charset="0"/>
-                          <a:ea typeface="+mn-ea"/>
-                          <a:cs typeface="+mn-cs"/>
-                        </a:rPr>
-                        <a:t>1</a:t>
-                      </a:r>
+                      <a:endParaRPr lang="es-MX" sz="1400" b="1" i="0" u="none" strike="noStrike" kern="1200" dirty="0">
+                        <a:solidFill>
+                          <a:srgbClr val="FF0000"/>
+                        </a:solidFill>
+                        <a:effectLst/>
+                        <a:latin typeface="Montserrat" panose="00000500000000000000" pitchFamily="2" charset="0"/>
+                        <a:ea typeface="+mn-ea"/>
+                        <a:cs typeface="+mn-cs"/>
+                      </a:endParaRPr>
                     </a:p>
                   </a:txBody>
                   <a:tcPr marL="7620" marR="7620" marT="7620" marB="0" anchor="ctr">
@@ -37267,20 +35279,17 @@
                       <a:pPr algn="ctr" fontAlgn="b">
                         <a:buNone/>
                       </a:pPr>
-                      <a:r>
-                        <a:rPr lang="es-MX" sz="1400" b="1" i="0" u="none" strike="noStrike" kern="1200" dirty="0">
-                          <a:solidFill>
-                            <a:schemeClr val="bg1">
-                              <a:lumMod val="50000"/>
-                            </a:schemeClr>
-                          </a:solidFill>
-                          <a:effectLst/>
-                          <a:latin typeface="Montserrat" panose="00000500000000000000" pitchFamily="2" charset="0"/>
-                          <a:ea typeface="+mn-ea"/>
-                          <a:cs typeface="Calibri" panose="020F0502020204030204" pitchFamily="34" charset="0"/>
-                        </a:rPr>
-                        <a:t>Condiciones de Trabajo</a:t>
-                      </a:r>
+                      <a:endParaRPr lang="es-MX" sz="1400" b="1" i="0" u="none" strike="noStrike" kern="1200" dirty="0">
+                        <a:solidFill>
+                          <a:schemeClr val="bg1">
+                            <a:lumMod val="50000"/>
+                          </a:schemeClr>
+                        </a:solidFill>
+                        <a:effectLst/>
+                        <a:latin typeface="Montserrat" panose="00000500000000000000" pitchFamily="2" charset="0"/>
+                        <a:ea typeface="+mn-ea"/>
+                        <a:cs typeface="Calibri" panose="020F0502020204030204" pitchFamily="34" charset="0"/>
+                      </a:endParaRPr>
                     </a:p>
                   </a:txBody>
                   <a:tcPr marL="7620" marR="7620" marT="7620" marB="0" anchor="ctr">
@@ -37346,18 +35355,15 @@
                       <a:pPr algn="l" fontAlgn="b">
                         <a:buNone/>
                       </a:pPr>
-                      <a:r>
-                        <a:rPr lang="es-MX" sz="1400" b="0" i="0" u="none" strike="noStrike" kern="1200" dirty="0">
-                          <a:solidFill>
-                            <a:srgbClr val="FF0000"/>
-                          </a:solidFill>
-                          <a:effectLst/>
-                          <a:latin typeface="Montserrat" panose="00000500000000000000" pitchFamily="2" charset="0"/>
-                          <a:ea typeface="+mn-ea"/>
-                          <a:cs typeface="+mn-cs"/>
-                        </a:rPr>
-                        <a:t>Distribución injusta de cargas de trabajo</a:t>
-                      </a:r>
+                      <a:endParaRPr lang="es-MX" sz="1400" b="0" i="0" u="none" strike="noStrike" kern="1200" dirty="0">
+                        <a:solidFill>
+                          <a:srgbClr val="FF0000"/>
+                        </a:solidFill>
+                        <a:effectLst/>
+                        <a:latin typeface="Montserrat" panose="00000500000000000000" pitchFamily="2" charset="0"/>
+                        <a:ea typeface="+mn-ea"/>
+                        <a:cs typeface="+mn-cs"/>
+                      </a:endParaRPr>
                     </a:p>
                   </a:txBody>
                   <a:tcPr marL="7620" marR="7620" marT="7620" marB="0" anchor="ctr">
@@ -37415,18 +35421,15 @@
                       <a:pPr marL="0" algn="ctr" defTabSz="918058" rtl="0" eaLnBrk="1" fontAlgn="b" latinLnBrk="0" hangingPunct="1">
                         <a:buNone/>
                       </a:pPr>
-                      <a:r>
-                        <a:rPr lang="es-MX" sz="1400" b="1" i="0" u="none" strike="noStrike" kern="1200" dirty="0">
-                          <a:solidFill>
-                            <a:srgbClr val="FF0000"/>
-                          </a:solidFill>
-                          <a:effectLst/>
-                          <a:latin typeface="Montserrat" panose="00000500000000000000" pitchFamily="2" charset="0"/>
-                          <a:ea typeface="+mn-ea"/>
-                          <a:cs typeface="+mn-cs"/>
-                        </a:rPr>
-                        <a:t>1</a:t>
-                      </a:r>
+                      <a:endParaRPr lang="es-MX" sz="1400" b="1" i="0" u="none" strike="noStrike" kern="1200" dirty="0">
+                        <a:solidFill>
+                          <a:srgbClr val="FF0000"/>
+                        </a:solidFill>
+                        <a:effectLst/>
+                        <a:latin typeface="Montserrat" panose="00000500000000000000" pitchFamily="2" charset="0"/>
+                        <a:ea typeface="+mn-ea"/>
+                        <a:cs typeface="+mn-cs"/>
+                      </a:endParaRPr>
                     </a:p>
                   </a:txBody>
                   <a:tcPr marL="7620" marR="7620" marT="7620" marB="0" anchor="ctr">
@@ -37485,20 +35488,17 @@
                       <a:pPr algn="ctr" fontAlgn="b">
                         <a:buNone/>
                       </a:pPr>
-                      <a:r>
-                        <a:rPr lang="es-MX" sz="1400" b="1" i="0" u="none" strike="noStrike" kern="1200" dirty="0">
-                          <a:solidFill>
-                            <a:schemeClr val="bg1">
-                              <a:lumMod val="50000"/>
-                            </a:schemeClr>
-                          </a:solidFill>
-                          <a:effectLst/>
-                          <a:latin typeface="Montserrat" panose="00000500000000000000" pitchFamily="2" charset="0"/>
-                          <a:ea typeface="+mn-ea"/>
-                          <a:cs typeface="Calibri" panose="020F0502020204030204" pitchFamily="34" charset="0"/>
-                        </a:rPr>
-                        <a:t>Liderazgo</a:t>
-                      </a:r>
+                      <a:endParaRPr lang="es-MX" sz="1400" b="1" i="0" u="none" strike="noStrike" kern="1200" dirty="0">
+                        <a:solidFill>
+                          <a:schemeClr val="bg1">
+                            <a:lumMod val="50000"/>
+                          </a:schemeClr>
+                        </a:solidFill>
+                        <a:effectLst/>
+                        <a:latin typeface="Montserrat" panose="00000500000000000000" pitchFamily="2" charset="0"/>
+                        <a:ea typeface="+mn-ea"/>
+                        <a:cs typeface="Calibri" panose="020F0502020204030204" pitchFamily="34" charset="0"/>
+                      </a:endParaRPr>
                     </a:p>
                   </a:txBody>
                   <a:tcPr marL="7620" marR="7620" marT="7620" marB="0" anchor="ctr">
@@ -39081,7 +37081,7 @@
           <p:nvPr>
             <p:extLst>
               <p:ext uri="{D42A27DB-BD31-4B8C-83A1-F6EECF244321}">
-                <p14:modId xmlns:p14="http://schemas.microsoft.com/office/powerpoint/2010/main" val="587315748"/>
+                <p14:modId xmlns:p14="http://schemas.microsoft.com/office/powerpoint/2010/main" val="1324617695"/>
               </p:ext>
             </p:extLst>
           </p:nvPr>
@@ -39339,18 +37339,15 @@
                       <a:pPr algn="l" fontAlgn="b">
                         <a:buNone/>
                       </a:pPr>
-                      <a:r>
-                        <a:rPr lang="es-MX" sz="1400" b="0" i="0" u="none" strike="noStrike" kern="1200" dirty="0">
-                          <a:solidFill>
-                            <a:srgbClr val="FF0000"/>
-                          </a:solidFill>
-                          <a:effectLst/>
-                          <a:latin typeface="Montserrat" panose="00000500000000000000" pitchFamily="2" charset="0"/>
-                          <a:ea typeface="+mn-ea"/>
-                          <a:cs typeface="+mn-cs"/>
-                        </a:rPr>
-                        <a:t>El sueldo es poco</a:t>
-                      </a:r>
+                      <a:endParaRPr lang="es-MX" sz="1400" b="0" i="0" u="none" strike="noStrike" kern="1200" dirty="0">
+                        <a:solidFill>
+                          <a:srgbClr val="FF0000"/>
+                        </a:solidFill>
+                        <a:effectLst/>
+                        <a:latin typeface="Montserrat" panose="00000500000000000000" pitchFamily="2" charset="0"/>
+                        <a:ea typeface="+mn-ea"/>
+                        <a:cs typeface="+mn-cs"/>
+                      </a:endParaRPr>
                     </a:p>
                   </a:txBody>
                   <a:tcPr marL="7620" marR="7620" marT="7620" marB="0" anchor="ctr">
@@ -39408,18 +37405,15 @@
                       <a:pPr marL="0" algn="ctr" defTabSz="918058" rtl="0" eaLnBrk="1" fontAlgn="b" latinLnBrk="0" hangingPunct="1">
                         <a:buNone/>
                       </a:pPr>
-                      <a:r>
-                        <a:rPr lang="es-MX" sz="1400" b="1" i="0" u="none" strike="noStrike" kern="1200" dirty="0">
-                          <a:solidFill>
-                            <a:srgbClr val="FF0000"/>
-                          </a:solidFill>
-                          <a:effectLst/>
-                          <a:latin typeface="Montserrat" panose="00000500000000000000" pitchFamily="2" charset="0"/>
-                          <a:ea typeface="+mn-ea"/>
-                          <a:cs typeface="+mn-cs"/>
-                        </a:rPr>
-                        <a:t>1</a:t>
-                      </a:r>
+                      <a:endParaRPr lang="es-MX" sz="1400" b="1" i="0" u="none" strike="noStrike" kern="1200" dirty="0">
+                        <a:solidFill>
+                          <a:srgbClr val="FF0000"/>
+                        </a:solidFill>
+                        <a:effectLst/>
+                        <a:latin typeface="Montserrat" panose="00000500000000000000" pitchFamily="2" charset="0"/>
+                        <a:ea typeface="+mn-ea"/>
+                        <a:cs typeface="+mn-cs"/>
+                      </a:endParaRPr>
                     </a:p>
                   </a:txBody>
                   <a:tcPr marL="7620" marR="7620" marT="7620" marB="0" anchor="ctr">
@@ -39478,20 +37472,17 @@
                       <a:pPr algn="ctr" fontAlgn="b">
                         <a:buNone/>
                       </a:pPr>
-                      <a:r>
-                        <a:rPr lang="es-MX" sz="1400" b="1" i="0" u="none" strike="noStrike" kern="1200" dirty="0">
-                          <a:solidFill>
-                            <a:schemeClr val="bg1">
-                              <a:lumMod val="50000"/>
-                            </a:schemeClr>
-                          </a:solidFill>
-                          <a:effectLst/>
-                          <a:latin typeface="Montserrat" panose="00000500000000000000" pitchFamily="2" charset="0"/>
-                          <a:ea typeface="+mn-ea"/>
-                          <a:cs typeface="Calibri" panose="020F0502020204030204" pitchFamily="34" charset="0"/>
-                        </a:rPr>
-                        <a:t>Compensación</a:t>
-                      </a:r>
+                      <a:endParaRPr lang="es-MX" sz="1400" b="1" i="0" u="none" strike="noStrike" kern="1200" dirty="0">
+                        <a:solidFill>
+                          <a:schemeClr val="bg1">
+                            <a:lumMod val="50000"/>
+                          </a:schemeClr>
+                        </a:solidFill>
+                        <a:effectLst/>
+                        <a:latin typeface="Montserrat" panose="00000500000000000000" pitchFamily="2" charset="0"/>
+                        <a:ea typeface="+mn-ea"/>
+                        <a:cs typeface="Calibri" panose="020F0502020204030204" pitchFamily="34" charset="0"/>
+                      </a:endParaRPr>
                     </a:p>
                   </a:txBody>
                   <a:tcPr marL="7620" marR="7620" marT="7620" marB="0" anchor="ctr">
@@ -39557,18 +37548,15 @@
                       <a:pPr algn="l" fontAlgn="b">
                         <a:buNone/>
                       </a:pPr>
-                      <a:r>
-                        <a:rPr lang="es-MX" sz="1400" b="0" i="0" u="none" strike="noStrike" kern="1200" dirty="0">
-                          <a:solidFill>
-                            <a:srgbClr val="00B050"/>
-                          </a:solidFill>
-                          <a:effectLst/>
-                          <a:latin typeface="Montserrat" panose="00000500000000000000" pitchFamily="2" charset="0"/>
-                          <a:ea typeface="+mn-ea"/>
-                          <a:cs typeface="+mn-cs"/>
-                        </a:rPr>
-                        <a:t>Estoy orgulloso de pertenecer al grupo /Es una buena empresa /recomendable</a:t>
-                      </a:r>
+                      <a:endParaRPr lang="es-MX" sz="1400" b="0" i="0" u="none" strike="noStrike" kern="1200" dirty="0">
+                        <a:solidFill>
+                          <a:srgbClr val="00B050"/>
+                        </a:solidFill>
+                        <a:effectLst/>
+                        <a:latin typeface="Montserrat" panose="00000500000000000000" pitchFamily="2" charset="0"/>
+                        <a:ea typeface="+mn-ea"/>
+                        <a:cs typeface="+mn-cs"/>
+                      </a:endParaRPr>
                     </a:p>
                   </a:txBody>
                   <a:tcPr marL="7620" marR="7620" marT="7620" marB="0" anchor="ctr">
@@ -39626,18 +37614,15 @@
                       <a:pPr marL="0" algn="ctr" defTabSz="918058" rtl="0" eaLnBrk="1" fontAlgn="b" latinLnBrk="0" hangingPunct="1">
                         <a:buNone/>
                       </a:pPr>
-                      <a:r>
-                        <a:rPr lang="es-MX" sz="1400" b="1" i="0" u="none" strike="noStrike" kern="1200" dirty="0">
-                          <a:solidFill>
-                            <a:srgbClr val="00B050"/>
-                          </a:solidFill>
-                          <a:effectLst/>
-                          <a:latin typeface="Montserrat" panose="00000500000000000000" pitchFamily="2" charset="0"/>
-                          <a:ea typeface="+mn-ea"/>
-                          <a:cs typeface="+mn-cs"/>
-                        </a:rPr>
-                        <a:t>1</a:t>
-                      </a:r>
+                      <a:endParaRPr lang="es-MX" sz="1400" b="1" i="0" u="none" strike="noStrike" kern="1200" dirty="0">
+                        <a:solidFill>
+                          <a:srgbClr val="00B050"/>
+                        </a:solidFill>
+                        <a:effectLst/>
+                        <a:latin typeface="Montserrat" panose="00000500000000000000" pitchFamily="2" charset="0"/>
+                        <a:ea typeface="+mn-ea"/>
+                        <a:cs typeface="+mn-cs"/>
+                      </a:endParaRPr>
                     </a:p>
                   </a:txBody>
                   <a:tcPr marL="7620" marR="7620" marT="7620" marB="0" anchor="ctr">
@@ -39696,20 +37681,17 @@
                       <a:pPr algn="ctr" fontAlgn="b">
                         <a:buNone/>
                       </a:pPr>
-                      <a:r>
-                        <a:rPr lang="es-MX" sz="1400" b="1" i="0" u="none" strike="noStrike" kern="1200" dirty="0">
-                          <a:solidFill>
-                            <a:schemeClr val="bg1">
-                              <a:lumMod val="50000"/>
-                            </a:schemeClr>
-                          </a:solidFill>
-                          <a:effectLst/>
-                          <a:latin typeface="Montserrat" panose="00000500000000000000" pitchFamily="2" charset="0"/>
-                          <a:ea typeface="+mn-ea"/>
-                          <a:cs typeface="Calibri" panose="020F0502020204030204" pitchFamily="34" charset="0"/>
-                        </a:rPr>
-                        <a:t>Imagen de la empresa</a:t>
-                      </a:r>
+                      <a:endParaRPr lang="es-MX" sz="1400" b="1" i="0" u="none" strike="noStrike" kern="1200" dirty="0">
+                        <a:solidFill>
+                          <a:schemeClr val="bg1">
+                            <a:lumMod val="50000"/>
+                          </a:schemeClr>
+                        </a:solidFill>
+                        <a:effectLst/>
+                        <a:latin typeface="Montserrat" panose="00000500000000000000" pitchFamily="2" charset="0"/>
+                        <a:ea typeface="+mn-ea"/>
+                        <a:cs typeface="Calibri" panose="020F0502020204030204" pitchFamily="34" charset="0"/>
+                      </a:endParaRPr>
                     </a:p>
                   </a:txBody>
                   <a:tcPr marL="7620" marR="7620" marT="7620" marB="0" anchor="ctr">
@@ -39775,18 +37757,15 @@
                       <a:pPr algn="l" fontAlgn="b">
                         <a:buNone/>
                       </a:pPr>
-                      <a:r>
-                        <a:rPr lang="es-MX" sz="1400" b="0" i="0" u="none" strike="noStrike" kern="1200" dirty="0">
-                          <a:solidFill>
-                            <a:srgbClr val="FF0000"/>
-                          </a:solidFill>
-                          <a:effectLst/>
-                          <a:latin typeface="Montserrat" panose="00000500000000000000" pitchFamily="2" charset="0"/>
-                          <a:ea typeface="+mn-ea"/>
-                          <a:cs typeface="+mn-cs"/>
-                        </a:rPr>
-                        <a:t>Inestabilidad laboral / amenazas de despido / alta rotación de personal</a:t>
-                      </a:r>
+                      <a:endParaRPr lang="es-MX" sz="1400" b="0" i="0" u="none" strike="noStrike" kern="1200" dirty="0">
+                        <a:solidFill>
+                          <a:srgbClr val="FF0000"/>
+                        </a:solidFill>
+                        <a:effectLst/>
+                        <a:latin typeface="Montserrat" panose="00000500000000000000" pitchFamily="2" charset="0"/>
+                        <a:ea typeface="+mn-ea"/>
+                        <a:cs typeface="+mn-cs"/>
+                      </a:endParaRPr>
                     </a:p>
                   </a:txBody>
                   <a:tcPr marL="7620" marR="7620" marT="7620" marB="0" anchor="ctr">
@@ -39844,18 +37823,15 @@
                       <a:pPr marL="0" algn="ctr" defTabSz="918058" rtl="0" eaLnBrk="1" fontAlgn="b" latinLnBrk="0" hangingPunct="1">
                         <a:buNone/>
                       </a:pPr>
-                      <a:r>
-                        <a:rPr lang="es-MX" sz="1400" b="1" i="0" u="none" strike="noStrike" kern="1200" dirty="0">
-                          <a:solidFill>
-                            <a:srgbClr val="FF0000"/>
-                          </a:solidFill>
-                          <a:effectLst/>
-                          <a:latin typeface="Montserrat" panose="00000500000000000000" pitchFamily="2" charset="0"/>
-                          <a:ea typeface="+mn-ea"/>
-                          <a:cs typeface="+mn-cs"/>
-                        </a:rPr>
-                        <a:t>1</a:t>
-                      </a:r>
+                      <a:endParaRPr lang="es-MX" sz="1400" b="1" i="0" u="none" strike="noStrike" kern="1200" dirty="0">
+                        <a:solidFill>
+                          <a:srgbClr val="FF0000"/>
+                        </a:solidFill>
+                        <a:effectLst/>
+                        <a:latin typeface="Montserrat" panose="00000500000000000000" pitchFamily="2" charset="0"/>
+                        <a:ea typeface="+mn-ea"/>
+                        <a:cs typeface="+mn-cs"/>
+                      </a:endParaRPr>
                     </a:p>
                   </a:txBody>
                   <a:tcPr marL="7620" marR="7620" marT="7620" marB="0" anchor="ctr">
@@ -39914,20 +37890,17 @@
                       <a:pPr algn="ctr" fontAlgn="b">
                         <a:buNone/>
                       </a:pPr>
-                      <a:r>
-                        <a:rPr lang="es-MX" sz="1400" b="1" i="0" u="none" strike="noStrike" kern="1200">
-                          <a:solidFill>
-                            <a:schemeClr val="bg1">
-                              <a:lumMod val="50000"/>
-                            </a:schemeClr>
-                          </a:solidFill>
-                          <a:effectLst/>
-                          <a:latin typeface="Montserrat" panose="00000500000000000000" pitchFamily="2" charset="0"/>
-                          <a:ea typeface="+mn-ea"/>
-                          <a:cs typeface="Calibri" panose="020F0502020204030204" pitchFamily="34" charset="0"/>
-                        </a:rPr>
-                        <a:t>Desarrollo y crecimiento</a:t>
-                      </a:r>
+                      <a:endParaRPr lang="es-MX" sz="1400" b="1" i="0" u="none" strike="noStrike" kern="1200">
+                        <a:solidFill>
+                          <a:schemeClr val="bg1">
+                            <a:lumMod val="50000"/>
+                          </a:schemeClr>
+                        </a:solidFill>
+                        <a:effectLst/>
+                        <a:latin typeface="Montserrat" panose="00000500000000000000" pitchFamily="2" charset="0"/>
+                        <a:ea typeface="+mn-ea"/>
+                        <a:cs typeface="Calibri" panose="020F0502020204030204" pitchFamily="34" charset="0"/>
+                      </a:endParaRPr>
                     </a:p>
                   </a:txBody>
                   <a:tcPr marL="7620" marR="7620" marT="7620" marB="0" anchor="ctr">
@@ -39993,18 +37966,15 @@
                       <a:pPr algn="l" fontAlgn="b">
                         <a:buNone/>
                       </a:pPr>
-                      <a:r>
-                        <a:rPr lang="es-MX" sz="1400" b="0" i="0" u="none" strike="noStrike" kern="1200" dirty="0">
-                          <a:solidFill>
-                            <a:srgbClr val="FF0000"/>
-                          </a:solidFill>
-                          <a:effectLst/>
-                          <a:latin typeface="Montserrat" panose="00000500000000000000" pitchFamily="2" charset="0"/>
-                          <a:ea typeface="+mn-ea"/>
-                          <a:cs typeface="+mn-cs"/>
-                        </a:rPr>
-                        <a:t>La empresa no da utilidades / pocas utilidades</a:t>
-                      </a:r>
+                      <a:endParaRPr lang="es-MX" sz="1400" b="0" i="0" u="none" strike="noStrike" kern="1200" dirty="0">
+                        <a:solidFill>
+                          <a:srgbClr val="FF0000"/>
+                        </a:solidFill>
+                        <a:effectLst/>
+                        <a:latin typeface="Montserrat" panose="00000500000000000000" pitchFamily="2" charset="0"/>
+                        <a:ea typeface="+mn-ea"/>
+                        <a:cs typeface="+mn-cs"/>
+                      </a:endParaRPr>
                     </a:p>
                   </a:txBody>
                   <a:tcPr marL="7620" marR="7620" marT="7620" marB="0" anchor="ctr">
@@ -40062,18 +38032,15 @@
                       <a:pPr marL="0" algn="ctr" defTabSz="918058" rtl="0" eaLnBrk="1" fontAlgn="b" latinLnBrk="0" hangingPunct="1">
                         <a:buNone/>
                       </a:pPr>
-                      <a:r>
-                        <a:rPr lang="es-MX" sz="1400" b="1" i="0" u="none" strike="noStrike" kern="1200">
-                          <a:solidFill>
-                            <a:srgbClr val="FF0000"/>
-                          </a:solidFill>
-                          <a:effectLst/>
-                          <a:latin typeface="Montserrat" panose="00000500000000000000" pitchFamily="2" charset="0"/>
-                          <a:ea typeface="+mn-ea"/>
-                          <a:cs typeface="+mn-cs"/>
-                        </a:rPr>
-                        <a:t>1</a:t>
-                      </a:r>
+                      <a:endParaRPr lang="es-MX" sz="1400" b="1" i="0" u="none" strike="noStrike" kern="1200">
+                        <a:solidFill>
+                          <a:srgbClr val="FF0000"/>
+                        </a:solidFill>
+                        <a:effectLst/>
+                        <a:latin typeface="Montserrat" panose="00000500000000000000" pitchFamily="2" charset="0"/>
+                        <a:ea typeface="+mn-ea"/>
+                        <a:cs typeface="+mn-cs"/>
+                      </a:endParaRPr>
                     </a:p>
                   </a:txBody>
                   <a:tcPr marL="7620" marR="7620" marT="7620" marB="0" anchor="ctr">
@@ -40132,20 +38099,17 @@
                       <a:pPr algn="ctr" fontAlgn="b">
                         <a:buNone/>
                       </a:pPr>
-                      <a:r>
-                        <a:rPr lang="es-MX" sz="1400" b="1" i="0" u="none" strike="noStrike" kern="1200" dirty="0">
-                          <a:solidFill>
-                            <a:schemeClr val="bg1">
-                              <a:lumMod val="50000"/>
-                            </a:schemeClr>
-                          </a:solidFill>
-                          <a:effectLst/>
-                          <a:latin typeface="Montserrat" panose="00000500000000000000" pitchFamily="2" charset="0"/>
-                          <a:ea typeface="+mn-ea"/>
-                          <a:cs typeface="Calibri" panose="020F0502020204030204" pitchFamily="34" charset="0"/>
-                        </a:rPr>
-                        <a:t>Compensación</a:t>
-                      </a:r>
+                      <a:endParaRPr lang="es-MX" sz="1400" b="1" i="0" u="none" strike="noStrike" kern="1200" dirty="0">
+                        <a:solidFill>
+                          <a:schemeClr val="bg1">
+                            <a:lumMod val="50000"/>
+                          </a:schemeClr>
+                        </a:solidFill>
+                        <a:effectLst/>
+                        <a:latin typeface="Montserrat" panose="00000500000000000000" pitchFamily="2" charset="0"/>
+                        <a:ea typeface="+mn-ea"/>
+                        <a:cs typeface="Calibri" panose="020F0502020204030204" pitchFamily="34" charset="0"/>
+                      </a:endParaRPr>
                     </a:p>
                   </a:txBody>
                   <a:tcPr marL="7620" marR="7620" marT="7620" marB="0" anchor="ctr">
@@ -40211,18 +38175,15 @@
                       <a:pPr algn="l" fontAlgn="b">
                         <a:buNone/>
                       </a:pPr>
-                      <a:r>
-                        <a:rPr lang="es-MX" sz="1400" b="0" i="0" u="none" strike="noStrike" kern="1200" dirty="0">
-                          <a:solidFill>
-                            <a:srgbClr val="FF0000"/>
-                          </a:solidFill>
-                          <a:effectLst/>
-                          <a:latin typeface="Montserrat" panose="00000500000000000000" pitchFamily="2" charset="0"/>
-                          <a:ea typeface="+mn-ea"/>
-                          <a:cs typeface="+mn-cs"/>
-                        </a:rPr>
-                        <a:t>No cumplen lo que promete</a:t>
-                      </a:r>
+                      <a:endParaRPr lang="es-MX" sz="1400" b="0" i="0" u="none" strike="noStrike" kern="1200" dirty="0">
+                        <a:solidFill>
+                          <a:srgbClr val="FF0000"/>
+                        </a:solidFill>
+                        <a:effectLst/>
+                        <a:latin typeface="Montserrat" panose="00000500000000000000" pitchFamily="2" charset="0"/>
+                        <a:ea typeface="+mn-ea"/>
+                        <a:cs typeface="+mn-cs"/>
+                      </a:endParaRPr>
                     </a:p>
                   </a:txBody>
                   <a:tcPr marL="7620" marR="7620" marT="7620" marB="0" anchor="ctr">
@@ -40280,18 +38241,15 @@
                       <a:pPr marL="0" algn="ctr" defTabSz="918058" rtl="0" eaLnBrk="1" fontAlgn="b" latinLnBrk="0" hangingPunct="1">
                         <a:buNone/>
                       </a:pPr>
-                      <a:r>
-                        <a:rPr lang="es-MX" sz="1400" b="1" i="0" u="none" strike="noStrike" kern="1200" dirty="0">
-                          <a:solidFill>
-                            <a:srgbClr val="FF0000"/>
-                          </a:solidFill>
-                          <a:effectLst/>
-                          <a:latin typeface="Montserrat" panose="00000500000000000000" pitchFamily="2" charset="0"/>
-                          <a:ea typeface="+mn-ea"/>
-                          <a:cs typeface="+mn-cs"/>
-                        </a:rPr>
-                        <a:t>1</a:t>
-                      </a:r>
+                      <a:endParaRPr lang="es-MX" sz="1400" b="1" i="0" u="none" strike="noStrike" kern="1200" dirty="0">
+                        <a:solidFill>
+                          <a:srgbClr val="FF0000"/>
+                        </a:solidFill>
+                        <a:effectLst/>
+                        <a:latin typeface="Montserrat" panose="00000500000000000000" pitchFamily="2" charset="0"/>
+                        <a:ea typeface="+mn-ea"/>
+                        <a:cs typeface="+mn-cs"/>
+                      </a:endParaRPr>
                     </a:p>
                   </a:txBody>
                   <a:tcPr marL="7620" marR="7620" marT="7620" marB="0" anchor="ctr">
@@ -40350,20 +38308,17 @@
                       <a:pPr algn="ctr" fontAlgn="b">
                         <a:buNone/>
                       </a:pPr>
-                      <a:r>
-                        <a:rPr lang="es-MX" sz="1400" b="1" i="0" u="none" strike="noStrike" kern="1200" dirty="0">
-                          <a:solidFill>
-                            <a:schemeClr val="bg1">
-                              <a:lumMod val="50000"/>
-                            </a:schemeClr>
-                          </a:solidFill>
-                          <a:effectLst/>
-                          <a:latin typeface="Montserrat" panose="00000500000000000000" pitchFamily="2" charset="0"/>
-                          <a:ea typeface="+mn-ea"/>
-                          <a:cs typeface="Calibri" panose="020F0502020204030204" pitchFamily="34" charset="0"/>
-                        </a:rPr>
-                        <a:t>Políticas de la empresa</a:t>
-                      </a:r>
+                      <a:endParaRPr lang="es-MX" sz="1400" b="1" i="0" u="none" strike="noStrike" kern="1200" dirty="0">
+                        <a:solidFill>
+                          <a:schemeClr val="bg1">
+                            <a:lumMod val="50000"/>
+                          </a:schemeClr>
+                        </a:solidFill>
+                        <a:effectLst/>
+                        <a:latin typeface="Montserrat" panose="00000500000000000000" pitchFamily="2" charset="0"/>
+                        <a:ea typeface="+mn-ea"/>
+                        <a:cs typeface="Calibri" panose="020F0502020204030204" pitchFamily="34" charset="0"/>
+                      </a:endParaRPr>
                     </a:p>
                   </a:txBody>
                   <a:tcPr marL="7620" marR="7620" marT="7620" marB="0" anchor="ctr">
@@ -40429,18 +38384,15 @@
                       <a:pPr algn="l" fontAlgn="b">
                         <a:buNone/>
                       </a:pPr>
-                      <a:r>
-                        <a:rPr lang="es-MX" sz="1400" b="0" i="0" u="none" strike="noStrike" kern="1200" dirty="0">
-                          <a:solidFill>
-                            <a:srgbClr val="FF0000"/>
-                          </a:solidFill>
-                          <a:effectLst/>
-                          <a:latin typeface="Montserrat" panose="00000500000000000000" pitchFamily="2" charset="0"/>
-                          <a:ea typeface="+mn-ea"/>
-                          <a:cs typeface="+mn-cs"/>
-                        </a:rPr>
-                        <a:t>No hay home office</a:t>
-                      </a:r>
+                      <a:endParaRPr lang="es-MX" sz="1400" b="0" i="0" u="none" strike="noStrike" kern="1200" dirty="0">
+                        <a:solidFill>
+                          <a:srgbClr val="FF0000"/>
+                        </a:solidFill>
+                        <a:effectLst/>
+                        <a:latin typeface="Montserrat" panose="00000500000000000000" pitchFamily="2" charset="0"/>
+                        <a:ea typeface="+mn-ea"/>
+                        <a:cs typeface="+mn-cs"/>
+                      </a:endParaRPr>
                     </a:p>
                   </a:txBody>
                   <a:tcPr marL="7620" marR="7620" marT="7620" marB="0" anchor="ctr">
@@ -40498,18 +38450,15 @@
                       <a:pPr marL="0" algn="ctr" defTabSz="918058" rtl="0" eaLnBrk="1" fontAlgn="b" latinLnBrk="0" hangingPunct="1">
                         <a:buNone/>
                       </a:pPr>
-                      <a:r>
-                        <a:rPr lang="es-MX" sz="1400" b="1" i="0" u="none" strike="noStrike" kern="1200">
-                          <a:solidFill>
-                            <a:srgbClr val="FF0000"/>
-                          </a:solidFill>
-                          <a:effectLst/>
-                          <a:latin typeface="Montserrat" panose="00000500000000000000" pitchFamily="2" charset="0"/>
-                          <a:ea typeface="+mn-ea"/>
-                          <a:cs typeface="+mn-cs"/>
-                        </a:rPr>
-                        <a:t>1</a:t>
-                      </a:r>
+                      <a:endParaRPr lang="es-MX" sz="1400" b="1" i="0" u="none" strike="noStrike" kern="1200">
+                        <a:solidFill>
+                          <a:srgbClr val="FF0000"/>
+                        </a:solidFill>
+                        <a:effectLst/>
+                        <a:latin typeface="Montserrat" panose="00000500000000000000" pitchFamily="2" charset="0"/>
+                        <a:ea typeface="+mn-ea"/>
+                        <a:cs typeface="+mn-cs"/>
+                      </a:endParaRPr>
                     </a:p>
                   </a:txBody>
                   <a:tcPr marL="7620" marR="7620" marT="7620" marB="0" anchor="ctr">
@@ -40568,20 +38517,17 @@
                       <a:pPr algn="ctr" fontAlgn="b">
                         <a:buNone/>
                       </a:pPr>
-                      <a:r>
-                        <a:rPr lang="es-MX" sz="1400" b="1" i="0" u="none" strike="noStrike" kern="1200" dirty="0">
-                          <a:solidFill>
-                            <a:schemeClr val="bg1">
-                              <a:lumMod val="50000"/>
-                            </a:schemeClr>
-                          </a:solidFill>
-                          <a:effectLst/>
-                          <a:latin typeface="Montserrat" panose="00000500000000000000" pitchFamily="2" charset="0"/>
-                          <a:ea typeface="+mn-ea"/>
-                          <a:cs typeface="Calibri" panose="020F0502020204030204" pitchFamily="34" charset="0"/>
-                        </a:rPr>
-                        <a:t>Condiciones de Trabajo</a:t>
-                      </a:r>
+                      <a:endParaRPr lang="es-MX" sz="1400" b="1" i="0" u="none" strike="noStrike" kern="1200" dirty="0">
+                        <a:solidFill>
+                          <a:schemeClr val="bg1">
+                            <a:lumMod val="50000"/>
+                          </a:schemeClr>
+                        </a:solidFill>
+                        <a:effectLst/>
+                        <a:latin typeface="Montserrat" panose="00000500000000000000" pitchFamily="2" charset="0"/>
+                        <a:ea typeface="+mn-ea"/>
+                        <a:cs typeface="Calibri" panose="020F0502020204030204" pitchFamily="34" charset="0"/>
+                      </a:endParaRPr>
                     </a:p>
                   </a:txBody>
                   <a:tcPr marL="7620" marR="7620" marT="7620" marB="0" anchor="ctr">
@@ -40647,18 +38593,15 @@
                       <a:pPr algn="l" fontAlgn="b">
                         <a:buNone/>
                       </a:pPr>
-                      <a:r>
-                        <a:rPr lang="es-MX" sz="1400" b="0" i="0" u="none" strike="noStrike" kern="1200" dirty="0">
-                          <a:solidFill>
-                            <a:srgbClr val="FF0000"/>
-                          </a:solidFill>
-                          <a:effectLst/>
-                          <a:latin typeface="Montserrat" panose="00000500000000000000" pitchFamily="2" charset="0"/>
-                          <a:ea typeface="+mn-ea"/>
-                          <a:cs typeface="+mn-cs"/>
-                        </a:rPr>
-                        <a:t>No hay oportunidades de crecimiento</a:t>
-                      </a:r>
+                      <a:endParaRPr lang="es-MX" sz="1400" b="0" i="0" u="none" strike="noStrike" kern="1200" dirty="0">
+                        <a:solidFill>
+                          <a:srgbClr val="FF0000"/>
+                        </a:solidFill>
+                        <a:effectLst/>
+                        <a:latin typeface="Montserrat" panose="00000500000000000000" pitchFamily="2" charset="0"/>
+                        <a:ea typeface="+mn-ea"/>
+                        <a:cs typeface="+mn-cs"/>
+                      </a:endParaRPr>
                     </a:p>
                   </a:txBody>
                   <a:tcPr marL="7620" marR="7620" marT="7620" marB="0" anchor="ctr">
@@ -40716,18 +38659,15 @@
                       <a:pPr marL="0" algn="ctr" defTabSz="918058" rtl="0" eaLnBrk="1" fontAlgn="b" latinLnBrk="0" hangingPunct="1">
                         <a:buNone/>
                       </a:pPr>
-                      <a:r>
-                        <a:rPr lang="es-MX" sz="1400" b="1" i="0" u="none" strike="noStrike" kern="1200" dirty="0">
-                          <a:solidFill>
-                            <a:srgbClr val="FF0000"/>
-                          </a:solidFill>
-                          <a:effectLst/>
-                          <a:latin typeface="Montserrat" panose="00000500000000000000" pitchFamily="2" charset="0"/>
-                          <a:ea typeface="+mn-ea"/>
-                          <a:cs typeface="+mn-cs"/>
-                        </a:rPr>
-                        <a:t>1</a:t>
-                      </a:r>
+                      <a:endParaRPr lang="es-MX" sz="1400" b="1" i="0" u="none" strike="noStrike" kern="1200" dirty="0">
+                        <a:solidFill>
+                          <a:srgbClr val="FF0000"/>
+                        </a:solidFill>
+                        <a:effectLst/>
+                        <a:latin typeface="Montserrat" panose="00000500000000000000" pitchFamily="2" charset="0"/>
+                        <a:ea typeface="+mn-ea"/>
+                        <a:cs typeface="+mn-cs"/>
+                      </a:endParaRPr>
                     </a:p>
                   </a:txBody>
                   <a:tcPr marL="7620" marR="7620" marT="7620" marB="0" anchor="ctr">
@@ -40786,20 +38726,17 @@
                       <a:pPr algn="ctr" fontAlgn="b">
                         <a:buNone/>
                       </a:pPr>
-                      <a:r>
-                        <a:rPr lang="es-MX" sz="1400" b="1" i="0" u="none" strike="noStrike" kern="1200" dirty="0">
-                          <a:solidFill>
-                            <a:schemeClr val="bg1">
-                              <a:lumMod val="50000"/>
-                            </a:schemeClr>
-                          </a:solidFill>
-                          <a:effectLst/>
-                          <a:latin typeface="Montserrat" panose="00000500000000000000" pitchFamily="2" charset="0"/>
-                          <a:ea typeface="+mn-ea"/>
-                          <a:cs typeface="Calibri" panose="020F0502020204030204" pitchFamily="34" charset="0"/>
-                        </a:rPr>
-                        <a:t>Desarrollo y crecimiento</a:t>
-                      </a:r>
+                      <a:endParaRPr lang="es-MX" sz="1400" b="1" i="0" u="none" strike="noStrike" kern="1200" dirty="0">
+                        <a:solidFill>
+                          <a:schemeClr val="bg1">
+                            <a:lumMod val="50000"/>
+                          </a:schemeClr>
+                        </a:solidFill>
+                        <a:effectLst/>
+                        <a:latin typeface="Montserrat" panose="00000500000000000000" pitchFamily="2" charset="0"/>
+                        <a:ea typeface="+mn-ea"/>
+                        <a:cs typeface="Calibri" panose="020F0502020204030204" pitchFamily="34" charset="0"/>
+                      </a:endParaRPr>
                     </a:p>
                   </a:txBody>
                   <a:tcPr marL="7620" marR="7620" marT="7620" marB="0" anchor="ctr">
@@ -40865,18 +38802,15 @@
                       <a:pPr algn="l" fontAlgn="b">
                         <a:buNone/>
                       </a:pPr>
-                      <a:r>
-                        <a:rPr lang="es-MX" sz="1400" b="0" i="0" u="none" strike="noStrike" kern="1200" dirty="0">
-                          <a:solidFill>
-                            <a:srgbClr val="FF0000"/>
-                          </a:solidFill>
-                          <a:effectLst/>
-                          <a:latin typeface="Montserrat" panose="00000500000000000000" pitchFamily="2" charset="0"/>
-                          <a:ea typeface="+mn-ea"/>
-                          <a:cs typeface="+mn-cs"/>
-                        </a:rPr>
-                        <a:t>No hay suficientes prestaciones/beneficios</a:t>
-                      </a:r>
+                      <a:endParaRPr lang="es-MX" sz="1400" b="0" i="0" u="none" strike="noStrike" kern="1200" dirty="0">
+                        <a:solidFill>
+                          <a:srgbClr val="FF0000"/>
+                        </a:solidFill>
+                        <a:effectLst/>
+                        <a:latin typeface="Montserrat" panose="00000500000000000000" pitchFamily="2" charset="0"/>
+                        <a:ea typeface="+mn-ea"/>
+                        <a:cs typeface="+mn-cs"/>
+                      </a:endParaRPr>
                     </a:p>
                   </a:txBody>
                   <a:tcPr marL="7620" marR="7620" marT="7620" marB="0" anchor="ctr">
@@ -40934,18 +38868,15 @@
                       <a:pPr marL="0" algn="ctr" defTabSz="918058" rtl="0" eaLnBrk="1" fontAlgn="b" latinLnBrk="0" hangingPunct="1">
                         <a:buNone/>
                       </a:pPr>
-                      <a:r>
-                        <a:rPr lang="es-MX" sz="1400" b="1" i="0" u="none" strike="noStrike" kern="1200" dirty="0">
-                          <a:solidFill>
-                            <a:srgbClr val="FF0000"/>
-                          </a:solidFill>
-                          <a:effectLst/>
-                          <a:latin typeface="Montserrat" panose="00000500000000000000" pitchFamily="2" charset="0"/>
-                          <a:ea typeface="+mn-ea"/>
-                          <a:cs typeface="+mn-cs"/>
-                        </a:rPr>
-                        <a:t>1</a:t>
-                      </a:r>
+                      <a:endParaRPr lang="es-MX" sz="1400" b="1" i="0" u="none" strike="noStrike" kern="1200" dirty="0">
+                        <a:solidFill>
+                          <a:srgbClr val="FF0000"/>
+                        </a:solidFill>
+                        <a:effectLst/>
+                        <a:latin typeface="Montserrat" panose="00000500000000000000" pitchFamily="2" charset="0"/>
+                        <a:ea typeface="+mn-ea"/>
+                        <a:cs typeface="+mn-cs"/>
+                      </a:endParaRPr>
                     </a:p>
                   </a:txBody>
                   <a:tcPr marL="7620" marR="7620" marT="7620" marB="0" anchor="ctr">
@@ -41004,20 +38935,17 @@
                       <a:pPr algn="ctr" fontAlgn="b">
                         <a:buNone/>
                       </a:pPr>
-                      <a:r>
-                        <a:rPr lang="es-MX" sz="1400" b="1" i="0" u="none" strike="noStrike" kern="1200" dirty="0">
-                          <a:solidFill>
-                            <a:schemeClr val="bg1">
-                              <a:lumMod val="50000"/>
-                            </a:schemeClr>
-                          </a:solidFill>
-                          <a:effectLst/>
-                          <a:latin typeface="Montserrat" panose="00000500000000000000" pitchFamily="2" charset="0"/>
-                          <a:ea typeface="+mn-ea"/>
-                          <a:cs typeface="Calibri" panose="020F0502020204030204" pitchFamily="34" charset="0"/>
-                        </a:rPr>
-                        <a:t>Compensación</a:t>
-                      </a:r>
+                      <a:endParaRPr lang="es-MX" sz="1400" b="1" i="0" u="none" strike="noStrike" kern="1200" dirty="0">
+                        <a:solidFill>
+                          <a:schemeClr val="bg1">
+                            <a:lumMod val="50000"/>
+                          </a:schemeClr>
+                        </a:solidFill>
+                        <a:effectLst/>
+                        <a:latin typeface="Montserrat" panose="00000500000000000000" pitchFamily="2" charset="0"/>
+                        <a:ea typeface="+mn-ea"/>
+                        <a:cs typeface="Calibri" panose="020F0502020204030204" pitchFamily="34" charset="0"/>
+                      </a:endParaRPr>
                     </a:p>
                   </a:txBody>
                   <a:tcPr marL="7620" marR="7620" marT="7620" marB="0" anchor="ctr">
@@ -41083,18 +39011,15 @@
                       <a:pPr algn="l" fontAlgn="b">
                         <a:buNone/>
                       </a:pPr>
-                      <a:r>
-                        <a:rPr lang="es-MX" sz="1400" b="0" i="0" u="none" strike="noStrike" kern="1200" dirty="0">
-                          <a:solidFill>
-                            <a:srgbClr val="FF0000"/>
-                          </a:solidFill>
-                          <a:effectLst/>
-                          <a:latin typeface="Montserrat" panose="00000500000000000000" pitchFamily="2" charset="0"/>
-                          <a:ea typeface="+mn-ea"/>
-                          <a:cs typeface="+mn-cs"/>
-                        </a:rPr>
-                        <a:t>No se preocupan por sus colaboradores</a:t>
-                      </a:r>
+                      <a:endParaRPr lang="es-MX" sz="1400" b="0" i="0" u="none" strike="noStrike" kern="1200" dirty="0">
+                        <a:solidFill>
+                          <a:srgbClr val="FF0000"/>
+                        </a:solidFill>
+                        <a:effectLst/>
+                        <a:latin typeface="Montserrat" panose="00000500000000000000" pitchFamily="2" charset="0"/>
+                        <a:ea typeface="+mn-ea"/>
+                        <a:cs typeface="+mn-cs"/>
+                      </a:endParaRPr>
                     </a:p>
                   </a:txBody>
                   <a:tcPr marL="7620" marR="7620" marT="7620" marB="0" anchor="ctr">
@@ -41152,18 +39077,15 @@
                       <a:pPr marL="0" algn="ctr" defTabSz="918058" rtl="0" eaLnBrk="1" fontAlgn="b" latinLnBrk="0" hangingPunct="1">
                         <a:buNone/>
                       </a:pPr>
-                      <a:r>
-                        <a:rPr lang="es-MX" sz="1400" b="1" i="0" u="none" strike="noStrike" kern="1200" dirty="0">
-                          <a:solidFill>
-                            <a:srgbClr val="FF0000"/>
-                          </a:solidFill>
-                          <a:effectLst/>
-                          <a:latin typeface="Montserrat" panose="00000500000000000000" pitchFamily="2" charset="0"/>
-                          <a:ea typeface="+mn-ea"/>
-                          <a:cs typeface="+mn-cs"/>
-                        </a:rPr>
-                        <a:t>1</a:t>
-                      </a:r>
+                      <a:endParaRPr lang="es-MX" sz="1400" b="1" i="0" u="none" strike="noStrike" kern="1200" dirty="0">
+                        <a:solidFill>
+                          <a:srgbClr val="FF0000"/>
+                        </a:solidFill>
+                        <a:effectLst/>
+                        <a:latin typeface="Montserrat" panose="00000500000000000000" pitchFamily="2" charset="0"/>
+                        <a:ea typeface="+mn-ea"/>
+                        <a:cs typeface="+mn-cs"/>
+                      </a:endParaRPr>
                     </a:p>
                   </a:txBody>
                   <a:tcPr marL="7620" marR="7620" marT="7620" marB="0" anchor="ctr">
@@ -41222,20 +39144,17 @@
                       <a:pPr algn="ctr" fontAlgn="b">
                         <a:buNone/>
                       </a:pPr>
-                      <a:r>
-                        <a:rPr lang="es-MX" sz="1400" b="1" i="0" u="none" strike="noStrike" kern="1200" dirty="0">
-                          <a:solidFill>
-                            <a:schemeClr val="bg1">
-                              <a:lumMod val="50000"/>
-                            </a:schemeClr>
-                          </a:solidFill>
-                          <a:effectLst/>
-                          <a:latin typeface="Montserrat" panose="00000500000000000000" pitchFamily="2" charset="0"/>
-                          <a:ea typeface="+mn-ea"/>
-                          <a:cs typeface="Calibri" panose="020F0502020204030204" pitchFamily="34" charset="0"/>
-                        </a:rPr>
-                        <a:t>Apoyo al personal</a:t>
-                      </a:r>
+                      <a:endParaRPr lang="es-MX" sz="1400" b="1" i="0" u="none" strike="noStrike" kern="1200" dirty="0">
+                        <a:solidFill>
+                          <a:schemeClr val="bg1">
+                            <a:lumMod val="50000"/>
+                          </a:schemeClr>
+                        </a:solidFill>
+                        <a:effectLst/>
+                        <a:latin typeface="Montserrat" panose="00000500000000000000" pitchFamily="2" charset="0"/>
+                        <a:ea typeface="+mn-ea"/>
+                        <a:cs typeface="Calibri" panose="020F0502020204030204" pitchFamily="34" charset="0"/>
+                      </a:endParaRPr>
                     </a:p>
                   </a:txBody>
                   <a:tcPr marL="7620" marR="7620" marT="7620" marB="0" anchor="ctr">
